--- a/Presentacion_Microclusters_Marcha_Blanca.pptx
+++ b/Presentacion_Microclusters_Marcha_Blanca.pptx
@@ -18,6 +18,8 @@
     <p:sldId id="306" r:id="rId15"/>
     <p:sldId id="307" r:id="rId16"/>
     <p:sldId id="308" r:id="rId17"/>
+    <p:sldId id="309" r:id="rId18"/>
+    <p:sldId id="310" r:id="rId19"/>
   </p:sldIdLst>
   <p:sldSz cx="12192000" cy="6858000"/>
   <p:notesSz cx="6858000" cy="9144000"/>
@@ -638,6 +640,146 @@
           <a:lstStyle/>
           <a:p>
             <a:r>
+              <a:t>A nivel de calidad matemática, el modelo superó todas sus compuertas: confianza geométrica de 63%, apenas 14% de registros en frontera —muy por debajo del límite de alarma del 20%— y 100% de cobertura. Más aún: los 5 sub-espacios multi-zona tienen documentada una estabilidad bootstrap-ARI superior a 0.88 en réplicas al 80%, lo que garantiza reproducibilidad ante re-entrenamientos.</a:t>
+            </a:r>
+          </a:p>
+        </p:txBody>
+      </p:sp>
+      <p:sp>
+        <p:nvSpPr>
+          <p:cNvPr id="4" name="Slide Number Placeholder 3"/>
+          <p:cNvSpPr>
+            <a:spLocks noGrp="1"/>
+          </p:cNvSpPr>
+          <p:nvPr>
+            <p:ph type="sldNum" idx="5" sz="quarter"/>
+          </p:nvPr>
+        </p:nvSpPr>
+        <p:spPr/>
+      </p:sp>
+    </p:spTree>
+  </p:cSld>
+  <p:clrMapOvr>
+    <a:masterClrMapping/>
+  </p:clrMapOvr>
+</p:notes>
+</file>
+
+<file path=ppt/notesSlides/notesSlide11.xml><?xml version="1.0" encoding="utf-8"?>
+<p:notes xmlns:a="http://schemas.openxmlformats.org/drawingml/2006/main" xmlns:p="http://schemas.openxmlformats.org/presentationml/2006/main" xmlns:r="http://schemas.openxmlformats.org/officeDocument/2006/relationships">
+  <p:cSld>
+    <p:spTree>
+      <p:nvGrpSpPr>
+        <p:cNvPr id="1" name=""/>
+        <p:cNvGrpSpPr/>
+        <p:nvPr/>
+      </p:nvGrpSpPr>
+      <p:grpSpPr>
+        <a:xfrm>
+          <a:off x="0" y="0"/>
+          <a:ext cx="0" cy="0"/>
+          <a:chOff x="0" y="0"/>
+          <a:chExt cx="0" cy="0"/>
+        </a:xfrm>
+      </p:grpSpPr>
+      <p:sp>
+        <p:nvSpPr>
+          <p:cNvPr id="2" name="Slide Image Placeholder 1"/>
+          <p:cNvSpPr>
+            <a:spLocks noGrp="1"/>
+          </p:cNvSpPr>
+          <p:nvPr>
+            <p:ph type="sldImg" idx="2"/>
+          </p:nvPr>
+        </p:nvSpPr>
+        <p:spPr/>
+      </p:sp>
+      <p:sp>
+        <p:nvSpPr>
+          <p:cNvPr id="3" name="Notes Placeholder 2"/>
+          <p:cNvSpPr>
+            <a:spLocks noGrp="1"/>
+          </p:cNvSpPr>
+          <p:nvPr>
+            <p:ph type="body" idx="3" sz="quarter"/>
+          </p:nvPr>
+        </p:nvSpPr>
+        <p:spPr/>
+        <p:txBody>
+          <a:bodyPr/>
+          <a:lstStyle/>
+          <a:p>
+            <a:r>
+              <a:t>Debemos ser transparentes con el comité: 1,324 filas certifican que el código no se rompe y que las reglas filtran la basura, pero no constituyen una prueba estadística válida. El blob de prueba que recibimos tenía 90% de duplicados y funciones cortadas a la mitad. Ya entregamos el reporte formal de auditoría a Data Engineering con 5 criterios de aceptación para el nuevo lote.</a:t>
+            </a:r>
+          </a:p>
+        </p:txBody>
+      </p:sp>
+      <p:sp>
+        <p:nvSpPr>
+          <p:cNvPr id="4" name="Slide Number Placeholder 3"/>
+          <p:cNvSpPr>
+            <a:spLocks noGrp="1"/>
+          </p:cNvSpPr>
+          <p:nvPr>
+            <p:ph type="sldNum" idx="5" sz="quarter"/>
+          </p:nvPr>
+        </p:nvSpPr>
+        <p:spPr/>
+      </p:sp>
+    </p:spTree>
+  </p:cSld>
+  <p:clrMapOvr>
+    <a:masterClrMapping/>
+  </p:clrMapOvr>
+</p:notes>
+</file>
+
+<file path=ppt/notesSlides/notesSlide12.xml><?xml version="1.0" encoding="utf-8"?>
+<p:notes xmlns:a="http://schemas.openxmlformats.org/drawingml/2006/main" xmlns:p="http://schemas.openxmlformats.org/presentationml/2006/main" xmlns:r="http://schemas.openxmlformats.org/officeDocument/2006/relationships">
+  <p:cSld>
+    <p:spTree>
+      <p:nvGrpSpPr>
+        <p:cNvPr id="1" name=""/>
+        <p:cNvGrpSpPr/>
+        <p:nvPr/>
+      </p:nvGrpSpPr>
+      <p:grpSpPr>
+        <a:xfrm>
+          <a:off x="0" y="0"/>
+          <a:ext cx="0" cy="0"/>
+          <a:chOff x="0" y="0"/>
+          <a:chExt cx="0" cy="0"/>
+        </a:xfrm>
+      </p:grpSpPr>
+      <p:sp>
+        <p:nvSpPr>
+          <p:cNvPr id="2" name="Slide Image Placeholder 1"/>
+          <p:cNvSpPr>
+            <a:spLocks noGrp="1"/>
+          </p:cNvSpPr>
+          <p:nvPr>
+            <p:ph type="sldImg" idx="2"/>
+          </p:nvPr>
+        </p:nvSpPr>
+        <p:spPr/>
+      </p:sp>
+      <p:sp>
+        <p:nvSpPr>
+          <p:cNvPr id="3" name="Notes Placeholder 2"/>
+          <p:cNvSpPr>
+            <a:spLocks noGrp="1"/>
+          </p:cNvSpPr>
+          <p:nvPr>
+            <p:ph type="body" idx="3" sz="quarter"/>
+          </p:nvPr>
+        </p:nvSpPr>
+        <p:spPr/>
+        <p:txBody>
+          <a:bodyPr/>
+          <a:lstStyle/>
+          <a:p>
+            <a:r>
               <a:t>La hoja de ruta es clara: una vez Data Engineering publique el blob curado con las 5 condiciones pactadas, ejecutaremos el protocolo final de drift. Con eso, y tras definir la política comercial para precios en cero en la versión 2.6, los micro-clusters quedarán listos para integrarse al pricing dinámico de la compañía.</a:t>
             </a:r>
           </a:p>
@@ -918,7 +1060,7 @@
           <a:lstStyle/>
           <a:p>
             <a:r>
-              <a:t>Aquí vemos las 6 tarjetas generadas directamente con la data de marcha blanca. Observen la coherencia: una vista parcial del Teatro Mayor Santo Domingo a 26 mil pesos va limpiamente a Popular/Balcón, mientras que una Platea Lateral del Gaitán a 176 mil pesos sube a Preferencial con 70% de confianza.</a:t>
+              <a:t>La marcha blanca demuestra el doble etiquetado sobre 1,324 filas reales de Azure GOLD. A la izquierda, los 6 arquetipos héroes de portada; a la derecha, la matriz de distribución sobre los 10 recintos con mayor volumen, mostrando cómo conviven los arquetipos según la tipología del venue.</a:t>
             </a:r>
           </a:p>
         </p:txBody>
@@ -988,7 +1130,7 @@
           <a:lstStyle/>
           <a:p>
             <a:r>
-              <a:t>Estos dos casos prueban la madurez matemática del modelo: primero, el percentil por tipo de recinto funciona, elevando una boleta de 360 mil pesos en teatro al arquetipo preferencial; y segundo, cuando una localidad queda en el limbo entre dos zonas, el sistema no adivina: marca bandera de frontera para que el equipo comercial la revise.</a:t>
+              <a:t>Mismo arquetipo, distintos micro-clusters: la granularidad interna es la feature de backend; el arquetipo es el lenguaje de negocio. Observen cómo dentro de Preferencial distinguimos plateas centrales de laterales y posteriores; y en VIP aislamos palcos puros frente a balcones mixtos.</a:t>
             </a:r>
           </a:p>
         </p:txBody>
@@ -1058,7 +1200,7 @@
           <a:lstStyle/>
           <a:p>
             <a:r>
-              <a:t>Durante las primeras pruebas nos encontramos con que los parqueaderos recibían clusters. La regla 8, espejada del filtro Spark histórico, interceptó más de 13 mil registros y 205 localidades activas de parqueaderos antes de que tocaran el modelo. Cero parqueaderos en el catálogo final.</a:t>
+              <a:t>Mismo arquetipo, distintos micro-clusters: la granularidad interna es la feature de backend; el arquetipo es el lenguaje de negocio. En eventos masivos, Popular separa pisos altos de balcones, mientras Grada General aísla tiquetes de festival de localidades de admisión por gradería.</a:t>
             </a:r>
           </a:p>
         </p:txBody>
@@ -1128,7 +1270,7 @@
           <a:lstStyle/>
           <a:p>
             <a:r>
-              <a:t>A nivel de calidad matemática, el modelo superó todas sus compuertas: confianza geométrica de 63%, apenas 14% de registros en frontera —muy por debajo del límite de alarma del 20%— y 100% de cobertura. Más aún: los 5 sub-espacios multi-zona tienen documentada una estabilidad bootstrap-ARI superior a 0.88 en réplicas al 80%, lo que garantiza reproducibilidad ante re-entrenamientos.</a:t>
+              <a:t>El sistema sabe lo que no sabe: las fronteras no inventan certeza ficticia sino que encienden banderas de auditoría; los micro-clusters híbridos capturan recintos con nomenclatura mixta sin colapsar la asignación; y Admisión Única resuelve determinísticamente eventos mono-zona al 100% de confianza.</a:t>
             </a:r>
           </a:p>
         </p:txBody>
@@ -1198,7 +1340,7 @@
           <a:lstStyle/>
           <a:p>
             <a:r>
-              <a:t>Debemos ser transparentes con el comité: 1,324 filas certifican que el código no se rompe y que las reglas filtran la basura, pero no constituyen una prueba estadística válida. El blob de prueba que recibimos tenía 90% de duplicados y funciones cortadas a la mitad. Ya entregamos el reporte formal de auditoría a Data Engineering con 5 criterios de aceptación para el nuevo lote.</a:t>
+              <a:t>La evidencia no termina en las diapositivas: las 1,324 asignaciones completas, filtrables y con formato de porcentaje están disponibles en el anexo de Excel generado con openpyxl, además del CSV canónico en el repositorio.</a:t>
             </a:r>
           </a:p>
         </p:txBody>
@@ -4628,6 +4770,1270 @@
               </a:defRPr>
             </a:pPr>
             <a:r>
+              <a:t>MÉTRICAS DE CALIDAD Y CONFIABILIDAD</a:t>
+            </a:r>
+          </a:p>
+        </p:txBody>
+      </p:sp>
+      <p:sp>
+        <p:nvSpPr>
+          <p:cNvPr id="3" name="TextBox 2"/>
+          <p:cNvSpPr txBox="1"/>
+          <p:nvPr/>
+        </p:nvSpPr>
+        <p:spPr>
+          <a:xfrm>
+            <a:off x="841248" y="621792"/>
+            <a:ext cx="10515600" cy="594360"/>
+          </a:xfrm>
+          <a:prstGeom prst="rect">
+            <a:avLst/>
+          </a:prstGeom>
+          <a:noFill/>
+        </p:spPr>
+        <p:txBody>
+          <a:bodyPr wrap="square">
+            <a:spAutoFit/>
+          </a:bodyPr>
+          <a:lstStyle/>
+          <a:p>
+            <a:pPr>
+              <a:defRPr sz="1300">
+                <a:solidFill>
+                  <a:srgbClr val="0B2545"/>
+                </a:solidFill>
+                <a:latin typeface="Montserrat"/>
+              </a:defRPr>
+            </a:pPr>
+            <a:r>
+              <a:t>Evaluación Cuantitativa de la Marcha Blanca y Estabilidad Estadística Documentada</a:t>
+            </a:r>
+          </a:p>
+        </p:txBody>
+      </p:sp>
+      <p:sp>
+        <p:nvSpPr>
+          <p:cNvPr id="4" name="Rounded Rectangle 3"/>
+          <p:cNvSpPr/>
+          <p:nvPr/>
+        </p:nvSpPr>
+        <p:spPr>
+          <a:xfrm>
+            <a:off x="731520" y="1371600"/>
+            <a:ext cx="5212080" cy="2286000"/>
+          </a:xfrm>
+          <a:prstGeom prst="roundRect">
+            <a:avLst/>
+          </a:prstGeom>
+          <a:solidFill>
+            <a:srgbClr val="FFFFFF"/>
+          </a:solidFill>
+          <a:ln>
+            <a:solidFill>
+              <a:srgbClr val="D7DCE4"/>
+            </a:solidFill>
+          </a:ln>
+        </p:spPr>
+        <p:style>
+          <a:lnRef idx="1">
+            <a:schemeClr val="accent1"/>
+          </a:lnRef>
+          <a:fillRef idx="3">
+            <a:schemeClr val="accent1"/>
+          </a:fillRef>
+          <a:effectRef idx="2">
+            <a:schemeClr val="accent1"/>
+          </a:effectRef>
+          <a:fontRef idx="minor">
+            <a:schemeClr val="lt1"/>
+          </a:fontRef>
+        </p:style>
+        <p:txBody>
+          <a:bodyPr rtlCol="0" anchor="ctr"/>
+          <a:lstStyle/>
+          <a:p>
+            <a:pPr algn="ctr"/>
+          </a:p>
+        </p:txBody>
+      </p:sp>
+      <p:sp>
+        <p:nvSpPr>
+          <p:cNvPr id="5" name="Rounded Rectangle 4"/>
+          <p:cNvSpPr/>
+          <p:nvPr/>
+        </p:nvSpPr>
+        <p:spPr>
+          <a:xfrm>
+            <a:off x="731520" y="1371600"/>
+            <a:ext cx="182880" cy="2286000"/>
+          </a:xfrm>
+          <a:prstGeom prst="roundRect">
+            <a:avLst/>
+          </a:prstGeom>
+          <a:solidFill>
+            <a:srgbClr val="009688"/>
+          </a:solidFill>
+          <a:ln>
+            <a:solidFill>
+              <a:srgbClr val="009688"/>
+            </a:solidFill>
+          </a:ln>
+        </p:spPr>
+        <p:style>
+          <a:lnRef idx="1">
+            <a:schemeClr val="accent1"/>
+          </a:lnRef>
+          <a:fillRef idx="3">
+            <a:schemeClr val="accent1"/>
+          </a:fillRef>
+          <a:effectRef idx="2">
+            <a:schemeClr val="accent1"/>
+          </a:effectRef>
+          <a:fontRef idx="minor">
+            <a:schemeClr val="lt1"/>
+          </a:fontRef>
+        </p:style>
+        <p:txBody>
+          <a:bodyPr rtlCol="0" anchor="ctr"/>
+          <a:lstStyle/>
+          <a:p>
+            <a:pPr algn="ctr"/>
+          </a:p>
+        </p:txBody>
+      </p:sp>
+      <p:sp>
+        <p:nvSpPr>
+          <p:cNvPr id="6" name="TextBox 5"/>
+          <p:cNvSpPr txBox="1"/>
+          <p:nvPr/>
+        </p:nvSpPr>
+        <p:spPr>
+          <a:xfrm>
+            <a:off x="1097280" y="1554480"/>
+            <a:ext cx="4663440" cy="1920240"/>
+          </a:xfrm>
+          <a:prstGeom prst="rect">
+            <a:avLst/>
+          </a:prstGeom>
+          <a:noFill/>
+        </p:spPr>
+        <p:txBody>
+          <a:bodyPr wrap="square">
+            <a:spAutoFit/>
+          </a:bodyPr>
+          <a:lstStyle/>
+          <a:p>
+            <a:pPr>
+              <a:spcAft>
+                <a:spcPts val="200"/>
+              </a:spcAft>
+              <a:defRPr sz="2400" b="1">
+                <a:solidFill>
+                  <a:srgbClr val="009688"/>
+                </a:solidFill>
+                <a:latin typeface="Montserrat"/>
+              </a:defRPr>
+            </a:pPr>
+            <a:r>
+              <a:t>0.6314 (63.14%)</a:t>
+            </a:r>
+          </a:p>
+          <a:p>
+            <a:pPr>
+              <a:spcAft>
+                <a:spcPts val="600"/>
+              </a:spcAft>
+              <a:defRPr sz="1100" b="1">
+                <a:solidFill>
+                  <a:srgbClr val="0B2545"/>
+                </a:solidFill>
+                <a:latin typeface="Montserrat"/>
+              </a:defRPr>
+            </a:pPr>
+            <a:r>
+              <a:t>SCORE DE CONFIANZA GEOMÉTRICO MEDIO</a:t>
+            </a:r>
+          </a:p>
+          <a:p>
+            <a:pPr>
+              <a:defRPr sz="1000">
+                <a:solidFill>
+                  <a:srgbClr val="212529"/>
+                </a:solidFill>
+                <a:latin typeface="Montserrat"/>
+              </a:defRPr>
+            </a:pPr>
+            <a:r>
+              <a:t>Supera ampliamente el umbral operacional mínimo de 0.50. Alta certidumbre en asignación de centroides.</a:t>
+            </a:r>
+          </a:p>
+        </p:txBody>
+      </p:sp>
+      <p:sp>
+        <p:nvSpPr>
+          <p:cNvPr id="7" name="Rounded Rectangle 6"/>
+          <p:cNvSpPr/>
+          <p:nvPr/>
+        </p:nvSpPr>
+        <p:spPr>
+          <a:xfrm>
+            <a:off x="6217920" y="1371600"/>
+            <a:ext cx="5212080" cy="2286000"/>
+          </a:xfrm>
+          <a:prstGeom prst="roundRect">
+            <a:avLst/>
+          </a:prstGeom>
+          <a:solidFill>
+            <a:srgbClr val="FFFFFF"/>
+          </a:solidFill>
+          <a:ln>
+            <a:solidFill>
+              <a:srgbClr val="D7DCE4"/>
+            </a:solidFill>
+          </a:ln>
+        </p:spPr>
+        <p:style>
+          <a:lnRef idx="1">
+            <a:schemeClr val="accent1"/>
+          </a:lnRef>
+          <a:fillRef idx="3">
+            <a:schemeClr val="accent1"/>
+          </a:fillRef>
+          <a:effectRef idx="2">
+            <a:schemeClr val="accent1"/>
+          </a:effectRef>
+          <a:fontRef idx="minor">
+            <a:schemeClr val="lt1"/>
+          </a:fontRef>
+        </p:style>
+        <p:txBody>
+          <a:bodyPr rtlCol="0" anchor="ctr"/>
+          <a:lstStyle/>
+          <a:p>
+            <a:pPr algn="ctr"/>
+          </a:p>
+        </p:txBody>
+      </p:sp>
+      <p:sp>
+        <p:nvSpPr>
+          <p:cNvPr id="8" name="Rounded Rectangle 7"/>
+          <p:cNvSpPr/>
+          <p:nvPr/>
+        </p:nvSpPr>
+        <p:spPr>
+          <a:xfrm>
+            <a:off x="6217920" y="1371600"/>
+            <a:ext cx="182880" cy="2286000"/>
+          </a:xfrm>
+          <a:prstGeom prst="roundRect">
+            <a:avLst/>
+          </a:prstGeom>
+          <a:solidFill>
+            <a:srgbClr val="134074"/>
+          </a:solidFill>
+          <a:ln>
+            <a:solidFill>
+              <a:srgbClr val="134074"/>
+            </a:solidFill>
+          </a:ln>
+        </p:spPr>
+        <p:style>
+          <a:lnRef idx="1">
+            <a:schemeClr val="accent1"/>
+          </a:lnRef>
+          <a:fillRef idx="3">
+            <a:schemeClr val="accent1"/>
+          </a:fillRef>
+          <a:effectRef idx="2">
+            <a:schemeClr val="accent1"/>
+          </a:effectRef>
+          <a:fontRef idx="minor">
+            <a:schemeClr val="lt1"/>
+          </a:fontRef>
+        </p:style>
+        <p:txBody>
+          <a:bodyPr rtlCol="0" anchor="ctr"/>
+          <a:lstStyle/>
+          <a:p>
+            <a:pPr algn="ctr"/>
+          </a:p>
+        </p:txBody>
+      </p:sp>
+      <p:sp>
+        <p:nvSpPr>
+          <p:cNvPr id="9" name="TextBox 8"/>
+          <p:cNvSpPr txBox="1"/>
+          <p:nvPr/>
+        </p:nvSpPr>
+        <p:spPr>
+          <a:xfrm>
+            <a:off x="6583680" y="1554480"/>
+            <a:ext cx="4663440" cy="1920240"/>
+          </a:xfrm>
+          <a:prstGeom prst="rect">
+            <a:avLst/>
+          </a:prstGeom>
+          <a:noFill/>
+        </p:spPr>
+        <p:txBody>
+          <a:bodyPr wrap="square">
+            <a:spAutoFit/>
+          </a:bodyPr>
+          <a:lstStyle/>
+          <a:p>
+            <a:pPr>
+              <a:spcAft>
+                <a:spcPts val="200"/>
+              </a:spcAft>
+              <a:defRPr sz="2400" b="1">
+                <a:solidFill>
+                  <a:srgbClr val="134074"/>
+                </a:solidFill>
+                <a:latin typeface="Montserrat"/>
+              </a:defRPr>
+            </a:pPr>
+            <a:r>
+              <a:t>14.27%</a:t>
+            </a:r>
+          </a:p>
+          <a:p>
+            <a:pPr>
+              <a:spcAft>
+                <a:spcPts val="600"/>
+              </a:spcAft>
+              <a:defRPr sz="1100" b="1">
+                <a:solidFill>
+                  <a:srgbClr val="0B2545"/>
+                </a:solidFill>
+                <a:latin typeface="Montserrat"/>
+              </a:defRPr>
+            </a:pPr>
+            <a:r>
+              <a:t>TASA DE LOCALIDADES EN FRONTERA</a:t>
+            </a:r>
+          </a:p>
+          <a:p>
+            <a:pPr>
+              <a:defRPr sz="1000">
+                <a:solidFill>
+                  <a:srgbClr val="212529"/>
+                </a:solidFill>
+                <a:latin typeface="Montserrat"/>
+              </a:defRPr>
+            </a:pPr>
+            <a:r>
+              <a:t>Dentro del margen seguro previsto (&lt; 20.0%). El 85.73% restante de las localidades se ubica con certidumbre nítida.</a:t>
+            </a:r>
+          </a:p>
+        </p:txBody>
+      </p:sp>
+      <p:sp>
+        <p:nvSpPr>
+          <p:cNvPr id="10" name="Rounded Rectangle 9"/>
+          <p:cNvSpPr/>
+          <p:nvPr/>
+        </p:nvSpPr>
+        <p:spPr>
+          <a:xfrm>
+            <a:off x="731520" y="3840480"/>
+            <a:ext cx="5212080" cy="2286000"/>
+          </a:xfrm>
+          <a:prstGeom prst="roundRect">
+            <a:avLst/>
+          </a:prstGeom>
+          <a:solidFill>
+            <a:srgbClr val="FFFFFF"/>
+          </a:solidFill>
+          <a:ln>
+            <a:solidFill>
+              <a:srgbClr val="D7DCE4"/>
+            </a:solidFill>
+          </a:ln>
+        </p:spPr>
+        <p:style>
+          <a:lnRef idx="1">
+            <a:schemeClr val="accent1"/>
+          </a:lnRef>
+          <a:fillRef idx="3">
+            <a:schemeClr val="accent1"/>
+          </a:fillRef>
+          <a:effectRef idx="2">
+            <a:schemeClr val="accent1"/>
+          </a:effectRef>
+          <a:fontRef idx="minor">
+            <a:schemeClr val="lt1"/>
+          </a:fontRef>
+        </p:style>
+        <p:txBody>
+          <a:bodyPr rtlCol="0" anchor="ctr"/>
+          <a:lstStyle/>
+          <a:p>
+            <a:pPr algn="ctr"/>
+          </a:p>
+        </p:txBody>
+      </p:sp>
+      <p:sp>
+        <p:nvSpPr>
+          <p:cNvPr id="11" name="Rounded Rectangle 10"/>
+          <p:cNvSpPr/>
+          <p:nvPr/>
+        </p:nvSpPr>
+        <p:spPr>
+          <a:xfrm>
+            <a:off x="731520" y="3840480"/>
+            <a:ext cx="182880" cy="2286000"/>
+          </a:xfrm>
+          <a:prstGeom prst="roundRect">
+            <a:avLst/>
+          </a:prstGeom>
+          <a:solidFill>
+            <a:srgbClr val="0B2545"/>
+          </a:solidFill>
+          <a:ln>
+            <a:solidFill>
+              <a:srgbClr val="0B2545"/>
+            </a:solidFill>
+          </a:ln>
+        </p:spPr>
+        <p:style>
+          <a:lnRef idx="1">
+            <a:schemeClr val="accent1"/>
+          </a:lnRef>
+          <a:fillRef idx="3">
+            <a:schemeClr val="accent1"/>
+          </a:fillRef>
+          <a:effectRef idx="2">
+            <a:schemeClr val="accent1"/>
+          </a:effectRef>
+          <a:fontRef idx="minor">
+            <a:schemeClr val="lt1"/>
+          </a:fontRef>
+        </p:style>
+        <p:txBody>
+          <a:bodyPr rtlCol="0" anchor="ctr"/>
+          <a:lstStyle/>
+          <a:p>
+            <a:pPr algn="ctr"/>
+          </a:p>
+        </p:txBody>
+      </p:sp>
+      <p:sp>
+        <p:nvSpPr>
+          <p:cNvPr id="12" name="TextBox 11"/>
+          <p:cNvSpPr txBox="1"/>
+          <p:nvPr/>
+        </p:nvSpPr>
+        <p:spPr>
+          <a:xfrm>
+            <a:off x="1097280" y="4023360"/>
+            <a:ext cx="4663440" cy="1920240"/>
+          </a:xfrm>
+          <a:prstGeom prst="rect">
+            <a:avLst/>
+          </a:prstGeom>
+          <a:noFill/>
+        </p:spPr>
+        <p:txBody>
+          <a:bodyPr wrap="square">
+            <a:spAutoFit/>
+          </a:bodyPr>
+          <a:lstStyle/>
+          <a:p>
+            <a:pPr>
+              <a:spcAft>
+                <a:spcPts val="200"/>
+              </a:spcAft>
+              <a:defRPr sz="2400" b="1">
+                <a:solidFill>
+                  <a:srgbClr val="0B2545"/>
+                </a:solidFill>
+                <a:latin typeface="Montserrat"/>
+              </a:defRPr>
+            </a:pPr>
+            <a:r>
+              <a:t>0.00%</a:t>
+            </a:r>
+          </a:p>
+          <a:p>
+            <a:pPr>
+              <a:spcAft>
+                <a:spcPts val="600"/>
+              </a:spcAft>
+              <a:defRPr sz="1100" b="1">
+                <a:solidFill>
+                  <a:srgbClr val="0B2545"/>
+                </a:solidFill>
+                <a:latin typeface="Montserrat"/>
+              </a:defRPr>
+            </a:pPr>
+            <a:r>
+              <a:t>TASA DE TEXTO VACÍO POST-FILTRO</a:t>
+            </a:r>
+          </a:p>
+          <a:p>
+            <a:pPr>
+              <a:defRPr sz="1000">
+                <a:solidFill>
+                  <a:srgbClr val="212529"/>
+                </a:solidFill>
+                <a:latin typeface="Montserrat"/>
+              </a:defRPr>
+            </a:pPr>
+            <a:r>
+              <a:t>100% de cobertura de nombres semánticos. Cero localidades en blanco procesadas por el modelo.</a:t>
+            </a:r>
+          </a:p>
+        </p:txBody>
+      </p:sp>
+      <p:sp>
+        <p:nvSpPr>
+          <p:cNvPr id="13" name="Rounded Rectangle 12"/>
+          <p:cNvSpPr/>
+          <p:nvPr/>
+        </p:nvSpPr>
+        <p:spPr>
+          <a:xfrm>
+            <a:off x="6217920" y="3840480"/>
+            <a:ext cx="5212080" cy="2286000"/>
+          </a:xfrm>
+          <a:prstGeom prst="roundRect">
+            <a:avLst/>
+          </a:prstGeom>
+          <a:solidFill>
+            <a:srgbClr val="FFFFFF"/>
+          </a:solidFill>
+          <a:ln>
+            <a:solidFill>
+              <a:srgbClr val="D7DCE4"/>
+            </a:solidFill>
+          </a:ln>
+        </p:spPr>
+        <p:style>
+          <a:lnRef idx="1">
+            <a:schemeClr val="accent1"/>
+          </a:lnRef>
+          <a:fillRef idx="3">
+            <a:schemeClr val="accent1"/>
+          </a:fillRef>
+          <a:effectRef idx="2">
+            <a:schemeClr val="accent1"/>
+          </a:effectRef>
+          <a:fontRef idx="minor">
+            <a:schemeClr val="lt1"/>
+          </a:fontRef>
+        </p:style>
+        <p:txBody>
+          <a:bodyPr rtlCol="0" anchor="ctr"/>
+          <a:lstStyle/>
+          <a:p>
+            <a:pPr algn="ctr"/>
+          </a:p>
+        </p:txBody>
+      </p:sp>
+      <p:sp>
+        <p:nvSpPr>
+          <p:cNvPr id="14" name="Rounded Rectangle 13"/>
+          <p:cNvSpPr/>
+          <p:nvPr/>
+        </p:nvSpPr>
+        <p:spPr>
+          <a:xfrm>
+            <a:off x="6217920" y="3840480"/>
+            <a:ext cx="182880" cy="2286000"/>
+          </a:xfrm>
+          <a:prstGeom prst="roundRect">
+            <a:avLst/>
+          </a:prstGeom>
+          <a:solidFill>
+            <a:srgbClr val="E76F51"/>
+          </a:solidFill>
+          <a:ln>
+            <a:solidFill>
+              <a:srgbClr val="E76F51"/>
+            </a:solidFill>
+          </a:ln>
+        </p:spPr>
+        <p:style>
+          <a:lnRef idx="1">
+            <a:schemeClr val="accent1"/>
+          </a:lnRef>
+          <a:fillRef idx="3">
+            <a:schemeClr val="accent1"/>
+          </a:fillRef>
+          <a:effectRef idx="2">
+            <a:schemeClr val="accent1"/>
+          </a:effectRef>
+          <a:fontRef idx="minor">
+            <a:schemeClr val="lt1"/>
+          </a:fontRef>
+        </p:style>
+        <p:txBody>
+          <a:bodyPr rtlCol="0" anchor="ctr"/>
+          <a:lstStyle/>
+          <a:p>
+            <a:pPr algn="ctr"/>
+          </a:p>
+        </p:txBody>
+      </p:sp>
+      <p:sp>
+        <p:nvSpPr>
+          <p:cNvPr id="15" name="TextBox 14"/>
+          <p:cNvSpPr txBox="1"/>
+          <p:nvPr/>
+        </p:nvSpPr>
+        <p:spPr>
+          <a:xfrm>
+            <a:off x="6583680" y="4023360"/>
+            <a:ext cx="4663440" cy="1920240"/>
+          </a:xfrm>
+          <a:prstGeom prst="rect">
+            <a:avLst/>
+          </a:prstGeom>
+          <a:noFill/>
+        </p:spPr>
+        <p:txBody>
+          <a:bodyPr wrap="square">
+            <a:spAutoFit/>
+          </a:bodyPr>
+          <a:lstStyle/>
+          <a:p>
+            <a:pPr>
+              <a:spcAft>
+                <a:spcPts val="200"/>
+              </a:spcAft>
+              <a:defRPr sz="2400" b="1">
+                <a:solidFill>
+                  <a:srgbClr val="E76F51"/>
+                </a:solidFill>
+                <a:latin typeface="Montserrat"/>
+              </a:defRPr>
+            </a:pPr>
+            <a:r>
+              <a:t>&gt; 0.88</a:t>
+            </a:r>
+          </a:p>
+          <a:p>
+            <a:pPr>
+              <a:spcAft>
+                <a:spcPts val="600"/>
+              </a:spcAft>
+              <a:defRPr sz="1100" b="1">
+                <a:solidFill>
+                  <a:srgbClr val="0B2545"/>
+                </a:solidFill>
+                <a:latin typeface="Montserrat"/>
+              </a:defRPr>
+            </a:pPr>
+            <a:r>
+              <a:t>ESTABILIDAD BOOTSTRAP-ARI PROMEDIO</a:t>
+            </a:r>
+          </a:p>
+          <a:p>
+            <a:pPr>
+              <a:defRPr sz="1000">
+                <a:solidFill>
+                  <a:srgbClr val="212529"/>
+                </a:solidFill>
+                <a:latin typeface="Montserrat"/>
+              </a:defRPr>
+            </a:pPr>
+            <a:r>
+              <a:t>Compuerta de reproducibilidad superada en réplicas al 80% (Popular: 0.985, Platea: 0.979, VIP: 0.934).</a:t>
+            </a:r>
+          </a:p>
+        </p:txBody>
+      </p:sp>
+    </p:spTree>
+  </p:cSld>
+  <p:clrMapOvr>
+    <a:masterClrMapping/>
+  </p:clrMapOvr>
+</p:sld>
+</file>
+
+<file path=ppt/slides/slide11.xml><?xml version="1.0" encoding="utf-8"?>
+<p:sld xmlns:a="http://schemas.openxmlformats.org/drawingml/2006/main" xmlns:p="http://schemas.openxmlformats.org/presentationml/2006/main" xmlns:r="http://schemas.openxmlformats.org/officeDocument/2006/relationships">
+  <p:cSld>
+    <p:bg>
+      <p:bgPr>
+        <a:blipFill dpi="0" rotWithShape="1">
+          <a:blip r:embed="rId2">
+            <a:lum/>
+          </a:blip>
+          <a:srcRect/>
+          <a:stretch>
+            <a:fillRect/>
+          </a:stretch>
+        </a:blipFill>
+        <a:effectLst/>
+      </p:bgPr>
+    </p:bg>
+    <p:spTree>
+      <p:nvGrpSpPr>
+        <p:cNvPr id="1" name=""/>
+        <p:cNvGrpSpPr/>
+        <p:nvPr/>
+      </p:nvGrpSpPr>
+      <p:grpSpPr/>
+      <p:sp>
+        <p:nvSpPr>
+          <p:cNvPr id="2" name="TextBox 1"/>
+          <p:cNvSpPr txBox="1"/>
+          <p:nvPr/>
+        </p:nvSpPr>
+        <p:spPr>
+          <a:xfrm>
+            <a:off x="841248" y="173736"/>
+            <a:ext cx="10515600" cy="365760"/>
+          </a:xfrm>
+          <a:prstGeom prst="rect">
+            <a:avLst/>
+          </a:prstGeom>
+          <a:noFill/>
+        </p:spPr>
+        <p:txBody>
+          <a:bodyPr wrap="square">
+            <a:spAutoFit/>
+          </a:bodyPr>
+          <a:lstStyle/>
+          <a:p>
+            <a:pPr>
+              <a:defRPr sz="1700" b="1">
+                <a:solidFill>
+                  <a:srgbClr val="FFFFFF"/>
+                </a:solidFill>
+                <a:latin typeface="Montserrat"/>
+              </a:defRPr>
+            </a:pPr>
+            <a:r>
+              <a:t>LÍMITES HONESTOS DEL LOTE Y GOBERNANZA</a:t>
+            </a:r>
+          </a:p>
+        </p:txBody>
+      </p:sp>
+      <p:sp>
+        <p:nvSpPr>
+          <p:cNvPr id="3" name="TextBox 2"/>
+          <p:cNvSpPr txBox="1"/>
+          <p:nvPr/>
+        </p:nvSpPr>
+        <p:spPr>
+          <a:xfrm>
+            <a:off x="841248" y="621792"/>
+            <a:ext cx="10515600" cy="594360"/>
+          </a:xfrm>
+          <a:prstGeom prst="rect">
+            <a:avLst/>
+          </a:prstGeom>
+          <a:noFill/>
+        </p:spPr>
+        <p:txBody>
+          <a:bodyPr wrap="square">
+            <a:spAutoFit/>
+          </a:bodyPr>
+          <a:lstStyle/>
+          <a:p>
+            <a:pPr>
+              <a:defRPr sz="1300">
+                <a:solidFill>
+                  <a:srgbClr val="0B2545"/>
+                </a:solidFill>
+                <a:latin typeface="Montserrat"/>
+              </a:defRPr>
+            </a:pPr>
+            <a:r>
+              <a:t>Validación Funcional Exitosa (N=1,324), Diagnóstico de Capa GOLD y Criterios de Aceptación</a:t>
+            </a:r>
+          </a:p>
+        </p:txBody>
+      </p:sp>
+      <p:sp>
+        <p:nvSpPr>
+          <p:cNvPr id="4" name="Rounded Rectangle 3"/>
+          <p:cNvSpPr/>
+          <p:nvPr/>
+        </p:nvSpPr>
+        <p:spPr>
+          <a:xfrm>
+            <a:off x="731520" y="1371600"/>
+            <a:ext cx="5212080" cy="4937760"/>
+          </a:xfrm>
+          <a:prstGeom prst="roundRect">
+            <a:avLst/>
+          </a:prstGeom>
+          <a:solidFill>
+            <a:srgbClr val="FFFFFF"/>
+          </a:solidFill>
+          <a:ln>
+            <a:solidFill>
+              <a:srgbClr val="D7DCE4"/>
+            </a:solidFill>
+          </a:ln>
+        </p:spPr>
+        <p:style>
+          <a:lnRef idx="1">
+            <a:schemeClr val="accent1"/>
+          </a:lnRef>
+          <a:fillRef idx="3">
+            <a:schemeClr val="accent1"/>
+          </a:fillRef>
+          <a:effectRef idx="2">
+            <a:schemeClr val="accent1"/>
+          </a:effectRef>
+          <a:fontRef idx="minor">
+            <a:schemeClr val="lt1"/>
+          </a:fontRef>
+        </p:style>
+        <p:txBody>
+          <a:bodyPr rtlCol="0" anchor="ctr"/>
+          <a:lstStyle/>
+          <a:p>
+            <a:pPr algn="ctr"/>
+          </a:p>
+        </p:txBody>
+      </p:sp>
+      <p:sp>
+        <p:nvSpPr>
+          <p:cNvPr id="5" name="TextBox 4"/>
+          <p:cNvSpPr txBox="1"/>
+          <p:nvPr/>
+        </p:nvSpPr>
+        <p:spPr>
+          <a:xfrm>
+            <a:off x="914400" y="1554480"/>
+            <a:ext cx="4846320" cy="4572000"/>
+          </a:xfrm>
+          <a:prstGeom prst="rect">
+            <a:avLst/>
+          </a:prstGeom>
+          <a:noFill/>
+        </p:spPr>
+        <p:txBody>
+          <a:bodyPr wrap="square">
+            <a:spAutoFit/>
+          </a:bodyPr>
+          <a:lstStyle/>
+          <a:p>
+            <a:pPr>
+              <a:spcAft>
+                <a:spcPts val="1000"/>
+              </a:spcAft>
+              <a:defRPr sz="1150" b="1">
+                <a:solidFill>
+                  <a:srgbClr val="0B2545"/>
+                </a:solidFill>
+                <a:latin typeface="Montserrat"/>
+              </a:defRPr>
+            </a:pPr>
+            <a:r>
+              <a:t>VALIDACIÓN FUNCIONAL EXITOSA (NO ESTADÍSTICA)</a:t>
+            </a:r>
+          </a:p>
+          <a:p>
+            <a:pPr>
+              <a:spcAft>
+                <a:spcPts val="200"/>
+              </a:spcAft>
+              <a:defRPr sz="1000" b="1">
+                <a:solidFill>
+                  <a:srgbClr val="134074"/>
+                </a:solidFill>
+                <a:latin typeface="Montserrat"/>
+              </a:defRPr>
+            </a:pPr>
+            <a:r>
+              <a:t>• 706,443 Filas Crudas Ingeridas:</a:t>
+            </a:r>
+          </a:p>
+          <a:p>
+            <a:pPr>
+              <a:spcAft>
+                <a:spcPts val="600"/>
+              </a:spcAft>
+              <a:defRPr sz="950">
+                <a:solidFill>
+                  <a:srgbClr val="212529"/>
+                </a:solidFill>
+                <a:latin typeface="Montserrat"/>
+              </a:defRPr>
+            </a:pPr>
+            <a:r>
+              <a:t>  El lote probó de punta a punta la robustez del código, descarga de Azure e inferencia defensiva.</a:t>
+            </a:r>
+          </a:p>
+          <a:p>
+            <a:pPr>
+              <a:spcAft>
+                <a:spcPts val="200"/>
+              </a:spcAft>
+              <a:defRPr sz="1000" b="1">
+                <a:solidFill>
+                  <a:srgbClr val="134074"/>
+                </a:solidFill>
+                <a:latin typeface="Montserrat"/>
+              </a:defRPr>
+            </a:pPr>
+            <a:r>
+              <a:t>• 1,324 Localidades Limpias Finales (99.81% Descarte):</a:t>
+            </a:r>
+          </a:p>
+          <a:p>
+            <a:pPr>
+              <a:spcAft>
+                <a:spcPts val="600"/>
+              </a:spcAft>
+              <a:defRPr sz="950">
+                <a:solidFill>
+                  <a:srgbClr val="212529"/>
+                </a:solidFill>
+                <a:latin typeface="Montserrat"/>
+              </a:defRPr>
+            </a:pPr>
+            <a:r>
+              <a:t>  El volumen residual certificado es seguro para inferencia pero insuficiente para certificar drift poblacional (PSI) representativo.</a:t>
+            </a:r>
+          </a:p>
+          <a:p>
+            <a:pPr>
+              <a:spcAft>
+                <a:spcPts val="200"/>
+              </a:spcAft>
+              <a:defRPr sz="1000" b="1">
+                <a:solidFill>
+                  <a:srgbClr val="134074"/>
+                </a:solidFill>
+                <a:latin typeface="Montserrat"/>
+              </a:defRPr>
+            </a:pPr>
+            <a:r>
+              <a:t>• Causa de Descarte Masivo:</a:t>
+            </a:r>
+          </a:p>
+          <a:p>
+            <a:pPr>
+              <a:spcAft>
+                <a:spcPts val="600"/>
+              </a:spcAft>
+              <a:defRPr sz="950">
+                <a:solidFill>
+                  <a:srgbClr val="212529"/>
+                </a:solidFill>
+                <a:latin typeface="Montserrat"/>
+              </a:defRPr>
+            </a:pPr>
+            <a:r>
+              <a:t>  636k duplicados exactos (90.1%) y 706k filas (99.9%) en eventos con suma de cuotas rota por muestreo parcial.</a:t>
+            </a:r>
+          </a:p>
+        </p:txBody>
+      </p:sp>
+      <p:sp>
+        <p:nvSpPr>
+          <p:cNvPr id="6" name="Rounded Rectangle 5"/>
+          <p:cNvSpPr/>
+          <p:nvPr/>
+        </p:nvSpPr>
+        <p:spPr>
+          <a:xfrm>
+            <a:off x="6217920" y="1371600"/>
+            <a:ext cx="5212080" cy="4937760"/>
+          </a:xfrm>
+          <a:prstGeom prst="roundRect">
+            <a:avLst/>
+          </a:prstGeom>
+          <a:solidFill>
+            <a:srgbClr val="FFFFFF"/>
+          </a:solidFill>
+          <a:ln>
+            <a:solidFill>
+              <a:srgbClr val="D7DCE4"/>
+            </a:solidFill>
+          </a:ln>
+        </p:spPr>
+        <p:style>
+          <a:lnRef idx="1">
+            <a:schemeClr val="accent1"/>
+          </a:lnRef>
+          <a:fillRef idx="3">
+            <a:schemeClr val="accent1"/>
+          </a:fillRef>
+          <a:effectRef idx="2">
+            <a:schemeClr val="accent1"/>
+          </a:effectRef>
+          <a:fontRef idx="minor">
+            <a:schemeClr val="lt1"/>
+          </a:fontRef>
+        </p:style>
+        <p:txBody>
+          <a:bodyPr rtlCol="0" anchor="ctr"/>
+          <a:lstStyle/>
+          <a:p>
+            <a:pPr algn="ctr"/>
+          </a:p>
+        </p:txBody>
+      </p:sp>
+      <p:sp>
+        <p:nvSpPr>
+          <p:cNvPr id="7" name="TextBox 6"/>
+          <p:cNvSpPr txBox="1"/>
+          <p:nvPr/>
+        </p:nvSpPr>
+        <p:spPr>
+          <a:xfrm>
+            <a:off x="6400800" y="1554480"/>
+            <a:ext cx="4846320" cy="4572000"/>
+          </a:xfrm>
+          <a:prstGeom prst="rect">
+            <a:avLst/>
+          </a:prstGeom>
+          <a:noFill/>
+        </p:spPr>
+        <p:txBody>
+          <a:bodyPr wrap="square">
+            <a:spAutoFit/>
+          </a:bodyPr>
+          <a:lstStyle/>
+          <a:p>
+            <a:pPr>
+              <a:spcAft>
+                <a:spcPts val="1000"/>
+              </a:spcAft>
+              <a:defRPr sz="1150" b="1">
+                <a:solidFill>
+                  <a:srgbClr val="0B2545"/>
+                </a:solidFill>
+                <a:latin typeface="Montserrat"/>
+              </a:defRPr>
+            </a:pPr>
+            <a:r>
+              <a:t>LOS 5 CRITERIOS DE ACEPTACIÓN PARA EL NUEVO BLOB</a:t>
+            </a:r>
+          </a:p>
+          <a:p>
+            <a:pPr>
+              <a:spcAft>
+                <a:spcPts val="200"/>
+              </a:spcAft>
+              <a:defRPr sz="1000" b="1">
+                <a:solidFill>
+                  <a:srgbClr val="134074"/>
+                </a:solidFill>
+                <a:latin typeface="Montserrat"/>
+              </a:defRPr>
+            </a:pPr>
+            <a:r>
+              <a:t>• Check A (Duplicados en Crudo):</a:t>
+            </a:r>
+          </a:p>
+          <a:p>
+            <a:pPr>
+              <a:spcAft>
+                <a:spcPts val="600"/>
+              </a:spcAft>
+              <a:defRPr sz="950">
+                <a:solidFill>
+                  <a:srgbClr val="212529"/>
+                </a:solidFill>
+                <a:latin typeface="Montserrat"/>
+              </a:defRPr>
+            </a:pPr>
+            <a:r>
+              <a:t>  Tasa de duplicidad estricta &lt; 1.0%.</a:t>
+            </a:r>
+          </a:p>
+          <a:p>
+            <a:pPr>
+              <a:spcAft>
+                <a:spcPts val="200"/>
+              </a:spcAft>
+              <a:defRPr sz="1000" b="1">
+                <a:solidFill>
+                  <a:srgbClr val="134074"/>
+                </a:solidFill>
+                <a:latin typeface="Montserrat"/>
+              </a:defRPr>
+            </a:pPr>
+            <a:r>
+              <a:t>• Check B (Supervivencia de Filtro):</a:t>
+            </a:r>
+          </a:p>
+          <a:p>
+            <a:pPr>
+              <a:spcAft>
+                <a:spcPts val="600"/>
+              </a:spcAft>
+              <a:defRPr sz="950">
+                <a:solidFill>
+                  <a:srgbClr val="212529"/>
+                </a:solidFill>
+                <a:latin typeface="Montserrat"/>
+              </a:defRPr>
+            </a:pPr>
+            <a:r>
+              <a:t>  Tasa de retención consistente &gt; 90.0%.</a:t>
+            </a:r>
+          </a:p>
+          <a:p>
+            <a:pPr>
+              <a:spcAft>
+                <a:spcPts val="200"/>
+              </a:spcAft>
+              <a:defRPr sz="1000" b="1">
+                <a:solidFill>
+                  <a:srgbClr val="134074"/>
+                </a:solidFill>
+                <a:latin typeface="Montserrat"/>
+              </a:defRPr>
+            </a:pPr>
+            <a:r>
+              <a:t>• Check C (Coherencia de Aforos):</a:t>
+            </a:r>
+          </a:p>
+          <a:p>
+            <a:pPr>
+              <a:spcAft>
+                <a:spcPts val="600"/>
+              </a:spcAft>
+              <a:defRPr sz="950">
+                <a:solidFill>
+                  <a:srgbClr val="212529"/>
+                </a:solidFill>
+                <a:latin typeface="Montserrat"/>
+              </a:defRPr>
+            </a:pPr>
+            <a:r>
+              <a:t>  0 eventos con discrepancias físicas en la suma de cuotas.</a:t>
+            </a:r>
+          </a:p>
+          <a:p>
+            <a:pPr>
+              <a:spcAft>
+                <a:spcPts val="200"/>
+              </a:spcAft>
+              <a:defRPr sz="1000" b="1">
+                <a:solidFill>
+                  <a:srgbClr val="134074"/>
+                </a:solidFill>
+                <a:latin typeface="Montserrat"/>
+              </a:defRPr>
+            </a:pPr>
+            <a:r>
+              <a:t>• Check D (Volumetría):</a:t>
+            </a:r>
+          </a:p>
+          <a:p>
+            <a:pPr>
+              <a:spcAft>
+                <a:spcPts val="600"/>
+              </a:spcAft>
+              <a:defRPr sz="950">
+                <a:solidFill>
+                  <a:srgbClr val="212529"/>
+                </a:solidFill>
+                <a:latin typeface="Montserrat"/>
+              </a:defRPr>
+            </a:pPr>
+            <a:r>
+              <a:t>  Tamaño comparable al histórico (|Delta| &lt; 20% vs 33,775).</a:t>
+            </a:r>
+          </a:p>
+          <a:p>
+            <a:pPr>
+              <a:spcAft>
+                <a:spcPts val="200"/>
+              </a:spcAft>
+              <a:defRPr sz="1000" b="1">
+                <a:solidFill>
+                  <a:srgbClr val="134074"/>
+                </a:solidFill>
+                <a:latin typeface="Montserrat"/>
+              </a:defRPr>
+            </a:pPr>
+            <a:r>
+              <a:t>• Check E (Patrones no Comerciales):</a:t>
+            </a:r>
+          </a:p>
+          <a:p>
+            <a:pPr>
+              <a:spcAft>
+                <a:spcPts val="600"/>
+              </a:spcAft>
+              <a:defRPr sz="950">
+                <a:solidFill>
+                  <a:srgbClr val="212529"/>
+                </a:solidFill>
+                <a:latin typeface="Montserrat"/>
+              </a:defRPr>
+            </a:pPr>
+            <a:r>
+              <a:t>  0 filas con TEST, CANCELAD, PARQUEA o sobreventas.</a:t>
+            </a:r>
+          </a:p>
+        </p:txBody>
+      </p:sp>
+    </p:spTree>
+  </p:cSld>
+  <p:clrMapOvr>
+    <a:masterClrMapping/>
+  </p:clrMapOvr>
+</p:sld>
+</file>
+
+<file path=ppt/slides/slide12.xml><?xml version="1.0" encoding="utf-8"?>
+<p:sld xmlns:a="http://schemas.openxmlformats.org/drawingml/2006/main" xmlns:p="http://schemas.openxmlformats.org/presentationml/2006/main" xmlns:r="http://schemas.openxmlformats.org/officeDocument/2006/relationships">
+  <p:cSld>
+    <p:bg>
+      <p:bgPr>
+        <a:blipFill dpi="0" rotWithShape="1">
+          <a:blip r:embed="rId2">
+            <a:lum/>
+          </a:blip>
+          <a:srcRect/>
+          <a:stretch>
+            <a:fillRect/>
+          </a:stretch>
+        </a:blipFill>
+        <a:effectLst/>
+      </p:bgPr>
+    </p:bg>
+    <p:spTree>
+      <p:nvGrpSpPr>
+        <p:cNvPr id="1" name=""/>
+        <p:cNvGrpSpPr/>
+        <p:nvPr/>
+      </p:nvGrpSpPr>
+      <p:grpSpPr/>
+      <p:sp>
+        <p:nvSpPr>
+          <p:cNvPr id="2" name="TextBox 1"/>
+          <p:cNvSpPr txBox="1"/>
+          <p:nvPr/>
+        </p:nvSpPr>
+        <p:spPr>
+          <a:xfrm>
+            <a:off x="841248" y="173736"/>
+            <a:ext cx="10515600" cy="365760"/>
+          </a:xfrm>
+          <a:prstGeom prst="rect">
+            <a:avLst/>
+          </a:prstGeom>
+          <a:noFill/>
+        </p:spPr>
+        <p:txBody>
+          <a:bodyPr wrap="square">
+            <a:spAutoFit/>
+          </a:bodyPr>
+          <a:lstStyle/>
+          <a:p>
+            <a:pPr>
+              <a:defRPr sz="1700" b="1">
+                <a:solidFill>
+                  <a:srgbClr val="FFFFFF"/>
+                </a:solidFill>
+                <a:latin typeface="Montserrat"/>
+              </a:defRPr>
+            </a:pPr>
+            <a:r>
               <a:t>HOJA DE RUTA Y PRÓXIMOS PASOS</a:t>
             </a:r>
           </a:p>
@@ -6742,7 +8148,7 @@
               </a:defRPr>
             </a:pPr>
             <a:r>
-              <a:t>Doble Etiquetado en Vivo: Los 6 Arquetipos Evaluados sobre Datos Reales de Azure GOLD</a:t>
+              <a:t>Doble Etiquetado en Vivo: Los 6 Arquetipos Héroes y Densidad en los Top 10 Recintos</a:t>
             </a:r>
           </a:p>
         </p:txBody>
@@ -6764,7 +8170,31 @@
         <p:spPr>
           <a:xfrm>
             <a:off x="731520" y="1280160"/>
-            <a:ext cx="10698480" cy="5120640"/>
+            <a:ext cx="5486400" cy="5029200"/>
+          </a:xfrm>
+          <a:prstGeom prst="rect">
+            <a:avLst/>
+          </a:prstGeom>
+        </p:spPr>
+      </p:pic>
+      <p:pic>
+        <p:nvPicPr>
+          <p:cNvPr id="5" name="Picture 4" descr="fig_matriz_recintos_arquetipos.png"/>
+          <p:cNvPicPr>
+            <a:picLocks noChangeAspect="1"/>
+          </p:cNvPicPr>
+          <p:nvPr/>
+        </p:nvPicPr>
+        <p:blipFill>
+          <a:blip r:embed="rId5"/>
+          <a:stretch>
+            <a:fillRect/>
+          </a:stretch>
+        </p:blipFill>
+        <p:spPr>
+          <a:xfrm>
+            <a:off x="6400800" y="1280160"/>
+            <a:ext cx="5120640" cy="5029200"/>
           </a:xfrm>
           <a:prstGeom prst="rect">
             <a:avLst/>
@@ -6834,7 +8264,7 @@
               </a:defRPr>
             </a:pPr>
             <a:r>
-              <a:t>CASOS PUENTE DE CALIDAD MATEMÁTICA</a:t>
+              <a:t>EVIDENCIA POR SEGMENTO: SEGMENTO PREMIUM</a:t>
             </a:r>
           </a:p>
         </p:txBody>
@@ -6870,677 +8300,35 @@
               </a:defRPr>
             </a:pPr>
             <a:r>
-              <a:t>Demostración de Features Clave: Percentil Contextual y Frontera Estadística Honesta</a:t>
-            </a:r>
-          </a:p>
-        </p:txBody>
-      </p:sp>
-      <p:sp>
-        <p:nvSpPr>
-          <p:cNvPr id="4" name="Rounded Rectangle 3"/>
-          <p:cNvSpPr/>
+              <a:t>Granularidad Interna en VIP y Preferencial Frontal (Micro-clusters VIP-0..2 y PPF-0..2)</a:t>
+            </a:r>
+          </a:p>
+        </p:txBody>
+      </p:sp>
+      <p:pic>
+        <p:nvPicPr>
+          <p:cNvPr id="4" name="Picture 3" descr="fig_galeria_premium.png"/>
+          <p:cNvPicPr>
+            <a:picLocks noChangeAspect="1"/>
+          </p:cNvPicPr>
           <p:nvPr/>
-        </p:nvSpPr>
-        <p:spPr>
-          <a:xfrm>
-            <a:off x="731520" y="1371600"/>
-            <a:ext cx="5212080" cy="4937760"/>
-          </a:xfrm>
-          <a:prstGeom prst="roundRect">
-            <a:avLst/>
-          </a:prstGeom>
-          <a:solidFill>
-            <a:srgbClr val="FFFFFF"/>
-          </a:solidFill>
-          <a:ln>
-            <a:solidFill>
-              <a:srgbClr val="D7DCE4"/>
-            </a:solidFill>
-          </a:ln>
-        </p:spPr>
-        <p:style>
-          <a:lnRef idx="1">
-            <a:schemeClr val="accent1"/>
-          </a:lnRef>
-          <a:fillRef idx="3">
-            <a:schemeClr val="accent1"/>
-          </a:fillRef>
-          <a:effectRef idx="2">
-            <a:schemeClr val="accent1"/>
-          </a:effectRef>
-          <a:fontRef idx="minor">
-            <a:schemeClr val="lt1"/>
-          </a:fontRef>
-        </p:style>
-        <p:txBody>
-          <a:bodyPr rtlCol="0" anchor="ctr"/>
-          <a:lstStyle/>
-          <a:p>
-            <a:pPr algn="ctr"/>
-          </a:p>
-        </p:txBody>
-      </p:sp>
-      <p:sp>
-        <p:nvSpPr>
-          <p:cNvPr id="5" name="Rounded Rectangle 4"/>
-          <p:cNvSpPr/>
-          <p:nvPr/>
-        </p:nvSpPr>
-        <p:spPr>
-          <a:xfrm>
-            <a:off x="731520" y="1371600"/>
-            <a:ext cx="5212080" cy="640080"/>
-          </a:xfrm>
-          <a:prstGeom prst="roundRect">
-            <a:avLst/>
-          </a:prstGeom>
-          <a:solidFill>
-            <a:srgbClr val="009688"/>
-          </a:solidFill>
-          <a:ln>
-            <a:solidFill>
-              <a:srgbClr val="009688"/>
-            </a:solidFill>
-          </a:ln>
-        </p:spPr>
-        <p:style>
-          <a:lnRef idx="1">
-            <a:schemeClr val="accent1"/>
-          </a:lnRef>
-          <a:fillRef idx="3">
-            <a:schemeClr val="accent1"/>
-          </a:fillRef>
-          <a:effectRef idx="2">
-            <a:schemeClr val="accent1"/>
-          </a:effectRef>
-          <a:fontRef idx="minor">
-            <a:schemeClr val="lt1"/>
-          </a:fontRef>
-        </p:style>
-        <p:txBody>
-          <a:bodyPr rtlCol="0" anchor="ctr"/>
-          <a:lstStyle/>
-          <a:p>
-            <a:pPr algn="ctr"/>
-          </a:p>
-        </p:txBody>
-      </p:sp>
-      <p:sp>
-        <p:nvSpPr>
-          <p:cNvPr id="6" name="TextBox 5"/>
-          <p:cNvSpPr txBox="1"/>
-          <p:nvPr/>
-        </p:nvSpPr>
-        <p:spPr>
-          <a:xfrm>
-            <a:off x="822960" y="1417320"/>
-            <a:ext cx="5029200" cy="457200"/>
+        </p:nvPicPr>
+        <p:blipFill>
+          <a:blip r:embed="rId4"/>
+          <a:stretch>
+            <a:fillRect/>
+          </a:stretch>
+        </p:blipFill>
+        <p:spPr>
+          <a:xfrm>
+            <a:off x="731520" y="1280160"/>
+            <a:ext cx="10698480" cy="5029200"/>
           </a:xfrm>
           <a:prstGeom prst="rect">
             <a:avLst/>
           </a:prstGeom>
-          <a:noFill/>
-        </p:spPr>
-        <p:txBody>
-          <a:bodyPr wrap="none">
-            <a:spAutoFit/>
-          </a:bodyPr>
-          <a:lstStyle/>
-          <a:p>
-            <a:pPr>
-              <a:defRPr sz="1100" b="1">
-                <a:solidFill>
-                  <a:srgbClr val="FFFFFF"/>
-                </a:solidFill>
-                <a:latin typeface="Montserrat"/>
-              </a:defRPr>
-            </a:pPr>
-            <a:r>
-              <a:t>CASO PUENTE 1: 'CARA PARA SU TIPO DE RECINTO'</a:t>
-            </a:r>
-          </a:p>
-        </p:txBody>
-      </p:sp>
-      <p:sp>
-        <p:nvSpPr>
-          <p:cNvPr id="7" name="TextBox 6"/>
-          <p:cNvSpPr txBox="1"/>
-          <p:nvPr/>
-        </p:nvSpPr>
-        <p:spPr>
-          <a:xfrm>
-            <a:off x="914400" y="2103120"/>
-            <a:ext cx="4846320" cy="4114800"/>
-          </a:xfrm>
-          <a:prstGeom prst="rect">
-            <a:avLst/>
-          </a:prstGeom>
-          <a:noFill/>
-        </p:spPr>
-        <p:txBody>
-          <a:bodyPr wrap="square">
-            <a:spAutoFit/>
-          </a:bodyPr>
-          <a:lstStyle/>
-          <a:p>
-            <a:pPr>
-              <a:spcAft>
-                <a:spcPts val="800"/>
-              </a:spcAft>
-              <a:defRPr sz="1100" b="1">
-                <a:solidFill>
-                  <a:srgbClr val="0B2545"/>
-                </a:solidFill>
-                <a:latin typeface="Montserrat"/>
-              </a:defRPr>
-            </a:pPr>
-            <a:r>
-              <a:t>Efecto del Percentil Contextual por Tipología de Venue</a:t>
-            </a:r>
-          </a:p>
-          <a:p>
-            <a:pPr>
-              <a:spcAft>
-                <a:spcPts val="300"/>
-              </a:spcAft>
-              <a:defRPr sz="1000" b="1">
-                <a:solidFill>
-                  <a:srgbClr val="134074"/>
-                </a:solidFill>
-                <a:latin typeface="Montserrat"/>
-              </a:defRPr>
-            </a:pPr>
-            <a:r>
-              <a:t>• Localidad Comercial: </a:t>
-            </a:r>
-            <a:r>
-              <a:rPr b="0">
-                <a:solidFill>
-                  <a:srgbClr val="212529"/>
-                </a:solidFill>
-              </a:rPr>
-              <a:t>PLATINO (Teatro Royal Center)</a:t>
-            </a:r>
-          </a:p>
-          <a:p>
-            <a:pPr>
-              <a:spcAft>
-                <a:spcPts val="300"/>
-              </a:spcAft>
-              <a:defRPr sz="1000" b="1">
-                <a:solidFill>
-                  <a:srgbClr val="134074"/>
-                </a:solidFill>
-                <a:latin typeface="Montserrat"/>
-              </a:defRPr>
-            </a:pPr>
-            <a:r>
-              <a:t>• Precio Nominal: </a:t>
-            </a:r>
-            <a:r>
-              <a:rPr b="0">
-                <a:solidFill>
-                  <a:srgbClr val="212529"/>
-                </a:solidFill>
-              </a:rPr>
-              <a:t>$360,000 COP</a:t>
-            </a:r>
-          </a:p>
-          <a:p>
-            <a:pPr>
-              <a:spcAft>
-                <a:spcPts val="300"/>
-              </a:spcAft>
-              <a:defRPr sz="1000" b="1">
-                <a:solidFill>
-                  <a:srgbClr val="134074"/>
-                </a:solidFill>
-                <a:latin typeface="Montserrat"/>
-              </a:defRPr>
-            </a:pPr>
-            <a:r>
-              <a:t>• Tipología Canónica: </a:t>
-            </a:r>
-            <a:r>
-              <a:rPr b="0">
-                <a:solidFill>
-                  <a:srgbClr val="212529"/>
-                </a:solidFill>
-              </a:rPr>
-              <a:t>TEATRO (type_site = TEATRO)</a:t>
-            </a:r>
-          </a:p>
-          <a:p>
-            <a:pPr>
-              <a:spcAft>
-                <a:spcPts val="300"/>
-              </a:spcAft>
-              <a:defRPr sz="1000" b="1">
-                <a:solidFill>
-                  <a:srgbClr val="134074"/>
-                </a:solidFill>
-                <a:latin typeface="Montserrat"/>
-              </a:defRPr>
-            </a:pPr>
-            <a:r>
-              <a:t>• Percentil por Tipo: </a:t>
-            </a:r>
-            <a:r>
-              <a:rPr b="0">
-                <a:solidFill>
-                  <a:srgbClr val="212529"/>
-                </a:solidFill>
-              </a:rPr>
-              <a:t>1.00 (Percentil 100% de Teatros)</a:t>
-            </a:r>
-          </a:p>
-          <a:p>
-            <a:pPr>
-              <a:spcAft>
-                <a:spcPts val="300"/>
-              </a:spcAft>
-              <a:defRPr sz="1000" b="1">
-                <a:solidFill>
-                  <a:srgbClr val="134074"/>
-                </a:solidFill>
-                <a:latin typeface="Montserrat"/>
-              </a:defRPr>
-            </a:pPr>
-            <a:r>
-              <a:t>• Arquetipo Asignado: </a:t>
-            </a:r>
-            <a:r>
-              <a:rPr b="0">
-                <a:solidFill>
-                  <a:srgbClr val="212529"/>
-                </a:solidFill>
-              </a:rPr>
-              <a:t>Preferencial / Platea Frontal</a:t>
-            </a:r>
-          </a:p>
-          <a:p>
-            <a:pPr>
-              <a:spcAft>
-                <a:spcPts val="300"/>
-              </a:spcAft>
-              <a:defRPr sz="1000" b="1">
-                <a:solidFill>
-                  <a:srgbClr val="134074"/>
-                </a:solidFill>
-                <a:latin typeface="Montserrat"/>
-              </a:defRPr>
-            </a:pPr>
-            <a:r>
-              <a:t>• Micro-Cluster: </a:t>
-            </a:r>
-            <a:r>
-              <a:rPr b="0">
-                <a:solidFill>
-                  <a:srgbClr val="212529"/>
-                </a:solidFill>
-              </a:rPr>
-              <a:t>PPF-2 (label_auto: Platea)</a:t>
-            </a:r>
-          </a:p>
-          <a:p>
-            <a:pPr>
-              <a:spcAft>
-                <a:spcPts val="300"/>
-              </a:spcAft>
-              <a:defRPr sz="1000" b="1">
-                <a:solidFill>
-                  <a:srgbClr val="134074"/>
-                </a:solidFill>
-                <a:latin typeface="Montserrat"/>
-              </a:defRPr>
-            </a:pPr>
-            <a:r>
-              <a:t>• Por Qué es Clave: </a:t>
-            </a:r>
-            <a:r>
-              <a:rPr b="0">
-                <a:solidFill>
-                  <a:srgbClr val="212529"/>
-                </a:solidFill>
-              </a:rPr>
-              <a:t>Demuestra que la normalización por venue evita el sesgo macro: $360k en teatro es el techo absoluto de precios y califica legítimamente como zona preferencial sin requerir el aforo de un estadio masivo.</a:t>
-            </a:r>
-          </a:p>
-        </p:txBody>
-      </p:sp>
-      <p:sp>
-        <p:nvSpPr>
-          <p:cNvPr id="8" name="Rounded Rectangle 7"/>
-          <p:cNvSpPr/>
-          <p:nvPr/>
-        </p:nvSpPr>
-        <p:spPr>
-          <a:xfrm>
-            <a:off x="6217920" y="1371600"/>
-            <a:ext cx="5212080" cy="4937760"/>
-          </a:xfrm>
-          <a:prstGeom prst="roundRect">
-            <a:avLst/>
-          </a:prstGeom>
-          <a:solidFill>
-            <a:srgbClr val="FFFFFF"/>
-          </a:solidFill>
-          <a:ln>
-            <a:solidFill>
-              <a:srgbClr val="D7DCE4"/>
-            </a:solidFill>
-          </a:ln>
-        </p:spPr>
-        <p:style>
-          <a:lnRef idx="1">
-            <a:schemeClr val="accent1"/>
-          </a:lnRef>
-          <a:fillRef idx="3">
-            <a:schemeClr val="accent1"/>
-          </a:fillRef>
-          <a:effectRef idx="2">
-            <a:schemeClr val="accent1"/>
-          </a:effectRef>
-          <a:fontRef idx="minor">
-            <a:schemeClr val="lt1"/>
-          </a:fontRef>
-        </p:style>
-        <p:txBody>
-          <a:bodyPr rtlCol="0" anchor="ctr"/>
-          <a:lstStyle/>
-          <a:p>
-            <a:pPr algn="ctr"/>
-          </a:p>
-        </p:txBody>
-      </p:sp>
-      <p:sp>
-        <p:nvSpPr>
-          <p:cNvPr id="9" name="Rounded Rectangle 8"/>
-          <p:cNvSpPr/>
-          <p:nvPr/>
-        </p:nvSpPr>
-        <p:spPr>
-          <a:xfrm>
-            <a:off x="6217920" y="1371600"/>
-            <a:ext cx="5212080" cy="640080"/>
-          </a:xfrm>
-          <a:prstGeom prst="roundRect">
-            <a:avLst/>
-          </a:prstGeom>
-          <a:solidFill>
-            <a:srgbClr val="E76F51"/>
-          </a:solidFill>
-          <a:ln>
-            <a:solidFill>
-              <a:srgbClr val="E76F51"/>
-            </a:solidFill>
-          </a:ln>
-        </p:spPr>
-        <p:style>
-          <a:lnRef idx="1">
-            <a:schemeClr val="accent1"/>
-          </a:lnRef>
-          <a:fillRef idx="3">
-            <a:schemeClr val="accent1"/>
-          </a:fillRef>
-          <a:effectRef idx="2">
-            <a:schemeClr val="accent1"/>
-          </a:effectRef>
-          <a:fontRef idx="minor">
-            <a:schemeClr val="lt1"/>
-          </a:fontRef>
-        </p:style>
-        <p:txBody>
-          <a:bodyPr rtlCol="0" anchor="ctr"/>
-          <a:lstStyle/>
-          <a:p>
-            <a:pPr algn="ctr"/>
-          </a:p>
-        </p:txBody>
-      </p:sp>
-      <p:sp>
-        <p:nvSpPr>
-          <p:cNvPr id="10" name="TextBox 9"/>
-          <p:cNvSpPr txBox="1"/>
-          <p:nvPr/>
-        </p:nvSpPr>
-        <p:spPr>
-          <a:xfrm>
-            <a:off x="6309360" y="1417320"/>
-            <a:ext cx="5029200" cy="457200"/>
-          </a:xfrm>
-          <a:prstGeom prst="rect">
-            <a:avLst/>
-          </a:prstGeom>
-          <a:noFill/>
-        </p:spPr>
-        <p:txBody>
-          <a:bodyPr wrap="none">
-            <a:spAutoFit/>
-          </a:bodyPr>
-          <a:lstStyle/>
-          <a:p>
-            <a:pPr>
-              <a:defRPr sz="1100" b="1">
-                <a:solidFill>
-                  <a:srgbClr val="FFFFFF"/>
-                </a:solidFill>
-                <a:latin typeface="Montserrat"/>
-              </a:defRPr>
-            </a:pPr>
-            <a:r>
-              <a:t>CASO PUENTE 2: 'FRONTERA HONESTA'</a:t>
-            </a:r>
-          </a:p>
-        </p:txBody>
-      </p:sp>
-      <p:sp>
-        <p:nvSpPr>
-          <p:cNvPr id="11" name="TextBox 10"/>
-          <p:cNvSpPr txBox="1"/>
-          <p:nvPr/>
-        </p:nvSpPr>
-        <p:spPr>
-          <a:xfrm>
-            <a:off x="6400800" y="2103120"/>
-            <a:ext cx="4846320" cy="4114800"/>
-          </a:xfrm>
-          <a:prstGeom prst="rect">
-            <a:avLst/>
-          </a:prstGeom>
-          <a:noFill/>
-        </p:spPr>
-        <p:txBody>
-          <a:bodyPr wrap="square">
-            <a:spAutoFit/>
-          </a:bodyPr>
-          <a:lstStyle/>
-          <a:p>
-            <a:pPr>
-              <a:spcAft>
-                <a:spcPts val="800"/>
-              </a:spcAft>
-              <a:defRPr sz="1100" b="1">
-                <a:solidFill>
-                  <a:srgbClr val="0B2545"/>
-                </a:solidFill>
-                <a:latin typeface="Montserrat"/>
-              </a:defRPr>
-            </a:pPr>
-            <a:r>
-              <a:t>El Sistema Sabe lo que No Sabe (Propagación de Incertidumbre)</a:t>
-            </a:r>
-          </a:p>
-          <a:p>
-            <a:pPr>
-              <a:spcAft>
-                <a:spcPts val="300"/>
-              </a:spcAft>
-              <a:defRPr sz="1000" b="1">
-                <a:solidFill>
-                  <a:srgbClr val="134074"/>
-                </a:solidFill>
-                <a:latin typeface="Montserrat"/>
-              </a:defRPr>
-            </a:pPr>
-            <a:r>
-              <a:t>• Localidad Comercial: </a:t>
-            </a:r>
-            <a:r>
-              <a:rPr b="0">
-                <a:solidFill>
-                  <a:srgbClr val="212529"/>
-                </a:solidFill>
-              </a:rPr>
-              <a:t>PLATEA (Teatro El Ensueño)</a:t>
-            </a:r>
-          </a:p>
-          <a:p>
-            <a:pPr>
-              <a:spcAft>
-                <a:spcPts val="300"/>
-              </a:spcAft>
-              <a:defRPr sz="1000" b="1">
-                <a:solidFill>
-                  <a:srgbClr val="134074"/>
-                </a:solidFill>
-                <a:latin typeface="Montserrat"/>
-              </a:defRPr>
-            </a:pPr>
-            <a:r>
-              <a:t>• Precio Nominal: </a:t>
-            </a:r>
-            <a:r>
-              <a:rPr b="0">
-                <a:solidFill>
-                  <a:srgbClr val="212529"/>
-                </a:solidFill>
-              </a:rPr>
-              <a:t>$45,000 COP</a:t>
-            </a:r>
-          </a:p>
-          <a:p>
-            <a:pPr>
-              <a:spcAft>
-                <a:spcPts val="300"/>
-              </a:spcAft>
-              <a:defRPr sz="1000" b="1">
-                <a:solidFill>
-                  <a:srgbClr val="134074"/>
-                </a:solidFill>
-                <a:latin typeface="Montserrat"/>
-              </a:defRPr>
-            </a:pPr>
-            <a:r>
-              <a:t>• Score de Confianza: </a:t>
-            </a:r>
-            <a:r>
-              <a:rPr b="0">
-                <a:solidFill>
-                  <a:srgbClr val="212529"/>
-                </a:solidFill>
-              </a:rPr>
-              <a:t>0.16% (Extremadamente bajo)</a:t>
-            </a:r>
-          </a:p>
-          <a:p>
-            <a:pPr>
-              <a:spcAft>
-                <a:spcPts val="300"/>
-              </a:spcAft>
-              <a:defRPr sz="1000" b="1">
-                <a:solidFill>
-                  <a:srgbClr val="134074"/>
-                </a:solidFill>
-                <a:latin typeface="Montserrat"/>
-              </a:defRPr>
-            </a:pPr>
-            <a:r>
-              <a:t>• Bandera de Frontera: </a:t>
-            </a:r>
-            <a:r>
-              <a:rPr b="0">
-                <a:solidFill>
-                  <a:srgbClr val="212529"/>
-                </a:solidFill>
-              </a:rPr>
-              <a:t>es_frontera = True</a:t>
-            </a:r>
-          </a:p>
-          <a:p>
-            <a:pPr>
-              <a:spcAft>
-                <a:spcPts val="300"/>
-              </a:spcAft>
-              <a:defRPr sz="1000" b="1">
-                <a:solidFill>
-                  <a:srgbClr val="134074"/>
-                </a:solidFill>
-                <a:latin typeface="Montserrat"/>
-              </a:defRPr>
-            </a:pPr>
-            <a:r>
-              <a:t>• Arquetipo Asignado: </a:t>
-            </a:r>
-            <a:r>
-              <a:rPr b="0">
-                <a:solidFill>
-                  <a:srgbClr val="212529"/>
-                </a:solidFill>
-              </a:rPr>
-              <a:t>Platea General / Intermedia (PGI-0)</a:t>
-            </a:r>
-          </a:p>
-          <a:p>
-            <a:pPr>
-              <a:spcAft>
-                <a:spcPts val="300"/>
-              </a:spcAft>
-              <a:defRPr sz="1000" b="1">
-                <a:solidFill>
-                  <a:srgbClr val="134074"/>
-                </a:solidFill>
-                <a:latin typeface="Montserrat"/>
-              </a:defRPr>
-            </a:pPr>
-            <a:r>
-              <a:t>• Propagación Downstream: </a:t>
-            </a:r>
-            <a:r>
-              <a:rPr b="0">
-                <a:solidFill>
-                  <a:srgbClr val="212529"/>
-                </a:solidFill>
-              </a:rPr>
-              <a:t>segmento_incierto = True</a:t>
-            </a:r>
-          </a:p>
-          <a:p>
-            <a:pPr>
-              <a:spcAft>
-                <a:spcPts val="300"/>
-              </a:spcAft>
-              <a:defRPr sz="1000" b="1">
-                <a:solidFill>
-                  <a:srgbClr val="134074"/>
-                </a:solidFill>
-                <a:latin typeface="Montserrat"/>
-              </a:defRPr>
-            </a:pPr>
-            <a:r>
-              <a:t>• Por Qué es Clave: </a:t>
-            </a:r>
-            <a:r>
-              <a:rPr b="0">
-                <a:solidFill>
-                  <a:srgbClr val="212529"/>
-                </a:solidFill>
-              </a:rPr>
-              <a:t>El vector se ubicó en el límite difuso entre Platea General y Preferencial. El modelo no fuerza una certeza ficticia: asigna la mejor estimación pero enciende la bandera para auditoría humana.</a:t>
-            </a:r>
-          </a:p>
-        </p:txBody>
-      </p:sp>
+        </p:spPr>
+      </p:pic>
     </p:spTree>
   </p:cSld>
   <p:clrMapOvr>
@@ -7604,7 +8392,7 @@
               </a:defRPr>
             </a:pPr>
             <a:r>
-              <a:t>CONTRATO DE NEGOCIO Y EXCLUSIONES</a:t>
+              <a:t>EVIDENCIA POR SEGMENTO: SEGMENTO MASIVOS</a:t>
             </a:r>
           </a:p>
         </p:txBody>
@@ -7640,403 +8428,35 @@
               </a:defRPr>
             </a:pPr>
             <a:r>
-              <a:t>Caso Puente 3: 'El Parqueadero Excluido' (Regla 8 y Coherencia de Catálogo)</a:t>
-            </a:r>
-          </a:p>
-        </p:txBody>
-      </p:sp>
-      <p:sp>
-        <p:nvSpPr>
-          <p:cNvPr id="4" name="Rounded Rectangle 3"/>
-          <p:cNvSpPr/>
+              <a:t>Granularidad Interna en Platea General, Popular y Grada Masiva (PGI, POP, GGM)</a:t>
+            </a:r>
+          </a:p>
+        </p:txBody>
+      </p:sp>
+      <p:pic>
+        <p:nvPicPr>
+          <p:cNvPr id="4" name="Picture 3" descr="fig_galeria_masivos.png"/>
+          <p:cNvPicPr>
+            <a:picLocks noChangeAspect="1"/>
+          </p:cNvPicPr>
           <p:nvPr/>
-        </p:nvSpPr>
-        <p:spPr>
-          <a:xfrm>
-            <a:off x="731520" y="1371600"/>
-            <a:ext cx="5212080" cy="4937760"/>
-          </a:xfrm>
-          <a:prstGeom prst="roundRect">
-            <a:avLst/>
-          </a:prstGeom>
-          <a:solidFill>
-            <a:srgbClr val="FFFFFF"/>
-          </a:solidFill>
-          <a:ln>
-            <a:solidFill>
-              <a:srgbClr val="D7DCE4"/>
-            </a:solidFill>
-          </a:ln>
-        </p:spPr>
-        <p:style>
-          <a:lnRef idx="1">
-            <a:schemeClr val="accent1"/>
-          </a:lnRef>
-          <a:fillRef idx="3">
-            <a:schemeClr val="accent1"/>
-          </a:fillRef>
-          <a:effectRef idx="2">
-            <a:schemeClr val="accent1"/>
-          </a:effectRef>
-          <a:fontRef idx="minor">
-            <a:schemeClr val="lt1"/>
-          </a:fontRef>
-        </p:style>
-        <p:txBody>
-          <a:bodyPr rtlCol="0" anchor="ctr"/>
-          <a:lstStyle/>
-          <a:p>
-            <a:pPr algn="ctr"/>
-          </a:p>
-        </p:txBody>
-      </p:sp>
-      <p:sp>
-        <p:nvSpPr>
-          <p:cNvPr id="5" name="TextBox 4"/>
-          <p:cNvSpPr txBox="1"/>
-          <p:nvPr/>
-        </p:nvSpPr>
-        <p:spPr>
-          <a:xfrm>
-            <a:off x="914400" y="1554480"/>
-            <a:ext cx="4846320" cy="4572000"/>
+        </p:nvPicPr>
+        <p:blipFill>
+          <a:blip r:embed="rId4"/>
+          <a:stretch>
+            <a:fillRect/>
+          </a:stretch>
+        </p:blipFill>
+        <p:spPr>
+          <a:xfrm>
+            <a:off x="731520" y="1280160"/>
+            <a:ext cx="10698480" cy="5029200"/>
           </a:xfrm>
           <a:prstGeom prst="rect">
             <a:avLst/>
           </a:prstGeom>
-          <a:noFill/>
-        </p:spPr>
-        <p:txBody>
-          <a:bodyPr wrap="square">
-            <a:spAutoFit/>
-          </a:bodyPr>
-          <a:lstStyle/>
-          <a:p>
-            <a:pPr>
-              <a:spcAft>
-                <a:spcPts val="1200"/>
-              </a:spcAft>
-              <a:defRPr sz="1200" b="1">
-                <a:solidFill>
-                  <a:srgbClr val="0B2545"/>
-                </a:solidFill>
-                <a:latin typeface="Montserrat"/>
-              </a:defRPr>
-            </a:pPr>
-            <a:r>
-              <a:t>EL HALLAZGO HISTÓRICO EN PRUEBAS INICIALES</a:t>
-            </a:r>
-          </a:p>
-          <a:p>
-            <a:pPr>
-              <a:spcAft>
-                <a:spcPts val="200"/>
-              </a:spcAft>
-              <a:defRPr sz="1100" b="1">
-                <a:solidFill>
-                  <a:srgbClr val="134074"/>
-                </a:solidFill>
-                <a:latin typeface="Montserrat"/>
-              </a:defRPr>
-            </a:pPr>
-            <a:r>
-              <a:t>• El Problema Detectado:</a:t>
-            </a:r>
-          </a:p>
-          <a:p>
-            <a:pPr>
-              <a:spcAft>
-                <a:spcPts val="800"/>
-              </a:spcAft>
-              <a:defRPr sz="1000">
-                <a:solidFill>
-                  <a:srgbClr val="212529"/>
-                </a:solidFill>
-                <a:latin typeface="Montserrat"/>
-              </a:defRPr>
-            </a:pPr>
-            <a:r>
-              <a:t>  En la primera marcha blanca, los boletos auxiliares de parqueadero recibían arquetipos (ej. Admisión Única) distorsionando la capacidad del show.</a:t>
-            </a:r>
-          </a:p>
-          <a:p>
-            <a:pPr>
-              <a:spcAft>
-                <a:spcPts val="200"/>
-              </a:spcAft>
-              <a:defRPr sz="1100" b="1">
-                <a:solidFill>
-                  <a:srgbClr val="134074"/>
-                </a:solidFill>
-                <a:latin typeface="Montserrat"/>
-              </a:defRPr>
-            </a:pPr>
-            <a:r>
-              <a:t>• La Causa Raíz:</a:t>
-            </a:r>
-          </a:p>
-          <a:p>
-            <a:pPr>
-              <a:spcAft>
-                <a:spcPts val="800"/>
-              </a:spcAft>
-              <a:defRPr sz="1000">
-                <a:solidFill>
-                  <a:srgbClr val="212529"/>
-                </a:solidFill>
-                <a:latin typeface="Montserrat"/>
-              </a:defRPr>
-            </a:pPr>
-            <a:r>
-              <a:t>  El blob de prueba provino de una etapa cruda que no ejecutó el notebook 00 de Spark donde vivían las exclusiones históricas.</a:t>
-            </a:r>
-          </a:p>
-          <a:p>
-            <a:pPr>
-              <a:spcAft>
-                <a:spcPts val="200"/>
-              </a:spcAft>
-              <a:defRPr sz="1100" b="1">
-                <a:solidFill>
-                  <a:srgbClr val="134074"/>
-                </a:solidFill>
-                <a:latin typeface="Montserrat"/>
-              </a:defRPr>
-            </a:pPr>
-            <a:r>
-              <a:t>• Riesgo para el Negocio:</a:t>
-            </a:r>
-          </a:p>
-          <a:p>
-            <a:pPr>
-              <a:spcAft>
-                <a:spcPts val="800"/>
-              </a:spcAft>
-              <a:defRPr sz="1000">
-                <a:solidFill>
-                  <a:srgbClr val="212529"/>
-                </a:solidFill>
-                <a:latin typeface="Montserrat"/>
-              </a:defRPr>
-            </a:pPr>
-            <a:r>
-              <a:t>  Los modelos downstream de demanda y aforo asumirían que las plazas de estacionamiento eran sillas de espectadores.</a:t>
-            </a:r>
-          </a:p>
-        </p:txBody>
-      </p:sp>
-      <p:sp>
-        <p:nvSpPr>
-          <p:cNvPr id="6" name="Rounded Rectangle 5"/>
-          <p:cNvSpPr/>
-          <p:nvPr/>
-        </p:nvSpPr>
-        <p:spPr>
-          <a:xfrm>
-            <a:off x="6217920" y="1371600"/>
-            <a:ext cx="5212080" cy="4937760"/>
-          </a:xfrm>
-          <a:prstGeom prst="roundRect">
-            <a:avLst/>
-          </a:prstGeom>
-          <a:solidFill>
-            <a:srgbClr val="FFFFFF"/>
-          </a:solidFill>
-          <a:ln>
-            <a:solidFill>
-              <a:srgbClr val="D7DCE4"/>
-            </a:solidFill>
-          </a:ln>
-        </p:spPr>
-        <p:style>
-          <a:lnRef idx="1">
-            <a:schemeClr val="accent1"/>
-          </a:lnRef>
-          <a:fillRef idx="3">
-            <a:schemeClr val="accent1"/>
-          </a:fillRef>
-          <a:effectRef idx="2">
-            <a:schemeClr val="accent1"/>
-          </a:effectRef>
-          <a:fontRef idx="minor">
-            <a:schemeClr val="lt1"/>
-          </a:fontRef>
-        </p:style>
-        <p:txBody>
-          <a:bodyPr rtlCol="0" anchor="ctr"/>
-          <a:lstStyle/>
-          <a:p>
-            <a:pPr algn="ctr"/>
-          </a:p>
-        </p:txBody>
-      </p:sp>
-      <p:sp>
-        <p:nvSpPr>
-          <p:cNvPr id="7" name="TextBox 6"/>
-          <p:cNvSpPr txBox="1"/>
-          <p:nvPr/>
-        </p:nvSpPr>
-        <p:spPr>
-          <a:xfrm>
-            <a:off x="6400800" y="1554480"/>
-            <a:ext cx="4846320" cy="4572000"/>
-          </a:xfrm>
-          <a:prstGeom prst="rect">
-            <a:avLst/>
-          </a:prstGeom>
-          <a:noFill/>
-        </p:spPr>
-        <p:txBody>
-          <a:bodyPr wrap="square">
-            <a:spAutoFit/>
-          </a:bodyPr>
-          <a:lstStyle/>
-          <a:p>
-            <a:pPr>
-              <a:spcAft>
-                <a:spcPts val="1200"/>
-              </a:spcAft>
-              <a:defRPr sz="1200" b="1">
-                <a:solidFill>
-                  <a:srgbClr val="0B2545"/>
-                </a:solidFill>
-                <a:latin typeface="Montserrat"/>
-              </a:defRPr>
-            </a:pPr>
-            <a:r>
-              <a:t>LA SOLUCIÓN: REGLA 8 EN EL PIPELINE PYTHON</a:t>
-            </a:r>
-          </a:p>
-          <a:p>
-            <a:pPr>
-              <a:spcAft>
-                <a:spcPts val="200"/>
-              </a:spcAft>
-              <a:defRPr sz="1100" b="1">
-                <a:solidFill>
-                  <a:srgbClr val="134074"/>
-                </a:solidFill>
-                <a:latin typeface="Montserrat"/>
-              </a:defRPr>
-            </a:pPr>
-            <a:r>
-              <a:t>• Unificación del Contrato:</a:t>
-            </a:r>
-          </a:p>
-          <a:p>
-            <a:pPr>
-              <a:spcAft>
-                <a:spcPts val="800"/>
-              </a:spcAft>
-              <a:defRPr sz="1000">
-                <a:solidFill>
-                  <a:srgbClr val="212529"/>
-                </a:solidFill>
-                <a:latin typeface="Montserrat"/>
-              </a:defRPr>
-            </a:pPr>
-            <a:r>
-              <a:t>  Regla 8 incorporada en filtrar_consistencia_localidades con matching case-insensitive para TEST, CANCELAD, PARQUEA y NO USAR.</a:t>
-            </a:r>
-          </a:p>
-          <a:p>
-            <a:pPr>
-              <a:spcAft>
-                <a:spcPts val="200"/>
-              </a:spcAft>
-              <a:defRPr sz="1100" b="1">
-                <a:solidFill>
-                  <a:srgbClr val="134074"/>
-                </a:solidFill>
-                <a:latin typeface="Montserrat"/>
-              </a:defRPr>
-            </a:pPr>
-            <a:r>
-              <a:t>• 13,020 Filas Crudas Interceptadas:</a:t>
-            </a:r>
-          </a:p>
-          <a:p>
-            <a:pPr>
-              <a:spcAft>
-                <a:spcPts val="800"/>
-              </a:spcAft>
-              <a:defRPr sz="1000">
-                <a:solidFill>
-                  <a:srgbClr val="212529"/>
-                </a:solidFill>
-                <a:latin typeface="Montserrat"/>
-              </a:defRPr>
-            </a:pPr>
-            <a:r>
-              <a:t>  Check E detectó 18,420 filas técnicas en crudo (13,020 parqueaderos, 5,209 cancelados, 144 test).</a:t>
-            </a:r>
-          </a:p>
-          <a:p>
-            <a:pPr>
-              <a:spcAft>
-                <a:spcPts val="200"/>
-              </a:spcAft>
-              <a:defRPr sz="1100" b="1">
-                <a:solidFill>
-                  <a:srgbClr val="134074"/>
-                </a:solidFill>
-                <a:latin typeface="Montserrat"/>
-              </a:defRPr>
-            </a:pPr>
-            <a:r>
-              <a:t>• 205 Localidades Activas Excluidas:</a:t>
-            </a:r>
-          </a:p>
-          <a:p>
-            <a:pPr>
-              <a:spcAft>
-                <a:spcPts val="800"/>
-              </a:spcAft>
-              <a:defRPr sz="1000">
-                <a:solidFill>
-                  <a:srgbClr val="212529"/>
-                </a:solidFill>
-                <a:latin typeface="Montserrat"/>
-              </a:defRPr>
-            </a:pPr>
-            <a:r>
-              <a:t>  La Regla 8 eliminó las 205 localidades activas remanentes post-filtro.</a:t>
-            </a:r>
-          </a:p>
-          <a:p>
-            <a:pPr>
-              <a:spcAft>
-                <a:spcPts val="200"/>
-              </a:spcAft>
-              <a:defRPr sz="1100" b="1">
-                <a:solidFill>
-                  <a:srgbClr val="134074"/>
-                </a:solidFill>
-                <a:latin typeface="Montserrat"/>
-              </a:defRPr>
-            </a:pPr>
-            <a:r>
-              <a:t>• Resultado Certificado:</a:t>
-            </a:r>
-          </a:p>
-          <a:p>
-            <a:pPr>
-              <a:spcAft>
-                <a:spcPts val="800"/>
-              </a:spcAft>
-              <a:defRPr sz="1000">
-                <a:solidFill>
-                  <a:srgbClr val="212529"/>
-                </a:solidFill>
-                <a:latin typeface="Montserrat"/>
-              </a:defRPr>
-            </a:pPr>
-            <a:r>
-              <a:t>  0 parqueaderos ingresaron al pipeline; catálogo 100% libre de contaminación auxiliar.</a:t>
-            </a:r>
-          </a:p>
-        </p:txBody>
-      </p:sp>
+        </p:spPr>
+      </p:pic>
     </p:spTree>
   </p:cSld>
   <p:clrMapOvr>
@@ -8100,7 +8520,7 @@
               </a:defRPr>
             </a:pPr>
             <a:r>
-              <a:t>MÉTRICAS DE CALIDAD Y CONFIABILIDAD</a:t>
+              <a:t>CASOS ESPECIALES: CALIDAD MATEMÁTICA Y FRONTERAS</a:t>
             </a:r>
           </a:p>
         </p:txBody>
@@ -8136,21 +8556,45 @@
               </a:defRPr>
             </a:pPr>
             <a:r>
-              <a:t>Evaluación Cuantitativa de la Marcha Blanca y Estabilidad Estadística Documentada</a:t>
-            </a:r>
-          </a:p>
-        </p:txBody>
-      </p:sp>
-      <p:sp>
-        <p:nvSpPr>
-          <p:cNvPr id="4" name="Rounded Rectangle 3"/>
+              <a:t>Admisión Única Determinística, Banderas de Frontera y Clusters Léxicos Híbridos</a:t>
+            </a:r>
+          </a:p>
+        </p:txBody>
+      </p:sp>
+      <p:pic>
+        <p:nvPicPr>
+          <p:cNvPr id="4" name="Picture 3" descr="fig_galeria_especiales.png"/>
+          <p:cNvPicPr>
+            <a:picLocks noChangeAspect="1"/>
+          </p:cNvPicPr>
+          <p:nvPr/>
+        </p:nvPicPr>
+        <p:blipFill>
+          <a:blip r:embed="rId4"/>
+          <a:stretch>
+            <a:fillRect/>
+          </a:stretch>
+        </p:blipFill>
+        <p:spPr>
+          <a:xfrm>
+            <a:off x="731520" y="1280160"/>
+            <a:ext cx="6858000" cy="5029200"/>
+          </a:xfrm>
+          <a:prstGeom prst="rect">
+            <a:avLst/>
+          </a:prstGeom>
+        </p:spPr>
+      </p:pic>
+      <p:sp>
+        <p:nvSpPr>
+          <p:cNvPr id="5" name="Rounded Rectangle 4"/>
           <p:cNvSpPr/>
           <p:nvPr/>
         </p:nvSpPr>
         <p:spPr>
           <a:xfrm>
-            <a:off x="731520" y="1371600"/>
-            <a:ext cx="5212080" cy="2286000"/>
+            <a:off x="7772400" y="1280160"/>
+            <a:ext cx="3657600" cy="5029200"/>
           </a:xfrm>
           <a:prstGeom prst="roundRect">
             <a:avLst/>
@@ -8188,59 +8632,14 @@
       </p:sp>
       <p:sp>
         <p:nvSpPr>
-          <p:cNvPr id="5" name="Rounded Rectangle 4"/>
-          <p:cNvSpPr/>
-          <p:nvPr/>
-        </p:nvSpPr>
-        <p:spPr>
-          <a:xfrm>
-            <a:off x="731520" y="1371600"/>
-            <a:ext cx="182880" cy="2286000"/>
-          </a:xfrm>
-          <a:prstGeom prst="roundRect">
-            <a:avLst/>
-          </a:prstGeom>
-          <a:solidFill>
-            <a:srgbClr val="009688"/>
-          </a:solidFill>
-          <a:ln>
-            <a:solidFill>
-              <a:srgbClr val="009688"/>
-            </a:solidFill>
-          </a:ln>
-        </p:spPr>
-        <p:style>
-          <a:lnRef idx="1">
-            <a:schemeClr val="accent1"/>
-          </a:lnRef>
-          <a:fillRef idx="3">
-            <a:schemeClr val="accent1"/>
-          </a:fillRef>
-          <a:effectRef idx="2">
-            <a:schemeClr val="accent1"/>
-          </a:effectRef>
-          <a:fontRef idx="minor">
-            <a:schemeClr val="lt1"/>
-          </a:fontRef>
-        </p:style>
-        <p:txBody>
-          <a:bodyPr rtlCol="0" anchor="ctr"/>
-          <a:lstStyle/>
-          <a:p>
-            <a:pPr algn="ctr"/>
-          </a:p>
-        </p:txBody>
-      </p:sp>
-      <p:sp>
-        <p:nvSpPr>
           <p:cNvPr id="6" name="TextBox 5"/>
           <p:cNvSpPr txBox="1"/>
           <p:nvPr/>
         </p:nvSpPr>
         <p:spPr>
           <a:xfrm>
-            <a:off x="1097280" y="1554480"/>
-            <a:ext cx="4663440" cy="1920240"/>
+            <a:off x="7909560" y="1417320"/>
+            <a:ext cx="3383280" cy="4754880"/>
           </a:xfrm>
           <a:prstGeom prst="rect">
             <a:avLst/>
@@ -8257,36 +8656,23 @@
               <a:spcAft>
                 <a:spcPts val="200"/>
               </a:spcAft>
-              <a:defRPr sz="2400" b="1">
-                <a:solidFill>
-                  <a:srgbClr val="009688"/>
-                </a:solidFill>
-                <a:latin typeface="Montserrat"/>
-              </a:defRPr>
-            </a:pPr>
-            <a:r>
-              <a:t>0.6314 (63.14%)</a:t>
+              <a:defRPr sz="1100" b="1">
+                <a:solidFill>
+                  <a:srgbClr val="134074"/>
+                </a:solidFill>
+                <a:latin typeface="Montserrat"/>
+              </a:defRPr>
+            </a:pPr>
+            <a:r>
+              <a:t>AU-0: Admisión Única (100% Confianza)</a:t>
             </a:r>
           </a:p>
           <a:p>
             <a:pPr>
               <a:spcAft>
-                <a:spcPts val="600"/>
+                <a:spcPts val="800"/>
               </a:spcAft>
-              <a:defRPr sz="1100" b="1">
-                <a:solidFill>
-                  <a:srgbClr val="0B2545"/>
-                </a:solidFill>
-                <a:latin typeface="Montserrat"/>
-              </a:defRPr>
-            </a:pPr>
-            <a:r>
-              <a:t>SCORE DE CONFIANZA GEOMÉTRICO MEDIO</a:t>
-            </a:r>
-          </a:p>
-          <a:p>
-            <a:pPr>
-              <a:defRPr sz="1000">
+              <a:defRPr sz="950">
                 <a:solidFill>
                   <a:srgbClr val="212529"/>
                 </a:solidFill>
@@ -8294,157 +8680,31 @@
               </a:defRPr>
             </a:pPr>
             <a:r>
-              <a:t>Supera ampliamente el umbral operacional mínimo de 0.50. Alta certidumbre en asignación de centroides.</a:t>
-            </a:r>
-          </a:p>
-        </p:txBody>
-      </p:sp>
-      <p:sp>
-        <p:nvSpPr>
-          <p:cNvPr id="7" name="Rounded Rectangle 6"/>
-          <p:cNvSpPr/>
-          <p:nvPr/>
-        </p:nvSpPr>
-        <p:spPr>
-          <a:xfrm>
-            <a:off x="6217920" y="1371600"/>
-            <a:ext cx="5212080" cy="2286000"/>
-          </a:xfrm>
-          <a:prstGeom prst="roundRect">
-            <a:avLst/>
-          </a:prstGeom>
-          <a:solidFill>
-            <a:srgbClr val="FFFFFF"/>
-          </a:solidFill>
-          <a:ln>
-            <a:solidFill>
-              <a:srgbClr val="D7DCE4"/>
-            </a:solidFill>
-          </a:ln>
-        </p:spPr>
-        <p:style>
-          <a:lnRef idx="1">
-            <a:schemeClr val="accent1"/>
-          </a:lnRef>
-          <a:fillRef idx="3">
-            <a:schemeClr val="accent1"/>
-          </a:fillRef>
-          <a:effectRef idx="2">
-            <a:schemeClr val="accent1"/>
-          </a:effectRef>
-          <a:fontRef idx="minor">
-            <a:schemeClr val="lt1"/>
-          </a:fontRef>
-        </p:style>
-        <p:txBody>
-          <a:bodyPr rtlCol="0" anchor="ctr"/>
-          <a:lstStyle/>
-          <a:p>
-            <a:pPr algn="ctr"/>
-          </a:p>
-        </p:txBody>
-      </p:sp>
-      <p:sp>
-        <p:nvSpPr>
-          <p:cNvPr id="8" name="Rounded Rectangle 7"/>
-          <p:cNvSpPr/>
-          <p:nvPr/>
-        </p:nvSpPr>
-        <p:spPr>
-          <a:xfrm>
-            <a:off x="6217920" y="1371600"/>
-            <a:ext cx="182880" cy="2286000"/>
-          </a:xfrm>
-          <a:prstGeom prst="roundRect">
-            <a:avLst/>
-          </a:prstGeom>
-          <a:solidFill>
-            <a:srgbClr val="134074"/>
-          </a:solidFill>
-          <a:ln>
-            <a:solidFill>
-              <a:srgbClr val="134074"/>
-            </a:solidFill>
-          </a:ln>
-        </p:spPr>
-        <p:style>
-          <a:lnRef idx="1">
-            <a:schemeClr val="accent1"/>
-          </a:lnRef>
-          <a:fillRef idx="3">
-            <a:schemeClr val="accent1"/>
-          </a:fillRef>
-          <a:effectRef idx="2">
-            <a:schemeClr val="accent1"/>
-          </a:effectRef>
-          <a:fontRef idx="minor">
-            <a:schemeClr val="lt1"/>
-          </a:fontRef>
-        </p:style>
-        <p:txBody>
-          <a:bodyPr rtlCol="0" anchor="ctr"/>
-          <a:lstStyle/>
-          <a:p>
-            <a:pPr algn="ctr"/>
-          </a:p>
-        </p:txBody>
-      </p:sp>
-      <p:sp>
-        <p:nvSpPr>
-          <p:cNvPr id="9" name="TextBox 8"/>
-          <p:cNvSpPr txBox="1"/>
-          <p:nvPr/>
-        </p:nvSpPr>
-        <p:spPr>
-          <a:xfrm>
-            <a:off x="6583680" y="1554480"/>
-            <a:ext cx="4663440" cy="1920240"/>
-          </a:xfrm>
-          <a:prstGeom prst="rect">
-            <a:avLst/>
-          </a:prstGeom>
-          <a:noFill/>
-        </p:spPr>
-        <p:txBody>
-          <a:bodyPr wrap="square">
-            <a:spAutoFit/>
-          </a:bodyPr>
-          <a:lstStyle/>
+              <a:t>Eventos mono-zona o boletos de acceso irrestricto (Meet &amp; Greet, Galerías). Pasa por nodo determinístico.</a:t>
+            </a:r>
+          </a:p>
           <a:p>
             <a:pPr>
               <a:spcAft>
                 <a:spcPts val="200"/>
               </a:spcAft>
-              <a:defRPr sz="2400" b="1">
-                <a:solidFill>
-                  <a:srgbClr val="134074"/>
-                </a:solidFill>
-                <a:latin typeface="Montserrat"/>
-              </a:defRPr>
-            </a:pPr>
-            <a:r>
-              <a:t>14.27%</a:t>
+              <a:defRPr sz="1100" b="1">
+                <a:solidFill>
+                  <a:srgbClr val="E76F51"/>
+                </a:solidFill>
+                <a:latin typeface="Montserrat"/>
+              </a:defRPr>
+            </a:pPr>
+            <a:r>
+              <a:t>Fronteras Estadísticas (Borde Punteado)</a:t>
             </a:r>
           </a:p>
           <a:p>
             <a:pPr>
               <a:spcAft>
-                <a:spcPts val="600"/>
+                <a:spcPts val="800"/>
               </a:spcAft>
-              <a:defRPr sz="1100" b="1">
-                <a:solidFill>
-                  <a:srgbClr val="0B2545"/>
-                </a:solidFill>
-                <a:latin typeface="Montserrat"/>
-              </a:defRPr>
-            </a:pPr>
-            <a:r>
-              <a:t>TASA DE LOCALIDADES EN FRONTERA</a:t>
-            </a:r>
-          </a:p>
-          <a:p>
-            <a:pPr>
-              <a:defRPr sz="1000">
+              <a:defRPr sz="950">
                 <a:solidFill>
                   <a:srgbClr val="212529"/>
                 </a:solidFill>
@@ -8452,157 +8712,31 @@
               </a:defRPr>
             </a:pPr>
             <a:r>
-              <a:t>Dentro del margen seguro previsto (&lt; 20.0%). El 85.73% restante de las localidades se ubica con certidumbre nítida.</a:t>
-            </a:r>
-          </a:p>
-        </p:txBody>
-      </p:sp>
-      <p:sp>
-        <p:nvSpPr>
-          <p:cNvPr id="10" name="Rounded Rectangle 9"/>
-          <p:cNvSpPr/>
-          <p:nvPr/>
-        </p:nvSpPr>
-        <p:spPr>
-          <a:xfrm>
-            <a:off x="731520" y="3840480"/>
-            <a:ext cx="5212080" cy="2286000"/>
-          </a:xfrm>
-          <a:prstGeom prst="roundRect">
-            <a:avLst/>
-          </a:prstGeom>
-          <a:solidFill>
-            <a:srgbClr val="FFFFFF"/>
-          </a:solidFill>
-          <a:ln>
-            <a:solidFill>
-              <a:srgbClr val="D7DCE4"/>
-            </a:solidFill>
-          </a:ln>
-        </p:spPr>
-        <p:style>
-          <a:lnRef idx="1">
-            <a:schemeClr val="accent1"/>
-          </a:lnRef>
-          <a:fillRef idx="3">
-            <a:schemeClr val="accent1"/>
-          </a:fillRef>
-          <a:effectRef idx="2">
-            <a:schemeClr val="accent1"/>
-          </a:effectRef>
-          <a:fontRef idx="minor">
-            <a:schemeClr val="lt1"/>
-          </a:fontRef>
-        </p:style>
-        <p:txBody>
-          <a:bodyPr rtlCol="0" anchor="ctr"/>
-          <a:lstStyle/>
-          <a:p>
-            <a:pPr algn="ctr"/>
-          </a:p>
-        </p:txBody>
-      </p:sp>
-      <p:sp>
-        <p:nvSpPr>
-          <p:cNvPr id="11" name="Rounded Rectangle 10"/>
-          <p:cNvSpPr/>
-          <p:nvPr/>
-        </p:nvSpPr>
-        <p:spPr>
-          <a:xfrm>
-            <a:off x="731520" y="3840480"/>
-            <a:ext cx="182880" cy="2286000"/>
-          </a:xfrm>
-          <a:prstGeom prst="roundRect">
-            <a:avLst/>
-          </a:prstGeom>
-          <a:solidFill>
-            <a:srgbClr val="0B2545"/>
-          </a:solidFill>
-          <a:ln>
-            <a:solidFill>
-              <a:srgbClr val="0B2545"/>
-            </a:solidFill>
-          </a:ln>
-        </p:spPr>
-        <p:style>
-          <a:lnRef idx="1">
-            <a:schemeClr val="accent1"/>
-          </a:lnRef>
-          <a:fillRef idx="3">
-            <a:schemeClr val="accent1"/>
-          </a:fillRef>
-          <a:effectRef idx="2">
-            <a:schemeClr val="accent1"/>
-          </a:effectRef>
-          <a:fontRef idx="minor">
-            <a:schemeClr val="lt1"/>
-          </a:fontRef>
-        </p:style>
-        <p:txBody>
-          <a:bodyPr rtlCol="0" anchor="ctr"/>
-          <a:lstStyle/>
-          <a:p>
-            <a:pPr algn="ctr"/>
-          </a:p>
-        </p:txBody>
-      </p:sp>
-      <p:sp>
-        <p:nvSpPr>
-          <p:cNvPr id="12" name="TextBox 11"/>
-          <p:cNvSpPr txBox="1"/>
-          <p:nvPr/>
-        </p:nvSpPr>
-        <p:spPr>
-          <a:xfrm>
-            <a:off x="1097280" y="4023360"/>
-            <a:ext cx="4663440" cy="1920240"/>
-          </a:xfrm>
-          <a:prstGeom prst="rect">
-            <a:avLst/>
-          </a:prstGeom>
-          <a:noFill/>
-        </p:spPr>
-        <p:txBody>
-          <a:bodyPr wrap="square">
-            <a:spAutoFit/>
-          </a:bodyPr>
-          <a:lstStyle/>
+              <a:t>Confianzas &lt; 0.50 entre zonas difusas (ej. Platea en Teatro El Ensueño con 0.16%). Activa segmento_incierto=True.</a:t>
+            </a:r>
+          </a:p>
           <a:p>
             <a:pPr>
               <a:spcAft>
                 <a:spcPts val="200"/>
               </a:spcAft>
-              <a:defRPr sz="2400" b="1">
-                <a:solidFill>
-                  <a:srgbClr val="0B2545"/>
-                </a:solidFill>
-                <a:latin typeface="Montserrat"/>
-              </a:defRPr>
-            </a:pPr>
-            <a:r>
-              <a:t>0.00%</a:t>
+              <a:defRPr sz="1100" b="1">
+                <a:solidFill>
+                  <a:srgbClr val="134074"/>
+                </a:solidFill>
+                <a:latin typeface="Montserrat"/>
+              </a:defRPr>
+            </a:pPr>
+            <a:r>
+              <a:t>Clusters Híbridos (Badge HÍBRIDO)</a:t>
             </a:r>
           </a:p>
           <a:p>
             <a:pPr>
               <a:spcAft>
-                <a:spcPts val="600"/>
+                <a:spcPts val="800"/>
               </a:spcAft>
-              <a:defRPr sz="1100" b="1">
-                <a:solidFill>
-                  <a:srgbClr val="0B2545"/>
-                </a:solidFill>
-                <a:latin typeface="Montserrat"/>
-              </a:defRPr>
-            </a:pPr>
-            <a:r>
-              <a:t>TASA DE TEXTO VACÍO POST-FILTRO</a:t>
-            </a:r>
-          </a:p>
-          <a:p>
-            <a:pPr>
-              <a:defRPr sz="1000">
+              <a:defRPr sz="950">
                 <a:solidFill>
                   <a:srgbClr val="212529"/>
                 </a:solidFill>
@@ -8610,157 +8744,31 @@
               </a:defRPr>
             </a:pPr>
             <a:r>
-              <a:t>100% de cobertura de nombres semánticos. Cero localidades en blanco procesadas por el modelo.</a:t>
-            </a:r>
-          </a:p>
-        </p:txBody>
-      </p:sp>
-      <p:sp>
-        <p:nvSpPr>
-          <p:cNvPr id="13" name="Rounded Rectangle 12"/>
-          <p:cNvSpPr/>
-          <p:nvPr/>
-        </p:nvSpPr>
-        <p:spPr>
-          <a:xfrm>
-            <a:off x="6217920" y="3840480"/>
-            <a:ext cx="5212080" cy="2286000"/>
-          </a:xfrm>
-          <a:prstGeom prst="roundRect">
-            <a:avLst/>
-          </a:prstGeom>
-          <a:solidFill>
-            <a:srgbClr val="FFFFFF"/>
-          </a:solidFill>
-          <a:ln>
-            <a:solidFill>
-              <a:srgbClr val="D7DCE4"/>
-            </a:solidFill>
-          </a:ln>
-        </p:spPr>
-        <p:style>
-          <a:lnRef idx="1">
-            <a:schemeClr val="accent1"/>
-          </a:lnRef>
-          <a:fillRef idx="3">
-            <a:schemeClr val="accent1"/>
-          </a:fillRef>
-          <a:effectRef idx="2">
-            <a:schemeClr val="accent1"/>
-          </a:effectRef>
-          <a:fontRef idx="minor">
-            <a:schemeClr val="lt1"/>
-          </a:fontRef>
-        </p:style>
-        <p:txBody>
-          <a:bodyPr rtlCol="0" anchor="ctr"/>
-          <a:lstStyle/>
-          <a:p>
-            <a:pPr algn="ctr"/>
-          </a:p>
-        </p:txBody>
-      </p:sp>
-      <p:sp>
-        <p:nvSpPr>
-          <p:cNvPr id="14" name="Rounded Rectangle 13"/>
-          <p:cNvSpPr/>
-          <p:nvPr/>
-        </p:nvSpPr>
-        <p:spPr>
-          <a:xfrm>
-            <a:off x="6217920" y="3840480"/>
-            <a:ext cx="182880" cy="2286000"/>
-          </a:xfrm>
-          <a:prstGeom prst="roundRect">
-            <a:avLst/>
-          </a:prstGeom>
-          <a:solidFill>
-            <a:srgbClr val="E76F51"/>
-          </a:solidFill>
-          <a:ln>
-            <a:solidFill>
-              <a:srgbClr val="E76F51"/>
-            </a:solidFill>
-          </a:ln>
-        </p:spPr>
-        <p:style>
-          <a:lnRef idx="1">
-            <a:schemeClr val="accent1"/>
-          </a:lnRef>
-          <a:fillRef idx="3">
-            <a:schemeClr val="accent1"/>
-          </a:fillRef>
-          <a:effectRef idx="2">
-            <a:schemeClr val="accent1"/>
-          </a:effectRef>
-          <a:fontRef idx="minor">
-            <a:schemeClr val="lt1"/>
-          </a:fontRef>
-        </p:style>
-        <p:txBody>
-          <a:bodyPr rtlCol="0" anchor="ctr"/>
-          <a:lstStyle/>
-          <a:p>
-            <a:pPr algn="ctr"/>
-          </a:p>
-        </p:txBody>
-      </p:sp>
-      <p:sp>
-        <p:nvSpPr>
-          <p:cNvPr id="15" name="TextBox 14"/>
-          <p:cNvSpPr txBox="1"/>
-          <p:nvPr/>
-        </p:nvSpPr>
-        <p:spPr>
-          <a:xfrm>
-            <a:off x="6583680" y="4023360"/>
-            <a:ext cx="4663440" cy="1920240"/>
-          </a:xfrm>
-          <a:prstGeom prst="rect">
-            <a:avLst/>
-          </a:prstGeom>
-          <a:noFill/>
-        </p:spPr>
-        <p:txBody>
-          <a:bodyPr wrap="square">
-            <a:spAutoFit/>
-          </a:bodyPr>
-          <a:lstStyle/>
+              <a:t>Nomenclaturas combinadas (Luneta + Balcón) agrupadas por K-Means sin violar el arquetipo macro.</a:t>
+            </a:r>
+          </a:p>
           <a:p>
             <a:pPr>
               <a:spcAft>
                 <a:spcPts val="200"/>
               </a:spcAft>
-              <a:defRPr sz="2400" b="1">
-                <a:solidFill>
-                  <a:srgbClr val="E76F51"/>
-                </a:solidFill>
-                <a:latin typeface="Montserrat"/>
-              </a:defRPr>
-            </a:pPr>
-            <a:r>
-              <a:t>&gt; 0.88</a:t>
+              <a:defRPr sz="1100" b="1">
+                <a:solidFill>
+                  <a:srgbClr val="134074"/>
+                </a:solidFill>
+                <a:latin typeface="Montserrat"/>
+              </a:defRPr>
+            </a:pPr>
+            <a:r>
+              <a:t>Regla 8: Exclusiones Interceptadas</a:t>
             </a:r>
           </a:p>
           <a:p>
             <a:pPr>
               <a:spcAft>
-                <a:spcPts val="600"/>
+                <a:spcPts val="800"/>
               </a:spcAft>
-              <a:defRPr sz="1100" b="1">
-                <a:solidFill>
-                  <a:srgbClr val="0B2545"/>
-                </a:solidFill>
-                <a:latin typeface="Montserrat"/>
-              </a:defRPr>
-            </a:pPr>
-            <a:r>
-              <a:t>ESTABILIDAD BOOTSTRAP-ARI PROMEDIO</a:t>
-            </a:r>
-          </a:p>
-          <a:p>
-            <a:pPr>
-              <a:defRPr sz="1000">
+              <a:defRPr sz="950">
                 <a:solidFill>
                   <a:srgbClr val="212529"/>
                 </a:solidFill>
@@ -8768,7 +8776,7 @@
               </a:defRPr>
             </a:pPr>
             <a:r>
-              <a:t>Compuerta de reproducibilidad superada en réplicas al 80% (Popular: 0.985, Platea: 0.979, VIP: 0.934).</a:t>
+              <a:t>13,020 parqueaderos y 205 localidades activas no comerciales excluidas ex-ante por el contrato Python.</a:t>
             </a:r>
           </a:p>
         </p:txBody>
@@ -8836,7 +8844,7 @@
               </a:defRPr>
             </a:pPr>
             <a:r>
-              <a:t>LÍMITES HONESTOS DEL LOTE Y GOBERNANZA</a:t>
+              <a:t>ANEXO VERIFICABLE DE MARCHA BLANCA</a:t>
             </a:r>
           </a:p>
         </p:txBody>
@@ -8872,7 +8880,7 @@
               </a:defRPr>
             </a:pPr>
             <a:r>
-              <a:t>Validación Funcional Exitosa (N=1,324), Diagnóstico de Capa GOLD y Criterios de Aceptación</a:t>
+              <a:t>Acceso Completo a las 1,324 Asignaciones: Excel Ejecutivo y Repositorio Versionado</a:t>
             </a:r>
           </a:p>
         </p:txBody>
@@ -8924,159 +8932,24 @@
       </p:sp>
       <p:sp>
         <p:nvSpPr>
-          <p:cNvPr id="5" name="TextBox 4"/>
-          <p:cNvSpPr txBox="1"/>
-          <p:nvPr/>
-        </p:nvSpPr>
-        <p:spPr>
-          <a:xfrm>
-            <a:off x="914400" y="1554480"/>
-            <a:ext cx="4846320" cy="4572000"/>
-          </a:xfrm>
-          <a:prstGeom prst="rect">
-            <a:avLst/>
-          </a:prstGeom>
-          <a:noFill/>
-        </p:spPr>
-        <p:txBody>
-          <a:bodyPr wrap="square">
-            <a:spAutoFit/>
-          </a:bodyPr>
-          <a:lstStyle/>
-          <a:p>
-            <a:pPr>
-              <a:spcAft>
-                <a:spcPts val="1000"/>
-              </a:spcAft>
-              <a:defRPr sz="1150" b="1">
-                <a:solidFill>
-                  <a:srgbClr val="0B2545"/>
-                </a:solidFill>
-                <a:latin typeface="Montserrat"/>
-              </a:defRPr>
-            </a:pPr>
-            <a:r>
-              <a:t>VALIDACIÓN FUNCIONAL EXITOSA (NO ESTADÍSTICA)</a:t>
-            </a:r>
-          </a:p>
-          <a:p>
-            <a:pPr>
-              <a:spcAft>
-                <a:spcPts val="200"/>
-              </a:spcAft>
-              <a:defRPr sz="1000" b="1">
-                <a:solidFill>
-                  <a:srgbClr val="134074"/>
-                </a:solidFill>
-                <a:latin typeface="Montserrat"/>
-              </a:defRPr>
-            </a:pPr>
-            <a:r>
-              <a:t>• 706,443 Filas Crudas Ingeridas:</a:t>
-            </a:r>
-          </a:p>
-          <a:p>
-            <a:pPr>
-              <a:spcAft>
-                <a:spcPts val="600"/>
-              </a:spcAft>
-              <a:defRPr sz="950">
-                <a:solidFill>
-                  <a:srgbClr val="212529"/>
-                </a:solidFill>
-                <a:latin typeface="Montserrat"/>
-              </a:defRPr>
-            </a:pPr>
-            <a:r>
-              <a:t>  El lote probó de punta a punta la robustez del código, descarga de Azure e inferencia defensiva.</a:t>
-            </a:r>
-          </a:p>
-          <a:p>
-            <a:pPr>
-              <a:spcAft>
-                <a:spcPts val="200"/>
-              </a:spcAft>
-              <a:defRPr sz="1000" b="1">
-                <a:solidFill>
-                  <a:srgbClr val="134074"/>
-                </a:solidFill>
-                <a:latin typeface="Montserrat"/>
-              </a:defRPr>
-            </a:pPr>
-            <a:r>
-              <a:t>• 1,324 Localidades Limpias Finales (99.81% Descarte):</a:t>
-            </a:r>
-          </a:p>
-          <a:p>
-            <a:pPr>
-              <a:spcAft>
-                <a:spcPts val="600"/>
-              </a:spcAft>
-              <a:defRPr sz="950">
-                <a:solidFill>
-                  <a:srgbClr val="212529"/>
-                </a:solidFill>
-                <a:latin typeface="Montserrat"/>
-              </a:defRPr>
-            </a:pPr>
-            <a:r>
-              <a:t>  El volumen residual certificado es seguro para inferencia pero insuficiente para certificar drift poblacional (PSI) representativo.</a:t>
-            </a:r>
-          </a:p>
-          <a:p>
-            <a:pPr>
-              <a:spcAft>
-                <a:spcPts val="200"/>
-              </a:spcAft>
-              <a:defRPr sz="1000" b="1">
-                <a:solidFill>
-                  <a:srgbClr val="134074"/>
-                </a:solidFill>
-                <a:latin typeface="Montserrat"/>
-              </a:defRPr>
-            </a:pPr>
-            <a:r>
-              <a:t>• Causa de Descarte Masivo:</a:t>
-            </a:r>
-          </a:p>
-          <a:p>
-            <a:pPr>
-              <a:spcAft>
-                <a:spcPts val="600"/>
-              </a:spcAft>
-              <a:defRPr sz="950">
-                <a:solidFill>
-                  <a:srgbClr val="212529"/>
-                </a:solidFill>
-                <a:latin typeface="Montserrat"/>
-              </a:defRPr>
-            </a:pPr>
-            <a:r>
-              <a:t>  636k duplicados exactos (90.1%) y 706k filas (99.9%) en eventos con suma de cuotas rota por muestreo parcial.</a:t>
-            </a:r>
-          </a:p>
-        </p:txBody>
-      </p:sp>
-      <p:sp>
-        <p:nvSpPr>
-          <p:cNvPr id="6" name="Rounded Rectangle 5"/>
+          <p:cNvPr id="5" name="Rounded Rectangle 4"/>
           <p:cNvSpPr/>
           <p:nvPr/>
         </p:nvSpPr>
         <p:spPr>
           <a:xfrm>
-            <a:off x="6217920" y="1371600"/>
-            <a:ext cx="5212080" cy="4937760"/>
+            <a:off x="731520" y="1371600"/>
+            <a:ext cx="5212080" cy="640080"/>
           </a:xfrm>
           <a:prstGeom prst="roundRect">
             <a:avLst/>
           </a:prstGeom>
           <a:solidFill>
-            <a:srgbClr val="FFFFFF"/>
+            <a:srgbClr val="009688"/>
           </a:solidFill>
           <a:ln>
             <a:solidFill>
-              <a:srgbClr val="D7DCE4"/>
+              <a:srgbClr val="009688"/>
             </a:solidFill>
           </a:ln>
         </p:spPr>
@@ -9104,14 +8977,14 @@
       </p:sp>
       <p:sp>
         <p:nvSpPr>
-          <p:cNvPr id="7" name="TextBox 6"/>
+          <p:cNvPr id="6" name="TextBox 5"/>
           <p:cNvSpPr txBox="1"/>
           <p:nvPr/>
         </p:nvSpPr>
         <p:spPr>
           <a:xfrm>
-            <a:off x="6400800" y="1554480"/>
-            <a:ext cx="4846320" cy="4572000"/>
+            <a:off x="822960" y="1417320"/>
+            <a:ext cx="5029200" cy="457200"/>
           </a:xfrm>
           <a:prstGeom prst="rect">
             <a:avLst/>
@@ -9119,6 +8992,42 @@
           <a:noFill/>
         </p:spPr>
         <p:txBody>
+          <a:bodyPr wrap="none">
+            <a:spAutoFit/>
+          </a:bodyPr>
+          <a:lstStyle/>
+          <a:p>
+            <a:pPr>
+              <a:defRPr sz="1050" b="1">
+                <a:solidFill>
+                  <a:srgbClr val="FFFFFF"/>
+                </a:solidFill>
+                <a:latin typeface="Montserrat"/>
+              </a:defRPr>
+            </a:pPr>
+            <a:r>
+              <a:t>LIBRO DE EXCEL EJECUTIVO (AUDITORÍA INMEDIATA)</a:t>
+            </a:r>
+          </a:p>
+        </p:txBody>
+      </p:sp>
+      <p:sp>
+        <p:nvSpPr>
+          <p:cNvPr id="7" name="TextBox 6"/>
+          <p:cNvSpPr txBox="1"/>
+          <p:nvPr/>
+        </p:nvSpPr>
+        <p:spPr>
+          <a:xfrm>
+            <a:off x="914400" y="2103120"/>
+            <a:ext cx="4846320" cy="4114800"/>
+          </a:xfrm>
+          <a:prstGeom prst="rect">
+            <a:avLst/>
+          </a:prstGeom>
+          <a:noFill/>
+        </p:spPr>
+        <p:txBody>
           <a:bodyPr wrap="square">
             <a:spAutoFit/>
           </a:bodyPr>
@@ -9126,9 +9035,9 @@
           <a:p>
             <a:pPr>
               <a:spcAft>
-                <a:spcPts val="1000"/>
+                <a:spcPts val="800"/>
               </a:spcAft>
-              <a:defRPr sz="1150" b="1">
+              <a:defRPr sz="1100" b="1">
                 <a:solidFill>
                   <a:srgbClr val="0B2545"/>
                 </a:solidFill>
@@ -9136,15 +9045,15 @@
               </a:defRPr>
             </a:pPr>
             <a:r>
-              <a:t>LOS 5 CRITERIOS DE ACEPTACIÓN PARA EL NUEVO BLOB</a:t>
+              <a:t>reports/anexo_asignaciones_marcha_blanca.xlsx</a:t>
             </a:r>
           </a:p>
           <a:p>
             <a:pPr>
               <a:spcAft>
-                <a:spcPts val="200"/>
+                <a:spcPts val="400"/>
               </a:spcAft>
-              <a:defRPr sz="1000" b="1">
+              <a:defRPr sz="950" b="1">
                 <a:solidFill>
                   <a:srgbClr val="134074"/>
                 </a:solidFill>
@@ -9152,31 +9061,47 @@
               </a:defRPr>
             </a:pPr>
             <a:r>
-              <a:t>• Check A (Duplicados en Crudo):</a:t>
+              <a:t>• Volumen Total: </a:t>
+            </a:r>
+            <a:r>
+              <a:rPr b="0">
+                <a:solidFill>
+                  <a:srgbClr val="212529"/>
+                </a:solidFill>
+              </a:rPr>
+              <a:t>1,324 filas de localidades limpias certificadas</a:t>
             </a:r>
           </a:p>
           <a:p>
             <a:pPr>
               <a:spcAft>
-                <a:spcPts val="600"/>
+                <a:spcPts val="400"/>
               </a:spcAft>
-              <a:defRPr sz="950">
+              <a:defRPr sz="950" b="1">
+                <a:solidFill>
+                  <a:srgbClr val="134074"/>
+                </a:solidFill>
+                <a:latin typeface="Montserrat"/>
+              </a:defRPr>
+            </a:pPr>
+            <a:r>
+              <a:t>• Hoja Única: </a:t>
+            </a:r>
+            <a:r>
+              <a:rPr b="0">
                 <a:solidFill>
                   <a:srgbClr val="212529"/>
                 </a:solidFill>
-                <a:latin typeface="Montserrat"/>
-              </a:defRPr>
-            </a:pPr>
-            <a:r>
-              <a:t>  Tasa de duplicidad estricta &lt; 1.0%.</a:t>
+              </a:rPr>
+              <a:t>'Asignaciones_Marcha_Blanca' con autofiltro nativo</a:t>
             </a:r>
           </a:p>
           <a:p>
             <a:pPr>
               <a:spcAft>
-                <a:spcPts val="200"/>
+                <a:spcPts val="400"/>
               </a:spcAft>
-              <a:defRPr sz="1000" b="1">
+              <a:defRPr sz="950" b="1">
                 <a:solidFill>
                   <a:srgbClr val="134074"/>
                 </a:solidFill>
@@ -9184,31 +9109,47 @@
               </a:defRPr>
             </a:pPr>
             <a:r>
-              <a:t>• Check B (Supervivencia de Filtro):</a:t>
+              <a:t>• Usabilidad: </a:t>
+            </a:r>
+            <a:r>
+              <a:rPr b="0">
+                <a:solidFill>
+                  <a:srgbClr val="212529"/>
+                </a:solidFill>
+              </a:rPr>
+              <a:t>Fila de encabezado congelada para navegación fluida</a:t>
             </a:r>
           </a:p>
           <a:p>
             <a:pPr>
               <a:spcAft>
-                <a:spcPts val="600"/>
+                <a:spcPts val="400"/>
               </a:spcAft>
-              <a:defRPr sz="950">
+              <a:defRPr sz="950" b="1">
+                <a:solidFill>
+                  <a:srgbClr val="134074"/>
+                </a:solidFill>
+                <a:latin typeface="Montserrat"/>
+              </a:defRPr>
+            </a:pPr>
+            <a:r>
+              <a:t>• Formato Porcentual: </a:t>
+            </a:r>
+            <a:r>
+              <a:rPr b="0">
                 <a:solidFill>
                   <a:srgbClr val="212529"/>
                 </a:solidFill>
-                <a:latin typeface="Montserrat"/>
-              </a:defRPr>
-            </a:pPr>
-            <a:r>
-              <a:t>  Tasa de retención consistente &gt; 90.0%.</a:t>
+              </a:rPr>
+              <a:t>score_confianza formateado como porcentaje (0.0%)</a:t>
             </a:r>
           </a:p>
           <a:p>
             <a:pPr>
               <a:spcAft>
-                <a:spcPts val="200"/>
+                <a:spcPts val="400"/>
               </a:spcAft>
-              <a:defRPr sz="1000" b="1">
+              <a:defRPr sz="950" b="1">
                 <a:solidFill>
                   <a:srgbClr val="134074"/>
                 </a:solidFill>
@@ -9216,31 +9157,212 @@
               </a:defRPr>
             </a:pPr>
             <a:r>
-              <a:t>• Check C (Coherencia de Aforos):</a:t>
+              <a:t>• Formato Moneda: </a:t>
+            </a:r>
+            <a:r>
+              <a:rPr b="0">
+                <a:solidFill>
+                  <a:srgbClr val="212529"/>
+                </a:solidFill>
+              </a:rPr>
+              <a:t>precio con separador de miles en pesos colombianos</a:t>
             </a:r>
           </a:p>
           <a:p>
             <a:pPr>
               <a:spcAft>
-                <a:spcPts val="600"/>
+                <a:spcPts val="400"/>
               </a:spcAft>
-              <a:defRPr sz="950">
+              <a:defRPr sz="950" b="1">
+                <a:solidFill>
+                  <a:srgbClr val="134074"/>
+                </a:solidFill>
+                <a:latin typeface="Montserrat"/>
+              </a:defRPr>
+            </a:pPr>
+            <a:r>
+              <a:t>• Columnas Clave: </a:t>
+            </a:r>
+            <a:r>
+              <a:rPr b="0">
                 <a:solidFill>
                   <a:srgbClr val="212529"/>
                 </a:solidFill>
-                <a:latin typeface="Montserrat"/>
-              </a:defRPr>
-            </a:pPr>
-            <a:r>
-              <a:t>  0 eventos con discrepancias físicas en la suma de cuotas.</a:t>
-            </a:r>
-          </a:p>
+              </a:rPr>
+              <a:t>localidad, recinto, precio, type_site, micro_cluster_id, label_auto, arquetipo_demanda, score_confianza, es_frontera</a:t>
+            </a:r>
+          </a:p>
+        </p:txBody>
+      </p:sp>
+      <p:sp>
+        <p:nvSpPr>
+          <p:cNvPr id="8" name="Rounded Rectangle 7"/>
+          <p:cNvSpPr/>
+          <p:nvPr/>
+        </p:nvSpPr>
+        <p:spPr>
+          <a:xfrm>
+            <a:off x="6217920" y="1371600"/>
+            <a:ext cx="5212080" cy="4937760"/>
+          </a:xfrm>
+          <a:prstGeom prst="roundRect">
+            <a:avLst/>
+          </a:prstGeom>
+          <a:solidFill>
+            <a:srgbClr val="FFFFFF"/>
+          </a:solidFill>
+          <a:ln>
+            <a:solidFill>
+              <a:srgbClr val="D7DCE4"/>
+            </a:solidFill>
+          </a:ln>
+        </p:spPr>
+        <p:style>
+          <a:lnRef idx="1">
+            <a:schemeClr val="accent1"/>
+          </a:lnRef>
+          <a:fillRef idx="3">
+            <a:schemeClr val="accent1"/>
+          </a:fillRef>
+          <a:effectRef idx="2">
+            <a:schemeClr val="accent1"/>
+          </a:effectRef>
+          <a:fontRef idx="minor">
+            <a:schemeClr val="lt1"/>
+          </a:fontRef>
+        </p:style>
+        <p:txBody>
+          <a:bodyPr rtlCol="0" anchor="ctr"/>
+          <a:lstStyle/>
+          <a:p>
+            <a:pPr algn="ctr"/>
+          </a:p>
+        </p:txBody>
+      </p:sp>
+      <p:sp>
+        <p:nvSpPr>
+          <p:cNvPr id="9" name="Rounded Rectangle 8"/>
+          <p:cNvSpPr/>
+          <p:nvPr/>
+        </p:nvSpPr>
+        <p:spPr>
+          <a:xfrm>
+            <a:off x="6217920" y="1371600"/>
+            <a:ext cx="5212080" cy="640080"/>
+          </a:xfrm>
+          <a:prstGeom prst="roundRect">
+            <a:avLst/>
+          </a:prstGeom>
+          <a:solidFill>
+            <a:srgbClr val="134074"/>
+          </a:solidFill>
+          <a:ln>
+            <a:solidFill>
+              <a:srgbClr val="134074"/>
+            </a:solidFill>
+          </a:ln>
+        </p:spPr>
+        <p:style>
+          <a:lnRef idx="1">
+            <a:schemeClr val="accent1"/>
+          </a:lnRef>
+          <a:fillRef idx="3">
+            <a:schemeClr val="accent1"/>
+          </a:fillRef>
+          <a:effectRef idx="2">
+            <a:schemeClr val="accent1"/>
+          </a:effectRef>
+          <a:fontRef idx="minor">
+            <a:schemeClr val="lt1"/>
+          </a:fontRef>
+        </p:style>
+        <p:txBody>
+          <a:bodyPr rtlCol="0" anchor="ctr"/>
+          <a:lstStyle/>
+          <a:p>
+            <a:pPr algn="ctr"/>
+          </a:p>
+        </p:txBody>
+      </p:sp>
+      <p:sp>
+        <p:nvSpPr>
+          <p:cNvPr id="10" name="TextBox 9"/>
+          <p:cNvSpPr txBox="1"/>
+          <p:nvPr/>
+        </p:nvSpPr>
+        <p:spPr>
+          <a:xfrm>
+            <a:off x="6309360" y="1417320"/>
+            <a:ext cx="5029200" cy="457200"/>
+          </a:xfrm>
+          <a:prstGeom prst="rect">
+            <a:avLst/>
+          </a:prstGeom>
+          <a:noFill/>
+        </p:spPr>
+        <p:txBody>
+          <a:bodyPr wrap="none">
+            <a:spAutoFit/>
+          </a:bodyPr>
+          <a:lstStyle/>
+          <a:p>
+            <a:pPr>
+              <a:defRPr sz="1050" b="1">
+                <a:solidFill>
+                  <a:srgbClr val="FFFFFF"/>
+                </a:solidFill>
+                <a:latin typeface="Montserrat"/>
+              </a:defRPr>
+            </a:pPr>
+            <a:r>
+              <a:t>ARTEFACTOS DE CÓDIGO Y DATOS EN REPOSITORIO</a:t>
+            </a:r>
+          </a:p>
+        </p:txBody>
+      </p:sp>
+      <p:sp>
+        <p:nvSpPr>
+          <p:cNvPr id="11" name="TextBox 10"/>
+          <p:cNvSpPr txBox="1"/>
+          <p:nvPr/>
+        </p:nvSpPr>
+        <p:spPr>
+          <a:xfrm>
+            <a:off x="6400800" y="2103120"/>
+            <a:ext cx="4846320" cy="4114800"/>
+          </a:xfrm>
+          <a:prstGeom prst="rect">
+            <a:avLst/>
+          </a:prstGeom>
+          <a:noFill/>
+        </p:spPr>
+        <p:txBody>
+          <a:bodyPr wrap="square">
+            <a:spAutoFit/>
+          </a:bodyPr>
+          <a:lstStyle/>
           <a:p>
             <a:pPr>
               <a:spcAft>
-                <a:spcPts val="200"/>
+                <a:spcPts val="800"/>
               </a:spcAft>
-              <a:defRPr sz="1000" b="1">
+              <a:defRPr sz="1100" b="1">
+                <a:solidFill>
+                  <a:srgbClr val="0B2545"/>
+                </a:solidFill>
+                <a:latin typeface="Montserrat"/>
+              </a:defRPr>
+            </a:pPr>
+            <a:r>
+              <a:t>c:/dev/clusterizacion-localidades/ (Git Versionado)</a:t>
+            </a:r>
+          </a:p>
+          <a:p>
+            <a:pPr>
+              <a:spcAft>
+                <a:spcPts val="400"/>
+              </a:spcAft>
+              <a:defRPr sz="950" b="1">
                 <a:solidFill>
                   <a:srgbClr val="134074"/>
                 </a:solidFill>
@@ -9248,31 +9370,47 @@
               </a:defRPr>
             </a:pPr>
             <a:r>
-              <a:t>• Check D (Volumetría):</a:t>
+              <a:t>• CSV Completo: </a:t>
+            </a:r>
+            <a:r>
+              <a:rPr b="0">
+                <a:solidFill>
+                  <a:srgbClr val="212529"/>
+                </a:solidFill>
+              </a:rPr>
+              <a:t>data/processed/asignacion_microclusters.csv (1,324 filas)</a:t>
             </a:r>
           </a:p>
           <a:p>
             <a:pPr>
               <a:spcAft>
-                <a:spcPts val="600"/>
+                <a:spcPts val="400"/>
               </a:spcAft>
-              <a:defRPr sz="950">
+              <a:defRPr sz="950" b="1">
+                <a:solidFill>
+                  <a:srgbClr val="134074"/>
+                </a:solidFill>
+                <a:latin typeface="Montserrat"/>
+              </a:defRPr>
+            </a:pPr>
+            <a:r>
+              <a:t>• CSV Galería: </a:t>
+            </a:r>
+            <a:r>
+              <a:rPr b="0">
                 <a:solidFill>
                   <a:srgbClr val="212529"/>
                 </a:solidFill>
-                <a:latin typeface="Montserrat"/>
-              </a:defRPr>
-            </a:pPr>
-            <a:r>
-              <a:t>  Tamaño comparable al histórico (|Delta| &lt; 20% vs 33,775).</a:t>
+              </a:rPr>
+              <a:t>reports/ejemplos_galeria_extendida.csv (25 filas estratificadas)</a:t>
             </a:r>
           </a:p>
           <a:p>
             <a:pPr>
               <a:spcAft>
-                <a:spcPts val="200"/>
+                <a:spcPts val="400"/>
               </a:spcAft>
-              <a:defRPr sz="1000" b="1">
+              <a:defRPr sz="950" b="1">
                 <a:solidFill>
                   <a:srgbClr val="134074"/>
                 </a:solidFill>
@@ -9280,23 +9418,87 @@
               </a:defRPr>
             </a:pPr>
             <a:r>
-              <a:t>• Check E (Patrones no Comerciales):</a:t>
+              <a:t>• Catálogo v3.0: </a:t>
+            </a:r>
+            <a:r>
+              <a:rPr b="0">
+                <a:solidFill>
+                  <a:srgbClr val="212529"/>
+                </a:solidFill>
+              </a:rPr>
+              <a:t>data/processed/cluster_catalog_v3.csv (18 micro-clusters)</a:t>
             </a:r>
           </a:p>
           <a:p>
             <a:pPr>
               <a:spcAft>
-                <a:spcPts val="600"/>
+                <a:spcPts val="400"/>
               </a:spcAft>
-              <a:defRPr sz="950">
+              <a:defRPr sz="950" b="1">
+                <a:solidFill>
+                  <a:srgbClr val="134074"/>
+                </a:solidFill>
+                <a:latin typeface="Montserrat"/>
+              </a:defRPr>
+            </a:pPr>
+            <a:r>
+              <a:t>• Auditoría Data Eng: </a:t>
+            </a:r>
+            <a:r>
+              <a:rPr b="0">
                 <a:solidFill>
                   <a:srgbClr val="212529"/>
                 </a:solidFill>
-                <a:latin typeface="Montserrat"/>
-              </a:defRPr>
-            </a:pPr>
-            <a:r>
-              <a:t>  0 filas con TEST, CANCELAD, PARQUEA o sobreventas.</a:t>
+              </a:rPr>
+              <a:t>reports/hallazgos_blob_test_gold_20261007.md</a:t>
+            </a:r>
+          </a:p>
+          <a:p>
+            <a:pPr>
+              <a:spcAft>
+                <a:spcPts val="400"/>
+              </a:spcAft>
+              <a:defRPr sz="950" b="1">
+                <a:solidFill>
+                  <a:srgbClr val="134074"/>
+                </a:solidFill>
+                <a:latin typeface="Montserrat"/>
+              </a:defRPr>
+            </a:pPr>
+            <a:r>
+              <a:t>• Test Hermético: </a:t>
+            </a:r>
+            <a:r>
+              <a:rPr b="0">
+                <a:solidFill>
+                  <a:srgbClr val="212529"/>
+                </a:solidFill>
+              </a:rPr>
+              <a:t>tests/test_ejemplos_presentacion.py</a:t>
+            </a:r>
+          </a:p>
+          <a:p>
+            <a:pPr>
+              <a:spcAft>
+                <a:spcPts val="400"/>
+              </a:spcAft>
+              <a:defRPr sz="950" b="1">
+                <a:solidFill>
+                  <a:srgbClr val="134074"/>
+                </a:solidFill>
+                <a:latin typeface="Montserrat"/>
+              </a:defRPr>
+            </a:pPr>
+            <a:r>
+              <a:t>• Reproducibilidad: </a:t>
+            </a:r>
+            <a:r>
+              <a:rPr b="0">
+                <a:solidFill>
+                  <a:srgbClr val="212529"/>
+                </a:solidFill>
+              </a:rPr>
+              <a:t>Pipeline determinístico; scripts de generación automatizados</a:t>
             </a:r>
           </a:p>
         </p:txBody>

--- a/Presentacion_Microclusters_Marcha_Blanca.pptx
+++ b/Presentacion_Microclusters_Marcha_Blanca.pptx
@@ -20,6 +20,12 @@
     <p:sldId id="308" r:id="rId17"/>
     <p:sldId id="309" r:id="rId18"/>
     <p:sldId id="310" r:id="rId19"/>
+    <p:sldId id="311" r:id="rId20"/>
+    <p:sldId id="312" r:id="rId21"/>
+    <p:sldId id="313" r:id="rId22"/>
+    <p:sldId id="314" r:id="rId23"/>
+    <p:sldId id="315" r:id="rId24"/>
+    <p:sldId id="316" r:id="rId25"/>
   </p:sldIdLst>
   <p:sldSz cx="12192000" cy="6858000"/>
   <p:notesSz cx="6858000" cy="9144000"/>
@@ -640,7 +646,7 @@
           <a:lstStyle/>
           <a:p>
             <a:r>
-              <a:t>A nivel de calidad matemática, el modelo superó todas sus compuertas: confianza geométrica de 63%, apenas 14% de registros en frontera —muy por debajo del límite de alarma del 20%— y 100% de cobertura. Más aún: los 5 sub-espacios multi-zona tienen documentada una estabilidad bootstrap-ARI superior a 0.88 en réplicas al 80%, lo que garantiza reproducibilidad ante re-entrenamientos.</a:t>
+              <a:t>Mismo modelo, cinco escaleras: de un teatro de 400 butacas a un estadio — la jerarquía interna se respeta en todos los tamaños. En el Metropolitano de Barranquilla con casi 45 mil butacas, la topología deportiva pura se respeta: Occidental y Oriental son tratadas como VIP/Palcos con fronteras en las bandejas altas, y las tribunas Norte y Sur descienden a Popular.</a:t>
             </a:r>
           </a:p>
         </p:txBody>
@@ -710,7 +716,7 @@
           <a:lstStyle/>
           <a:p>
             <a:r>
-              <a:t>Debemos ser transparentes con el comité: 1,324 filas certifican que el código no se rompe y que las reglas filtran la basura, pero no constituyen una prueba estadística válida. El blob de prueba que recibimos tenía 90% de duplicados y funciones cortadas a la mitad. Ya entregamos el reporte formal de auditoría a Data Engineering con 5 criterios de aceptación para el nuevo lote.</a:t>
+              <a:t>Mismo arquetipo, distintos micro-clusters: la granularidad interna es la feature de backend; el arquetipo es el lenguaje de negocio. Observen cómo dentro de Preferencial distinguimos plateas centrales de laterales y posteriores; y en VIP aislamos palcos puros frente a balcones mixtos.</a:t>
             </a:r>
           </a:p>
         </p:txBody>
@@ -780,6 +786,426 @@
           <a:lstStyle/>
           <a:p>
             <a:r>
+              <a:t>Mismo arquetipo, distintos micro-clusters: la granularidad interna es la feature de backend; el arquetipo es el lenguaje de negocio. En eventos masivos, Popular separa pisos altos de balcones, mientras Grada General aísla tiquetes de festival de localidades de admisión por gradería.</a:t>
+            </a:r>
+          </a:p>
+        </p:txBody>
+      </p:sp>
+      <p:sp>
+        <p:nvSpPr>
+          <p:cNvPr id="4" name="Slide Number Placeholder 3"/>
+          <p:cNvSpPr>
+            <a:spLocks noGrp="1"/>
+          </p:cNvSpPr>
+          <p:nvPr>
+            <p:ph type="sldNum" idx="5" sz="quarter"/>
+          </p:nvPr>
+        </p:nvSpPr>
+        <p:spPr/>
+      </p:sp>
+    </p:spTree>
+  </p:cSld>
+  <p:clrMapOvr>
+    <a:masterClrMapping/>
+  </p:clrMapOvr>
+</p:notes>
+</file>
+
+<file path=ppt/notesSlides/notesSlide13.xml><?xml version="1.0" encoding="utf-8"?>
+<p:notes xmlns:a="http://schemas.openxmlformats.org/drawingml/2006/main" xmlns:p="http://schemas.openxmlformats.org/presentationml/2006/main" xmlns:r="http://schemas.openxmlformats.org/officeDocument/2006/relationships">
+  <p:cSld>
+    <p:spTree>
+      <p:nvGrpSpPr>
+        <p:cNvPr id="1" name=""/>
+        <p:cNvGrpSpPr/>
+        <p:nvPr/>
+      </p:nvGrpSpPr>
+      <p:grpSpPr>
+        <a:xfrm>
+          <a:off x="0" y="0"/>
+          <a:ext cx="0" cy="0"/>
+          <a:chOff x="0" y="0"/>
+          <a:chExt cx="0" cy="0"/>
+        </a:xfrm>
+      </p:grpSpPr>
+      <p:sp>
+        <p:nvSpPr>
+          <p:cNvPr id="2" name="Slide Image Placeholder 1"/>
+          <p:cNvSpPr>
+            <a:spLocks noGrp="1"/>
+          </p:cNvSpPr>
+          <p:nvPr>
+            <p:ph type="sldImg" idx="2"/>
+          </p:nvPr>
+        </p:nvSpPr>
+        <p:spPr/>
+      </p:sp>
+      <p:sp>
+        <p:nvSpPr>
+          <p:cNvPr id="3" name="Notes Placeholder 2"/>
+          <p:cNvSpPr>
+            <a:spLocks noGrp="1"/>
+          </p:cNvSpPr>
+          <p:nvPr>
+            <p:ph type="body" idx="3" sz="quarter"/>
+          </p:nvPr>
+        </p:nvSpPr>
+        <p:spPr/>
+        <p:txBody>
+          <a:bodyPr/>
+          <a:lstStyle/>
+          <a:p>
+            <a:r>
+              <a:t>El sistema sabe lo que no sabe: las fronteras no inventan certeza ficticia sino que encienden banderas de auditoría; los micro-clusters híbridos capturan recintos con nomenclatura mixta sin colapsar la asignación; y Admisión Única resuelve determinísticamente eventos mono-zona al 100% de confianza.</a:t>
+            </a:r>
+          </a:p>
+        </p:txBody>
+      </p:sp>
+      <p:sp>
+        <p:nvSpPr>
+          <p:cNvPr id="4" name="Slide Number Placeholder 3"/>
+          <p:cNvSpPr>
+            <a:spLocks noGrp="1"/>
+          </p:cNvSpPr>
+          <p:nvPr>
+            <p:ph type="sldNum" idx="5" sz="quarter"/>
+          </p:nvPr>
+        </p:nvSpPr>
+        <p:spPr/>
+      </p:sp>
+    </p:spTree>
+  </p:cSld>
+  <p:clrMapOvr>
+    <a:masterClrMapping/>
+  </p:clrMapOvr>
+</p:notes>
+</file>
+
+<file path=ppt/notesSlides/notesSlide14.xml><?xml version="1.0" encoding="utf-8"?>
+<p:notes xmlns:a="http://schemas.openxmlformats.org/drawingml/2006/main" xmlns:p="http://schemas.openxmlformats.org/presentationml/2006/main" xmlns:r="http://schemas.openxmlformats.org/officeDocument/2006/relationships">
+  <p:cSld>
+    <p:spTree>
+      <p:nvGrpSpPr>
+        <p:cNvPr id="1" name=""/>
+        <p:cNvGrpSpPr/>
+        <p:nvPr/>
+      </p:nvGrpSpPr>
+      <p:grpSpPr>
+        <a:xfrm>
+          <a:off x="0" y="0"/>
+          <a:ext cx="0" cy="0"/>
+          <a:chOff x="0" y="0"/>
+          <a:chExt cx="0" cy="0"/>
+        </a:xfrm>
+      </p:grpSpPr>
+      <p:sp>
+        <p:nvSpPr>
+          <p:cNvPr id="2" name="Slide Image Placeholder 1"/>
+          <p:cNvSpPr>
+            <a:spLocks noGrp="1"/>
+          </p:cNvSpPr>
+          <p:nvPr>
+            <p:ph type="sldImg" idx="2"/>
+          </p:nvPr>
+        </p:nvSpPr>
+        <p:spPr/>
+      </p:sp>
+      <p:sp>
+        <p:nvSpPr>
+          <p:cNvPr id="3" name="Notes Placeholder 2"/>
+          <p:cNvSpPr>
+            <a:spLocks noGrp="1"/>
+          </p:cNvSpPr>
+          <p:nvPr>
+            <p:ph type="body" idx="3" sz="quarter"/>
+          </p:nvPr>
+        </p:nvSpPr>
+        <p:spPr/>
+        <p:txBody>
+          <a:bodyPr/>
+          <a:lstStyle/>
+          <a:p>
+            <a:r>
+              <a:t>La muestra se concentra en Admisión Única (AU-0 con 48.9%) y Platea General (PGI-2 con 6.2%); los huecos en POP-3 o GGM-2 reflejan el sesgo del subset limpio del blob, no del modelo — con el blob regenerado esta curva se estabiliza.</a:t>
+            </a:r>
+          </a:p>
+        </p:txBody>
+      </p:sp>
+      <p:sp>
+        <p:nvSpPr>
+          <p:cNvPr id="4" name="Slide Number Placeholder 3"/>
+          <p:cNvSpPr>
+            <a:spLocks noGrp="1"/>
+          </p:cNvSpPr>
+          <p:nvPr>
+            <p:ph type="sldNum" idx="5" sz="quarter"/>
+          </p:nvPr>
+        </p:nvSpPr>
+        <p:spPr/>
+      </p:sp>
+    </p:spTree>
+  </p:cSld>
+  <p:clrMapOvr>
+    <a:masterClrMapping/>
+  </p:clrMapOvr>
+</p:notes>
+</file>
+
+<file path=ppt/notesSlides/notesSlide15.xml><?xml version="1.0" encoding="utf-8"?>
+<p:notes xmlns:a="http://schemas.openxmlformats.org/drawingml/2006/main" xmlns:p="http://schemas.openxmlformats.org/presentationml/2006/main" xmlns:r="http://schemas.openxmlformats.org/officeDocument/2006/relationships">
+  <p:cSld>
+    <p:spTree>
+      <p:nvGrpSpPr>
+        <p:cNvPr id="1" name=""/>
+        <p:cNvGrpSpPr/>
+        <p:nvPr/>
+      </p:nvGrpSpPr>
+      <p:grpSpPr>
+        <a:xfrm>
+          <a:off x="0" y="0"/>
+          <a:ext cx="0" cy="0"/>
+          <a:chOff x="0" y="0"/>
+          <a:chExt cx="0" cy="0"/>
+        </a:xfrm>
+      </p:grpSpPr>
+      <p:sp>
+        <p:nvSpPr>
+          <p:cNvPr id="2" name="Slide Image Placeholder 1"/>
+          <p:cNvSpPr>
+            <a:spLocks noGrp="1"/>
+          </p:cNvSpPr>
+          <p:nvPr>
+            <p:ph type="sldImg" idx="2"/>
+          </p:nvPr>
+        </p:nvSpPr>
+        <p:spPr/>
+      </p:sp>
+      <p:sp>
+        <p:nvSpPr>
+          <p:cNvPr id="3" name="Notes Placeholder 2"/>
+          <p:cNvSpPr>
+            <a:spLocks noGrp="1"/>
+          </p:cNvSpPr>
+          <p:nvPr>
+            <p:ph type="body" idx="3" sz="quarter"/>
+          </p:nvPr>
+        </p:nvSpPr>
+        <p:spPr/>
+        <p:txBody>
+          <a:bodyPr/>
+          <a:lstStyle/>
+          <a:p>
+            <a:r>
+              <a:t>La evidencia no termina en las diapositivas: las 1,324 asignaciones completas, filtrables y con formato de porcentaje están disponibles en el anexo de Excel generado con openpyxl, además del CSV canónico en el repositorio.</a:t>
+            </a:r>
+          </a:p>
+        </p:txBody>
+      </p:sp>
+      <p:sp>
+        <p:nvSpPr>
+          <p:cNvPr id="4" name="Slide Number Placeholder 3"/>
+          <p:cNvSpPr>
+            <a:spLocks noGrp="1"/>
+          </p:cNvSpPr>
+          <p:nvPr>
+            <p:ph type="sldNum" idx="5" sz="quarter"/>
+          </p:nvPr>
+        </p:nvSpPr>
+        <p:spPr/>
+      </p:sp>
+    </p:spTree>
+  </p:cSld>
+  <p:clrMapOvr>
+    <a:masterClrMapping/>
+  </p:clrMapOvr>
+</p:notes>
+</file>
+
+<file path=ppt/notesSlides/notesSlide16.xml><?xml version="1.0" encoding="utf-8"?>
+<p:notes xmlns:a="http://schemas.openxmlformats.org/drawingml/2006/main" xmlns:p="http://schemas.openxmlformats.org/presentationml/2006/main" xmlns:r="http://schemas.openxmlformats.org/officeDocument/2006/relationships">
+  <p:cSld>
+    <p:spTree>
+      <p:nvGrpSpPr>
+        <p:cNvPr id="1" name=""/>
+        <p:cNvGrpSpPr/>
+        <p:nvPr/>
+      </p:nvGrpSpPr>
+      <p:grpSpPr>
+        <a:xfrm>
+          <a:off x="0" y="0"/>
+          <a:ext cx="0" cy="0"/>
+          <a:chOff x="0" y="0"/>
+          <a:chExt cx="0" cy="0"/>
+        </a:xfrm>
+      </p:grpSpPr>
+      <p:sp>
+        <p:nvSpPr>
+          <p:cNvPr id="2" name="Slide Image Placeholder 1"/>
+          <p:cNvSpPr>
+            <a:spLocks noGrp="1"/>
+          </p:cNvSpPr>
+          <p:nvPr>
+            <p:ph type="sldImg" idx="2"/>
+          </p:nvPr>
+        </p:nvSpPr>
+        <p:spPr/>
+      </p:sp>
+      <p:sp>
+        <p:nvSpPr>
+          <p:cNvPr id="3" name="Notes Placeholder 2"/>
+          <p:cNvSpPr>
+            <a:spLocks noGrp="1"/>
+          </p:cNvSpPr>
+          <p:nvPr>
+            <p:ph type="body" idx="3" sz="quarter"/>
+          </p:nvPr>
+        </p:nvSpPr>
+        <p:spPr/>
+        <p:txBody>
+          <a:bodyPr/>
+          <a:lstStyle/>
+          <a:p>
+            <a:r>
+              <a:t>A nivel de calidad matemática, el modelo superó todas sus compuertas: confianza geométrica de 63%, apenas 14% de registros en frontera —muy por debajo del límite de alarma del 20%— y 100% de cobertura. Más aún: los 5 sub-espacios multi-zona tienen documentada una estabilidad bootstrap-ARI superior a 0.88 en réplicas al 80%, lo que garantiza reproducibilidad ante re-entrenamientos.</a:t>
+            </a:r>
+          </a:p>
+        </p:txBody>
+      </p:sp>
+      <p:sp>
+        <p:nvSpPr>
+          <p:cNvPr id="4" name="Slide Number Placeholder 3"/>
+          <p:cNvSpPr>
+            <a:spLocks noGrp="1"/>
+          </p:cNvSpPr>
+          <p:nvPr>
+            <p:ph type="sldNum" idx="5" sz="quarter"/>
+          </p:nvPr>
+        </p:nvSpPr>
+        <p:spPr/>
+      </p:sp>
+    </p:spTree>
+  </p:cSld>
+  <p:clrMapOvr>
+    <a:masterClrMapping/>
+  </p:clrMapOvr>
+</p:notes>
+</file>
+
+<file path=ppt/notesSlides/notesSlide17.xml><?xml version="1.0" encoding="utf-8"?>
+<p:notes xmlns:a="http://schemas.openxmlformats.org/drawingml/2006/main" xmlns:p="http://schemas.openxmlformats.org/presentationml/2006/main" xmlns:r="http://schemas.openxmlformats.org/officeDocument/2006/relationships">
+  <p:cSld>
+    <p:spTree>
+      <p:nvGrpSpPr>
+        <p:cNvPr id="1" name=""/>
+        <p:cNvGrpSpPr/>
+        <p:nvPr/>
+      </p:nvGrpSpPr>
+      <p:grpSpPr>
+        <a:xfrm>
+          <a:off x="0" y="0"/>
+          <a:ext cx="0" cy="0"/>
+          <a:chOff x="0" y="0"/>
+          <a:chExt cx="0" cy="0"/>
+        </a:xfrm>
+      </p:grpSpPr>
+      <p:sp>
+        <p:nvSpPr>
+          <p:cNvPr id="2" name="Slide Image Placeholder 1"/>
+          <p:cNvSpPr>
+            <a:spLocks noGrp="1"/>
+          </p:cNvSpPr>
+          <p:nvPr>
+            <p:ph type="sldImg" idx="2"/>
+          </p:nvPr>
+        </p:nvSpPr>
+        <p:spPr/>
+      </p:sp>
+      <p:sp>
+        <p:nvSpPr>
+          <p:cNvPr id="3" name="Notes Placeholder 2"/>
+          <p:cNvSpPr>
+            <a:spLocks noGrp="1"/>
+          </p:cNvSpPr>
+          <p:nvPr>
+            <p:ph type="body" idx="3" sz="quarter"/>
+          </p:nvPr>
+        </p:nvSpPr>
+        <p:spPr/>
+        <p:txBody>
+          <a:bodyPr/>
+          <a:lstStyle/>
+          <a:p>
+            <a:r>
+              <a:t>Debemos ser transparentes con el comité: 1,324 filas certifican que el código no se rompe y que las reglas filtran la basura, pero no constituyen una prueba estadística válida. El blob de prueba que recibimos tenía 90% de duplicados y funciones cortadas a la mitad. Ya entregamos el reporte formal de auditoría a Data Engineering con 5 criterios de aceptación para el nuevo lote.</a:t>
+            </a:r>
+          </a:p>
+        </p:txBody>
+      </p:sp>
+      <p:sp>
+        <p:nvSpPr>
+          <p:cNvPr id="4" name="Slide Number Placeholder 3"/>
+          <p:cNvSpPr>
+            <a:spLocks noGrp="1"/>
+          </p:cNvSpPr>
+          <p:nvPr>
+            <p:ph type="sldNum" idx="5" sz="quarter"/>
+          </p:nvPr>
+        </p:nvSpPr>
+        <p:spPr/>
+      </p:sp>
+    </p:spTree>
+  </p:cSld>
+  <p:clrMapOvr>
+    <a:masterClrMapping/>
+  </p:clrMapOvr>
+</p:notes>
+</file>
+
+<file path=ppt/notesSlides/notesSlide18.xml><?xml version="1.0" encoding="utf-8"?>
+<p:notes xmlns:a="http://schemas.openxmlformats.org/drawingml/2006/main" xmlns:p="http://schemas.openxmlformats.org/presentationml/2006/main" xmlns:r="http://schemas.openxmlformats.org/officeDocument/2006/relationships">
+  <p:cSld>
+    <p:spTree>
+      <p:nvGrpSpPr>
+        <p:cNvPr id="1" name=""/>
+        <p:cNvGrpSpPr/>
+        <p:nvPr/>
+      </p:nvGrpSpPr>
+      <p:grpSpPr>
+        <a:xfrm>
+          <a:off x="0" y="0"/>
+          <a:ext cx="0" cy="0"/>
+          <a:chOff x="0" y="0"/>
+          <a:chExt cx="0" cy="0"/>
+        </a:xfrm>
+      </p:grpSpPr>
+      <p:sp>
+        <p:nvSpPr>
+          <p:cNvPr id="2" name="Slide Image Placeholder 1"/>
+          <p:cNvSpPr>
+            <a:spLocks noGrp="1"/>
+          </p:cNvSpPr>
+          <p:nvPr>
+            <p:ph type="sldImg" idx="2"/>
+          </p:nvPr>
+        </p:nvSpPr>
+        <p:spPr/>
+      </p:sp>
+      <p:sp>
+        <p:nvSpPr>
+          <p:cNvPr id="3" name="Notes Placeholder 2"/>
+          <p:cNvSpPr>
+            <a:spLocks noGrp="1"/>
+          </p:cNvSpPr>
+          <p:nvPr>
+            <p:ph type="body" idx="3" sz="quarter"/>
+          </p:nvPr>
+        </p:nvSpPr>
+        <p:spPr/>
+        <p:txBody>
+          <a:bodyPr/>
+          <a:lstStyle/>
+          <a:p>
+            <a:r>
               <a:t>La hoja de ruta es clara: una vez Data Engineering publique el blob curado con las 5 condiciones pactadas, ejecutaremos el protocolo final de drift. Con eso, y tras definir la política comercial para precios en cero en la versión 2.6, los micro-clusters quedarán listos para integrarse al pricing dinámico de la compañía.</a:t>
             </a:r>
           </a:p>
@@ -1130,7 +1556,7 @@
           <a:lstStyle/>
           <a:p>
             <a:r>
-              <a:t>Mismo arquetipo, distintos micro-clusters: la granularidad interna es la feature de backend; el arquetipo es el lenguaje de negocio. Observen cómo dentro de Preferencial distinguimos plateas centrales de laterales y posteriores; y en VIP aislamos palcos puros frente a balcones mixtos.</a:t>
+              <a:t>Mismo modelo, cinco escaleras: de un teatro de 400 butacas a un estadio — la jerarquía interna se respeta en todos los tamaños. En este auditorio de 240 butacas en Manizales no se fuerzan palcos inexistentes: desciende limpiamente de Platea General a Balcón Popular, capturando con honestidad una frontera en el balcón central difuso.</a:t>
             </a:r>
           </a:p>
         </p:txBody>
@@ -1200,7 +1626,7 @@
           <a:lstStyle/>
           <a:p>
             <a:r>
-              <a:t>Mismo arquetipo, distintos micro-clusters: la granularidad interna es la feature de backend; el arquetipo es el lenguaje de negocio. En eventos masivos, Popular separa pisos altos de balcones, mientras Grada General aísla tiquetes de festival de localidades de admisión por gradería.</a:t>
+              <a:t>Mismo modelo, cinco escaleras: de un teatro de 400 butacas a un estadio — la jerarquía interna se respeta en todos los tamaños. En el Teatro Gaitán, la platea frontal se estratifica en Centro ($200k), Lateral ($176k) y Posterior ($152k), mientras que el balcón delantero ($100k) se enciende como frontera honesta frente a la zona preferencial.</a:t>
             </a:r>
           </a:p>
         </p:txBody>
@@ -1270,7 +1696,7 @@
           <a:lstStyle/>
           <a:p>
             <a:r>
-              <a:t>El sistema sabe lo que no sabe: las fronteras no inventan certeza ficticia sino que encienden banderas de auditoría; los micro-clusters híbridos capturan recintos con nomenclatura mixta sin colapsar la asignación; y Admisión Única resuelve determinísticamente eventos mono-zona al 100% de confianza.</a:t>
+              <a:t>Mismo modelo, cinco escaleras: de un teatro de 400 butacas a un estadio — la jerarquía interna se respeta en todos los tamaños. En un formato mediano de arena, Tribuna Fan lidera como VIP híbrido, las plateas ocupan el segmento preferencial, y el segundo piso se clasifica limpiamente en popular, aislando como frontera la fila de transición.</a:t>
             </a:r>
           </a:p>
         </p:txBody>
@@ -1340,7 +1766,7 @@
           <a:lstStyle/>
           <a:p>
             <a:r>
-              <a:t>La evidencia no termina en las diapositivas: las 1,324 asignaciones completas, filtrables y con formato de porcentaje están disponibles en el anexo de Excel generado con openpyxl, además del CSV canónico en el repositorio.</a:t>
+              <a:t>Mismo modelo, cinco escaleras: de un teatro de 400 butacas a un estadio — la jerarquía interna se respeta en todos los tamaños. Con 13 mil personas y 12 localidades, la escalera completa convive sin colapsar: Palcos y Lounges en VIP, Platea Diamante en Preferencial, y la gradación de pisos 3 y 4 en Balcón Popular, con frontera en Platea General.</a:t>
             </a:r>
           </a:p>
         </p:txBody>
@@ -4770,7 +5196,7 @@
               </a:defRPr>
             </a:pPr>
             <a:r>
-              <a:t>MÉTRICAS DE CALIDAD Y CONFIABILIDAD</a:t>
+              <a:t>ESTRATO ESTADIO (&gt; 20.000 AFORO): ESTADIO DEPORTIVO MASIVO</a:t>
             </a:r>
           </a:p>
         </p:txBody>
@@ -4806,643 +5232,35 @@
               </a:defRPr>
             </a:pPr>
             <a:r>
-              <a:t>Evaluación Cuantitativa de la Marcha Blanca y Estabilidad Estadística Documentada</a:t>
-            </a:r>
-          </a:p>
-        </p:txBody>
-      </p:sp>
-      <p:sp>
-        <p:nvSpPr>
-          <p:cNvPr id="4" name="Rounded Rectangle 3"/>
-          <p:cNvSpPr/>
+              <a:t>The Last Dance @ Estadio Metropolitano (Aforo: 44,586) — Topología Deportiva Pura: Occidental, Oriental y Tribunas</a:t>
+            </a:r>
+          </a:p>
+        </p:txBody>
+      </p:sp>
+      <p:pic>
+        <p:nvPicPr>
+          <p:cNvPr id="4" name="Picture 3" descr="fig_evento_estadio.png"/>
+          <p:cNvPicPr>
+            <a:picLocks noChangeAspect="1"/>
+          </p:cNvPicPr>
           <p:nvPr/>
-        </p:nvSpPr>
-        <p:spPr>
-          <a:xfrm>
-            <a:off x="731520" y="1371600"/>
-            <a:ext cx="5212080" cy="2286000"/>
-          </a:xfrm>
-          <a:prstGeom prst="roundRect">
-            <a:avLst/>
-          </a:prstGeom>
-          <a:solidFill>
-            <a:srgbClr val="FFFFFF"/>
-          </a:solidFill>
-          <a:ln>
-            <a:solidFill>
-              <a:srgbClr val="D7DCE4"/>
-            </a:solidFill>
-          </a:ln>
-        </p:spPr>
-        <p:style>
-          <a:lnRef idx="1">
-            <a:schemeClr val="accent1"/>
-          </a:lnRef>
-          <a:fillRef idx="3">
-            <a:schemeClr val="accent1"/>
-          </a:fillRef>
-          <a:effectRef idx="2">
-            <a:schemeClr val="accent1"/>
-          </a:effectRef>
-          <a:fontRef idx="minor">
-            <a:schemeClr val="lt1"/>
-          </a:fontRef>
-        </p:style>
-        <p:txBody>
-          <a:bodyPr rtlCol="0" anchor="ctr"/>
-          <a:lstStyle/>
-          <a:p>
-            <a:pPr algn="ctr"/>
-          </a:p>
-        </p:txBody>
-      </p:sp>
-      <p:sp>
-        <p:nvSpPr>
-          <p:cNvPr id="5" name="Rounded Rectangle 4"/>
-          <p:cNvSpPr/>
-          <p:nvPr/>
-        </p:nvSpPr>
-        <p:spPr>
-          <a:xfrm>
-            <a:off x="731520" y="1371600"/>
-            <a:ext cx="182880" cy="2286000"/>
-          </a:xfrm>
-          <a:prstGeom prst="roundRect">
-            <a:avLst/>
-          </a:prstGeom>
-          <a:solidFill>
-            <a:srgbClr val="009688"/>
-          </a:solidFill>
-          <a:ln>
-            <a:solidFill>
-              <a:srgbClr val="009688"/>
-            </a:solidFill>
-          </a:ln>
-        </p:spPr>
-        <p:style>
-          <a:lnRef idx="1">
-            <a:schemeClr val="accent1"/>
-          </a:lnRef>
-          <a:fillRef idx="3">
-            <a:schemeClr val="accent1"/>
-          </a:fillRef>
-          <a:effectRef idx="2">
-            <a:schemeClr val="accent1"/>
-          </a:effectRef>
-          <a:fontRef idx="minor">
-            <a:schemeClr val="lt1"/>
-          </a:fontRef>
-        </p:style>
-        <p:txBody>
-          <a:bodyPr rtlCol="0" anchor="ctr"/>
-          <a:lstStyle/>
-          <a:p>
-            <a:pPr algn="ctr"/>
-          </a:p>
-        </p:txBody>
-      </p:sp>
-      <p:sp>
-        <p:nvSpPr>
-          <p:cNvPr id="6" name="TextBox 5"/>
-          <p:cNvSpPr txBox="1"/>
-          <p:nvPr/>
-        </p:nvSpPr>
-        <p:spPr>
-          <a:xfrm>
-            <a:off x="1097280" y="1554480"/>
-            <a:ext cx="4663440" cy="1920240"/>
+        </p:nvPicPr>
+        <p:blipFill>
+          <a:blip r:embed="rId4"/>
+          <a:stretch>
+            <a:fillRect/>
+          </a:stretch>
+        </p:blipFill>
+        <p:spPr>
+          <a:xfrm>
+            <a:off x="731520" y="1280160"/>
+            <a:ext cx="10698480" cy="5029200"/>
           </a:xfrm>
           <a:prstGeom prst="rect">
             <a:avLst/>
           </a:prstGeom>
-          <a:noFill/>
-        </p:spPr>
-        <p:txBody>
-          <a:bodyPr wrap="square">
-            <a:spAutoFit/>
-          </a:bodyPr>
-          <a:lstStyle/>
-          <a:p>
-            <a:pPr>
-              <a:spcAft>
-                <a:spcPts val="200"/>
-              </a:spcAft>
-              <a:defRPr sz="2400" b="1">
-                <a:solidFill>
-                  <a:srgbClr val="009688"/>
-                </a:solidFill>
-                <a:latin typeface="Montserrat"/>
-              </a:defRPr>
-            </a:pPr>
-            <a:r>
-              <a:t>0.6314 (63.14%)</a:t>
-            </a:r>
-          </a:p>
-          <a:p>
-            <a:pPr>
-              <a:spcAft>
-                <a:spcPts val="600"/>
-              </a:spcAft>
-              <a:defRPr sz="1100" b="1">
-                <a:solidFill>
-                  <a:srgbClr val="0B2545"/>
-                </a:solidFill>
-                <a:latin typeface="Montserrat"/>
-              </a:defRPr>
-            </a:pPr>
-            <a:r>
-              <a:t>SCORE DE CONFIANZA GEOMÉTRICO MEDIO</a:t>
-            </a:r>
-          </a:p>
-          <a:p>
-            <a:pPr>
-              <a:defRPr sz="1000">
-                <a:solidFill>
-                  <a:srgbClr val="212529"/>
-                </a:solidFill>
-                <a:latin typeface="Montserrat"/>
-              </a:defRPr>
-            </a:pPr>
-            <a:r>
-              <a:t>Supera ampliamente el umbral operacional mínimo de 0.50. Alta certidumbre en asignación de centroides.</a:t>
-            </a:r>
-          </a:p>
-        </p:txBody>
-      </p:sp>
-      <p:sp>
-        <p:nvSpPr>
-          <p:cNvPr id="7" name="Rounded Rectangle 6"/>
-          <p:cNvSpPr/>
-          <p:nvPr/>
-        </p:nvSpPr>
-        <p:spPr>
-          <a:xfrm>
-            <a:off x="6217920" y="1371600"/>
-            <a:ext cx="5212080" cy="2286000"/>
-          </a:xfrm>
-          <a:prstGeom prst="roundRect">
-            <a:avLst/>
-          </a:prstGeom>
-          <a:solidFill>
-            <a:srgbClr val="FFFFFF"/>
-          </a:solidFill>
-          <a:ln>
-            <a:solidFill>
-              <a:srgbClr val="D7DCE4"/>
-            </a:solidFill>
-          </a:ln>
-        </p:spPr>
-        <p:style>
-          <a:lnRef idx="1">
-            <a:schemeClr val="accent1"/>
-          </a:lnRef>
-          <a:fillRef idx="3">
-            <a:schemeClr val="accent1"/>
-          </a:fillRef>
-          <a:effectRef idx="2">
-            <a:schemeClr val="accent1"/>
-          </a:effectRef>
-          <a:fontRef idx="minor">
-            <a:schemeClr val="lt1"/>
-          </a:fontRef>
-        </p:style>
-        <p:txBody>
-          <a:bodyPr rtlCol="0" anchor="ctr"/>
-          <a:lstStyle/>
-          <a:p>
-            <a:pPr algn="ctr"/>
-          </a:p>
-        </p:txBody>
-      </p:sp>
-      <p:sp>
-        <p:nvSpPr>
-          <p:cNvPr id="8" name="Rounded Rectangle 7"/>
-          <p:cNvSpPr/>
-          <p:nvPr/>
-        </p:nvSpPr>
-        <p:spPr>
-          <a:xfrm>
-            <a:off x="6217920" y="1371600"/>
-            <a:ext cx="182880" cy="2286000"/>
-          </a:xfrm>
-          <a:prstGeom prst="roundRect">
-            <a:avLst/>
-          </a:prstGeom>
-          <a:solidFill>
-            <a:srgbClr val="134074"/>
-          </a:solidFill>
-          <a:ln>
-            <a:solidFill>
-              <a:srgbClr val="134074"/>
-            </a:solidFill>
-          </a:ln>
-        </p:spPr>
-        <p:style>
-          <a:lnRef idx="1">
-            <a:schemeClr val="accent1"/>
-          </a:lnRef>
-          <a:fillRef idx="3">
-            <a:schemeClr val="accent1"/>
-          </a:fillRef>
-          <a:effectRef idx="2">
-            <a:schemeClr val="accent1"/>
-          </a:effectRef>
-          <a:fontRef idx="minor">
-            <a:schemeClr val="lt1"/>
-          </a:fontRef>
-        </p:style>
-        <p:txBody>
-          <a:bodyPr rtlCol="0" anchor="ctr"/>
-          <a:lstStyle/>
-          <a:p>
-            <a:pPr algn="ctr"/>
-          </a:p>
-        </p:txBody>
-      </p:sp>
-      <p:sp>
-        <p:nvSpPr>
-          <p:cNvPr id="9" name="TextBox 8"/>
-          <p:cNvSpPr txBox="1"/>
-          <p:nvPr/>
-        </p:nvSpPr>
-        <p:spPr>
-          <a:xfrm>
-            <a:off x="6583680" y="1554480"/>
-            <a:ext cx="4663440" cy="1920240"/>
-          </a:xfrm>
-          <a:prstGeom prst="rect">
-            <a:avLst/>
-          </a:prstGeom>
-          <a:noFill/>
-        </p:spPr>
-        <p:txBody>
-          <a:bodyPr wrap="square">
-            <a:spAutoFit/>
-          </a:bodyPr>
-          <a:lstStyle/>
-          <a:p>
-            <a:pPr>
-              <a:spcAft>
-                <a:spcPts val="200"/>
-              </a:spcAft>
-              <a:defRPr sz="2400" b="1">
-                <a:solidFill>
-                  <a:srgbClr val="134074"/>
-                </a:solidFill>
-                <a:latin typeface="Montserrat"/>
-              </a:defRPr>
-            </a:pPr>
-            <a:r>
-              <a:t>14.27%</a:t>
-            </a:r>
-          </a:p>
-          <a:p>
-            <a:pPr>
-              <a:spcAft>
-                <a:spcPts val="600"/>
-              </a:spcAft>
-              <a:defRPr sz="1100" b="1">
-                <a:solidFill>
-                  <a:srgbClr val="0B2545"/>
-                </a:solidFill>
-                <a:latin typeface="Montserrat"/>
-              </a:defRPr>
-            </a:pPr>
-            <a:r>
-              <a:t>TASA DE LOCALIDADES EN FRONTERA</a:t>
-            </a:r>
-          </a:p>
-          <a:p>
-            <a:pPr>
-              <a:defRPr sz="1000">
-                <a:solidFill>
-                  <a:srgbClr val="212529"/>
-                </a:solidFill>
-                <a:latin typeface="Montserrat"/>
-              </a:defRPr>
-            </a:pPr>
-            <a:r>
-              <a:t>Dentro del margen seguro previsto (&lt; 20.0%). El 85.73% restante de las localidades se ubica con certidumbre nítida.</a:t>
-            </a:r>
-          </a:p>
-        </p:txBody>
-      </p:sp>
-      <p:sp>
-        <p:nvSpPr>
-          <p:cNvPr id="10" name="Rounded Rectangle 9"/>
-          <p:cNvSpPr/>
-          <p:nvPr/>
-        </p:nvSpPr>
-        <p:spPr>
-          <a:xfrm>
-            <a:off x="731520" y="3840480"/>
-            <a:ext cx="5212080" cy="2286000"/>
-          </a:xfrm>
-          <a:prstGeom prst="roundRect">
-            <a:avLst/>
-          </a:prstGeom>
-          <a:solidFill>
-            <a:srgbClr val="FFFFFF"/>
-          </a:solidFill>
-          <a:ln>
-            <a:solidFill>
-              <a:srgbClr val="D7DCE4"/>
-            </a:solidFill>
-          </a:ln>
-        </p:spPr>
-        <p:style>
-          <a:lnRef idx="1">
-            <a:schemeClr val="accent1"/>
-          </a:lnRef>
-          <a:fillRef idx="3">
-            <a:schemeClr val="accent1"/>
-          </a:fillRef>
-          <a:effectRef idx="2">
-            <a:schemeClr val="accent1"/>
-          </a:effectRef>
-          <a:fontRef idx="minor">
-            <a:schemeClr val="lt1"/>
-          </a:fontRef>
-        </p:style>
-        <p:txBody>
-          <a:bodyPr rtlCol="0" anchor="ctr"/>
-          <a:lstStyle/>
-          <a:p>
-            <a:pPr algn="ctr"/>
-          </a:p>
-        </p:txBody>
-      </p:sp>
-      <p:sp>
-        <p:nvSpPr>
-          <p:cNvPr id="11" name="Rounded Rectangle 10"/>
-          <p:cNvSpPr/>
-          <p:nvPr/>
-        </p:nvSpPr>
-        <p:spPr>
-          <a:xfrm>
-            <a:off x="731520" y="3840480"/>
-            <a:ext cx="182880" cy="2286000"/>
-          </a:xfrm>
-          <a:prstGeom prst="roundRect">
-            <a:avLst/>
-          </a:prstGeom>
-          <a:solidFill>
-            <a:srgbClr val="0B2545"/>
-          </a:solidFill>
-          <a:ln>
-            <a:solidFill>
-              <a:srgbClr val="0B2545"/>
-            </a:solidFill>
-          </a:ln>
-        </p:spPr>
-        <p:style>
-          <a:lnRef idx="1">
-            <a:schemeClr val="accent1"/>
-          </a:lnRef>
-          <a:fillRef idx="3">
-            <a:schemeClr val="accent1"/>
-          </a:fillRef>
-          <a:effectRef idx="2">
-            <a:schemeClr val="accent1"/>
-          </a:effectRef>
-          <a:fontRef idx="minor">
-            <a:schemeClr val="lt1"/>
-          </a:fontRef>
-        </p:style>
-        <p:txBody>
-          <a:bodyPr rtlCol="0" anchor="ctr"/>
-          <a:lstStyle/>
-          <a:p>
-            <a:pPr algn="ctr"/>
-          </a:p>
-        </p:txBody>
-      </p:sp>
-      <p:sp>
-        <p:nvSpPr>
-          <p:cNvPr id="12" name="TextBox 11"/>
-          <p:cNvSpPr txBox="1"/>
-          <p:nvPr/>
-        </p:nvSpPr>
-        <p:spPr>
-          <a:xfrm>
-            <a:off x="1097280" y="4023360"/>
-            <a:ext cx="4663440" cy="1920240"/>
-          </a:xfrm>
-          <a:prstGeom prst="rect">
-            <a:avLst/>
-          </a:prstGeom>
-          <a:noFill/>
-        </p:spPr>
-        <p:txBody>
-          <a:bodyPr wrap="square">
-            <a:spAutoFit/>
-          </a:bodyPr>
-          <a:lstStyle/>
-          <a:p>
-            <a:pPr>
-              <a:spcAft>
-                <a:spcPts val="200"/>
-              </a:spcAft>
-              <a:defRPr sz="2400" b="1">
-                <a:solidFill>
-                  <a:srgbClr val="0B2545"/>
-                </a:solidFill>
-                <a:latin typeface="Montserrat"/>
-              </a:defRPr>
-            </a:pPr>
-            <a:r>
-              <a:t>0.00%</a:t>
-            </a:r>
-          </a:p>
-          <a:p>
-            <a:pPr>
-              <a:spcAft>
-                <a:spcPts val="600"/>
-              </a:spcAft>
-              <a:defRPr sz="1100" b="1">
-                <a:solidFill>
-                  <a:srgbClr val="0B2545"/>
-                </a:solidFill>
-                <a:latin typeface="Montserrat"/>
-              </a:defRPr>
-            </a:pPr>
-            <a:r>
-              <a:t>TASA DE TEXTO VACÍO POST-FILTRO</a:t>
-            </a:r>
-          </a:p>
-          <a:p>
-            <a:pPr>
-              <a:defRPr sz="1000">
-                <a:solidFill>
-                  <a:srgbClr val="212529"/>
-                </a:solidFill>
-                <a:latin typeface="Montserrat"/>
-              </a:defRPr>
-            </a:pPr>
-            <a:r>
-              <a:t>100% de cobertura de nombres semánticos. Cero localidades en blanco procesadas por el modelo.</a:t>
-            </a:r>
-          </a:p>
-        </p:txBody>
-      </p:sp>
-      <p:sp>
-        <p:nvSpPr>
-          <p:cNvPr id="13" name="Rounded Rectangle 12"/>
-          <p:cNvSpPr/>
-          <p:nvPr/>
-        </p:nvSpPr>
-        <p:spPr>
-          <a:xfrm>
-            <a:off x="6217920" y="3840480"/>
-            <a:ext cx="5212080" cy="2286000"/>
-          </a:xfrm>
-          <a:prstGeom prst="roundRect">
-            <a:avLst/>
-          </a:prstGeom>
-          <a:solidFill>
-            <a:srgbClr val="FFFFFF"/>
-          </a:solidFill>
-          <a:ln>
-            <a:solidFill>
-              <a:srgbClr val="D7DCE4"/>
-            </a:solidFill>
-          </a:ln>
-        </p:spPr>
-        <p:style>
-          <a:lnRef idx="1">
-            <a:schemeClr val="accent1"/>
-          </a:lnRef>
-          <a:fillRef idx="3">
-            <a:schemeClr val="accent1"/>
-          </a:fillRef>
-          <a:effectRef idx="2">
-            <a:schemeClr val="accent1"/>
-          </a:effectRef>
-          <a:fontRef idx="minor">
-            <a:schemeClr val="lt1"/>
-          </a:fontRef>
-        </p:style>
-        <p:txBody>
-          <a:bodyPr rtlCol="0" anchor="ctr"/>
-          <a:lstStyle/>
-          <a:p>
-            <a:pPr algn="ctr"/>
-          </a:p>
-        </p:txBody>
-      </p:sp>
-      <p:sp>
-        <p:nvSpPr>
-          <p:cNvPr id="14" name="Rounded Rectangle 13"/>
-          <p:cNvSpPr/>
-          <p:nvPr/>
-        </p:nvSpPr>
-        <p:spPr>
-          <a:xfrm>
-            <a:off x="6217920" y="3840480"/>
-            <a:ext cx="182880" cy="2286000"/>
-          </a:xfrm>
-          <a:prstGeom prst="roundRect">
-            <a:avLst/>
-          </a:prstGeom>
-          <a:solidFill>
-            <a:srgbClr val="E76F51"/>
-          </a:solidFill>
-          <a:ln>
-            <a:solidFill>
-              <a:srgbClr val="E76F51"/>
-            </a:solidFill>
-          </a:ln>
-        </p:spPr>
-        <p:style>
-          <a:lnRef idx="1">
-            <a:schemeClr val="accent1"/>
-          </a:lnRef>
-          <a:fillRef idx="3">
-            <a:schemeClr val="accent1"/>
-          </a:fillRef>
-          <a:effectRef idx="2">
-            <a:schemeClr val="accent1"/>
-          </a:effectRef>
-          <a:fontRef idx="minor">
-            <a:schemeClr val="lt1"/>
-          </a:fontRef>
-        </p:style>
-        <p:txBody>
-          <a:bodyPr rtlCol="0" anchor="ctr"/>
-          <a:lstStyle/>
-          <a:p>
-            <a:pPr algn="ctr"/>
-          </a:p>
-        </p:txBody>
-      </p:sp>
-      <p:sp>
-        <p:nvSpPr>
-          <p:cNvPr id="15" name="TextBox 14"/>
-          <p:cNvSpPr txBox="1"/>
-          <p:nvPr/>
-        </p:nvSpPr>
-        <p:spPr>
-          <a:xfrm>
-            <a:off x="6583680" y="4023360"/>
-            <a:ext cx="4663440" cy="1920240"/>
-          </a:xfrm>
-          <a:prstGeom prst="rect">
-            <a:avLst/>
-          </a:prstGeom>
-          <a:noFill/>
-        </p:spPr>
-        <p:txBody>
-          <a:bodyPr wrap="square">
-            <a:spAutoFit/>
-          </a:bodyPr>
-          <a:lstStyle/>
-          <a:p>
-            <a:pPr>
-              <a:spcAft>
-                <a:spcPts val="200"/>
-              </a:spcAft>
-              <a:defRPr sz="2400" b="1">
-                <a:solidFill>
-                  <a:srgbClr val="E76F51"/>
-                </a:solidFill>
-                <a:latin typeface="Montserrat"/>
-              </a:defRPr>
-            </a:pPr>
-            <a:r>
-              <a:t>&gt; 0.88</a:t>
-            </a:r>
-          </a:p>
-          <a:p>
-            <a:pPr>
-              <a:spcAft>
-                <a:spcPts val="600"/>
-              </a:spcAft>
-              <a:defRPr sz="1100" b="1">
-                <a:solidFill>
-                  <a:srgbClr val="0B2545"/>
-                </a:solidFill>
-                <a:latin typeface="Montserrat"/>
-              </a:defRPr>
-            </a:pPr>
-            <a:r>
-              <a:t>ESTABILIDAD BOOTSTRAP-ARI PROMEDIO</a:t>
-            </a:r>
-          </a:p>
-          <a:p>
-            <a:pPr>
-              <a:defRPr sz="1000">
-                <a:solidFill>
-                  <a:srgbClr val="212529"/>
-                </a:solidFill>
-                <a:latin typeface="Montserrat"/>
-              </a:defRPr>
-            </a:pPr>
-            <a:r>
-              <a:t>Compuerta de reproducibilidad superada en réplicas al 80% (Popular: 0.985, Platea: 0.979, VIP: 0.934).</a:t>
-            </a:r>
-          </a:p>
-        </p:txBody>
-      </p:sp>
+        </p:spPr>
+      </p:pic>
     </p:spTree>
   </p:cSld>
   <p:clrMapOvr>
@@ -5506,7 +5324,7 @@
               </a:defRPr>
             </a:pPr>
             <a:r>
-              <a:t>LÍMITES HONESTOS DEL LOTE Y GOBERNANZA</a:t>
+              <a:t>EVIDENCIA POR SEGMENTO: SEGMENTO PREMIUM</a:t>
             </a:r>
           </a:p>
         </p:txBody>
@@ -5542,21 +5360,301 @@
               </a:defRPr>
             </a:pPr>
             <a:r>
-              <a:t>Validación Funcional Exitosa (N=1,324), Diagnóstico de Capa GOLD y Criterios de Aceptación</a:t>
-            </a:r>
-          </a:p>
-        </p:txBody>
-      </p:sp>
-      <p:sp>
-        <p:nvSpPr>
-          <p:cNvPr id="4" name="Rounded Rectangle 3"/>
+              <a:t>Granularidad Interna en VIP y Preferencial Frontal (Micro-clusters VIP-0..2 y PPF-0..2)</a:t>
+            </a:r>
+          </a:p>
+        </p:txBody>
+      </p:sp>
+      <p:pic>
+        <p:nvPicPr>
+          <p:cNvPr id="4" name="Picture 3" descr="fig_galeria_premium.png"/>
+          <p:cNvPicPr>
+            <a:picLocks noChangeAspect="1"/>
+          </p:cNvPicPr>
+          <p:nvPr/>
+        </p:nvPicPr>
+        <p:blipFill>
+          <a:blip r:embed="rId4"/>
+          <a:stretch>
+            <a:fillRect/>
+          </a:stretch>
+        </p:blipFill>
+        <p:spPr>
+          <a:xfrm>
+            <a:off x="731520" y="1280160"/>
+            <a:ext cx="10698480" cy="5029200"/>
+          </a:xfrm>
+          <a:prstGeom prst="rect">
+            <a:avLst/>
+          </a:prstGeom>
+        </p:spPr>
+      </p:pic>
+    </p:spTree>
+  </p:cSld>
+  <p:clrMapOvr>
+    <a:masterClrMapping/>
+  </p:clrMapOvr>
+</p:sld>
+</file>
+
+<file path=ppt/slides/slide12.xml><?xml version="1.0" encoding="utf-8"?>
+<p:sld xmlns:a="http://schemas.openxmlformats.org/drawingml/2006/main" xmlns:p="http://schemas.openxmlformats.org/presentationml/2006/main" xmlns:r="http://schemas.openxmlformats.org/officeDocument/2006/relationships">
+  <p:cSld>
+    <p:bg>
+      <p:bgPr>
+        <a:blipFill dpi="0" rotWithShape="1">
+          <a:blip r:embed="rId2">
+            <a:lum/>
+          </a:blip>
+          <a:srcRect/>
+          <a:stretch>
+            <a:fillRect/>
+          </a:stretch>
+        </a:blipFill>
+        <a:effectLst/>
+      </p:bgPr>
+    </p:bg>
+    <p:spTree>
+      <p:nvGrpSpPr>
+        <p:cNvPr id="1" name=""/>
+        <p:cNvGrpSpPr/>
+        <p:nvPr/>
+      </p:nvGrpSpPr>
+      <p:grpSpPr/>
+      <p:sp>
+        <p:nvSpPr>
+          <p:cNvPr id="2" name="TextBox 1"/>
+          <p:cNvSpPr txBox="1"/>
+          <p:nvPr/>
+        </p:nvSpPr>
+        <p:spPr>
+          <a:xfrm>
+            <a:off x="841248" y="173736"/>
+            <a:ext cx="10515600" cy="365760"/>
+          </a:xfrm>
+          <a:prstGeom prst="rect">
+            <a:avLst/>
+          </a:prstGeom>
+          <a:noFill/>
+        </p:spPr>
+        <p:txBody>
+          <a:bodyPr wrap="square">
+            <a:spAutoFit/>
+          </a:bodyPr>
+          <a:lstStyle/>
+          <a:p>
+            <a:pPr>
+              <a:defRPr sz="1700" b="1">
+                <a:solidFill>
+                  <a:srgbClr val="FFFFFF"/>
+                </a:solidFill>
+                <a:latin typeface="Montserrat"/>
+              </a:defRPr>
+            </a:pPr>
+            <a:r>
+              <a:t>EVIDENCIA POR SEGMENTO: SEGMENTO MASIVOS</a:t>
+            </a:r>
+          </a:p>
+        </p:txBody>
+      </p:sp>
+      <p:sp>
+        <p:nvSpPr>
+          <p:cNvPr id="3" name="TextBox 2"/>
+          <p:cNvSpPr txBox="1"/>
+          <p:nvPr/>
+        </p:nvSpPr>
+        <p:spPr>
+          <a:xfrm>
+            <a:off x="841248" y="621792"/>
+            <a:ext cx="10515600" cy="594360"/>
+          </a:xfrm>
+          <a:prstGeom prst="rect">
+            <a:avLst/>
+          </a:prstGeom>
+          <a:noFill/>
+        </p:spPr>
+        <p:txBody>
+          <a:bodyPr wrap="square">
+            <a:spAutoFit/>
+          </a:bodyPr>
+          <a:lstStyle/>
+          <a:p>
+            <a:pPr>
+              <a:defRPr sz="1300">
+                <a:solidFill>
+                  <a:srgbClr val="0B2545"/>
+                </a:solidFill>
+                <a:latin typeface="Montserrat"/>
+              </a:defRPr>
+            </a:pPr>
+            <a:r>
+              <a:t>Granularidad Interna en Platea General, Popular y Grada Masiva (PGI, POP, GGM)</a:t>
+            </a:r>
+          </a:p>
+        </p:txBody>
+      </p:sp>
+      <p:pic>
+        <p:nvPicPr>
+          <p:cNvPr id="4" name="Picture 3" descr="fig_galeria_masivos.png"/>
+          <p:cNvPicPr>
+            <a:picLocks noChangeAspect="1"/>
+          </p:cNvPicPr>
+          <p:nvPr/>
+        </p:nvPicPr>
+        <p:blipFill>
+          <a:blip r:embed="rId4"/>
+          <a:stretch>
+            <a:fillRect/>
+          </a:stretch>
+        </p:blipFill>
+        <p:spPr>
+          <a:xfrm>
+            <a:off x="731520" y="1280160"/>
+            <a:ext cx="10698480" cy="5029200"/>
+          </a:xfrm>
+          <a:prstGeom prst="rect">
+            <a:avLst/>
+          </a:prstGeom>
+        </p:spPr>
+      </p:pic>
+    </p:spTree>
+  </p:cSld>
+  <p:clrMapOvr>
+    <a:masterClrMapping/>
+  </p:clrMapOvr>
+</p:sld>
+</file>
+
+<file path=ppt/slides/slide13.xml><?xml version="1.0" encoding="utf-8"?>
+<p:sld xmlns:a="http://schemas.openxmlformats.org/drawingml/2006/main" xmlns:p="http://schemas.openxmlformats.org/presentationml/2006/main" xmlns:r="http://schemas.openxmlformats.org/officeDocument/2006/relationships">
+  <p:cSld>
+    <p:bg>
+      <p:bgPr>
+        <a:blipFill dpi="0" rotWithShape="1">
+          <a:blip r:embed="rId2">
+            <a:lum/>
+          </a:blip>
+          <a:srcRect/>
+          <a:stretch>
+            <a:fillRect/>
+          </a:stretch>
+        </a:blipFill>
+        <a:effectLst/>
+      </p:bgPr>
+    </p:bg>
+    <p:spTree>
+      <p:nvGrpSpPr>
+        <p:cNvPr id="1" name=""/>
+        <p:cNvGrpSpPr/>
+        <p:nvPr/>
+      </p:nvGrpSpPr>
+      <p:grpSpPr/>
+      <p:sp>
+        <p:nvSpPr>
+          <p:cNvPr id="2" name="TextBox 1"/>
+          <p:cNvSpPr txBox="1"/>
+          <p:nvPr/>
+        </p:nvSpPr>
+        <p:spPr>
+          <a:xfrm>
+            <a:off x="841248" y="173736"/>
+            <a:ext cx="10515600" cy="365760"/>
+          </a:xfrm>
+          <a:prstGeom prst="rect">
+            <a:avLst/>
+          </a:prstGeom>
+          <a:noFill/>
+        </p:spPr>
+        <p:txBody>
+          <a:bodyPr wrap="square">
+            <a:spAutoFit/>
+          </a:bodyPr>
+          <a:lstStyle/>
+          <a:p>
+            <a:pPr>
+              <a:defRPr sz="1700" b="1">
+                <a:solidFill>
+                  <a:srgbClr val="FFFFFF"/>
+                </a:solidFill>
+                <a:latin typeface="Montserrat"/>
+              </a:defRPr>
+            </a:pPr>
+            <a:r>
+              <a:t>CASOS ESPECIALES: CALIDAD MATEMÁTICA Y FRONTERAS</a:t>
+            </a:r>
+          </a:p>
+        </p:txBody>
+      </p:sp>
+      <p:sp>
+        <p:nvSpPr>
+          <p:cNvPr id="3" name="TextBox 2"/>
+          <p:cNvSpPr txBox="1"/>
+          <p:nvPr/>
+        </p:nvSpPr>
+        <p:spPr>
+          <a:xfrm>
+            <a:off x="841248" y="621792"/>
+            <a:ext cx="10515600" cy="594360"/>
+          </a:xfrm>
+          <a:prstGeom prst="rect">
+            <a:avLst/>
+          </a:prstGeom>
+          <a:noFill/>
+        </p:spPr>
+        <p:txBody>
+          <a:bodyPr wrap="square">
+            <a:spAutoFit/>
+          </a:bodyPr>
+          <a:lstStyle/>
+          <a:p>
+            <a:pPr>
+              <a:defRPr sz="1300">
+                <a:solidFill>
+                  <a:srgbClr val="0B2545"/>
+                </a:solidFill>
+                <a:latin typeface="Montserrat"/>
+              </a:defRPr>
+            </a:pPr>
+            <a:r>
+              <a:t>Admisión Única Determinística, Banderas de Frontera y Clusters Léxicos Híbridos</a:t>
+            </a:r>
+          </a:p>
+        </p:txBody>
+      </p:sp>
+      <p:pic>
+        <p:nvPicPr>
+          <p:cNvPr id="4" name="Picture 3" descr="fig_galeria_especiales.png"/>
+          <p:cNvPicPr>
+            <a:picLocks noChangeAspect="1"/>
+          </p:cNvPicPr>
+          <p:nvPr/>
+        </p:nvPicPr>
+        <p:blipFill>
+          <a:blip r:embed="rId4"/>
+          <a:stretch>
+            <a:fillRect/>
+          </a:stretch>
+        </p:blipFill>
+        <p:spPr>
+          <a:xfrm>
+            <a:off x="731520" y="1280160"/>
+            <a:ext cx="6858000" cy="5029200"/>
+          </a:xfrm>
+          <a:prstGeom prst="rect">
+            <a:avLst/>
+          </a:prstGeom>
+        </p:spPr>
+      </p:pic>
+      <p:sp>
+        <p:nvSpPr>
+          <p:cNvPr id="5" name="Rounded Rectangle 4"/>
           <p:cNvSpPr/>
           <p:nvPr/>
         </p:nvSpPr>
         <p:spPr>
           <a:xfrm>
-            <a:off x="731520" y="1371600"/>
-            <a:ext cx="5212080" cy="4937760"/>
+            <a:off x="7772400" y="1280160"/>
+            <a:ext cx="3657600" cy="5029200"/>
           </a:xfrm>
           <a:prstGeom prst="roundRect">
             <a:avLst/>
@@ -5594,14 +5692,14 @@
       </p:sp>
       <p:sp>
         <p:nvSpPr>
-          <p:cNvPr id="5" name="TextBox 4"/>
+          <p:cNvPr id="6" name="TextBox 5"/>
           <p:cNvSpPr txBox="1"/>
           <p:nvPr/>
         </p:nvSpPr>
         <p:spPr>
           <a:xfrm>
-            <a:off x="914400" y="1554480"/>
-            <a:ext cx="4846320" cy="4572000"/>
+            <a:off x="7909560" y="1417320"/>
+            <a:ext cx="3383280" cy="4754880"/>
           </a:xfrm>
           <a:prstGeom prst="rect">
             <a:avLst/>
@@ -5616,17 +5714,33 @@
           <a:p>
             <a:pPr>
               <a:spcAft>
-                <a:spcPts val="1000"/>
+                <a:spcPts val="200"/>
               </a:spcAft>
-              <a:defRPr sz="1150" b="1">
-                <a:solidFill>
-                  <a:srgbClr val="0B2545"/>
-                </a:solidFill>
-                <a:latin typeface="Montserrat"/>
-              </a:defRPr>
-            </a:pPr>
-            <a:r>
-              <a:t>VALIDACIÓN FUNCIONAL EXITOSA (NO ESTADÍSTICA)</a:t>
+              <a:defRPr sz="1100" b="1">
+                <a:solidFill>
+                  <a:srgbClr val="134074"/>
+                </a:solidFill>
+                <a:latin typeface="Montserrat"/>
+              </a:defRPr>
+            </a:pPr>
+            <a:r>
+              <a:t>AU-0: Admisión Única (100% Confianza)</a:t>
+            </a:r>
+          </a:p>
+          <a:p>
+            <a:pPr>
+              <a:spcAft>
+                <a:spcPts val="800"/>
+              </a:spcAft>
+              <a:defRPr sz="950">
+                <a:solidFill>
+                  <a:srgbClr val="212529"/>
+                </a:solidFill>
+                <a:latin typeface="Montserrat"/>
+              </a:defRPr>
+            </a:pPr>
+            <a:r>
+              <a:t>Eventos mono-zona o boletos de acceso irrestricto (Meet &amp; Greet, Galerías). Pasa por nodo determinístico.</a:t>
             </a:r>
           </a:p>
           <a:p>
@@ -5634,21 +5748,21 @@
               <a:spcAft>
                 <a:spcPts val="200"/>
               </a:spcAft>
-              <a:defRPr sz="1000" b="1">
-                <a:solidFill>
-                  <a:srgbClr val="134074"/>
-                </a:solidFill>
-                <a:latin typeface="Montserrat"/>
-              </a:defRPr>
-            </a:pPr>
-            <a:r>
-              <a:t>• 706,443 Filas Crudas Ingeridas:</a:t>
+              <a:defRPr sz="1100" b="1">
+                <a:solidFill>
+                  <a:srgbClr val="E76F51"/>
+                </a:solidFill>
+                <a:latin typeface="Montserrat"/>
+              </a:defRPr>
+            </a:pPr>
+            <a:r>
+              <a:t>Fronteras Estadísticas (Borde Punteado)</a:t>
             </a:r>
           </a:p>
           <a:p>
             <a:pPr>
               <a:spcAft>
-                <a:spcPts val="600"/>
+                <a:spcPts val="800"/>
               </a:spcAft>
               <a:defRPr sz="950">
                 <a:solidFill>
@@ -5658,7 +5772,7 @@
               </a:defRPr>
             </a:pPr>
             <a:r>
-              <a:t>  El lote probó de punta a punta la robustez del código, descarga de Azure e inferencia defensiva.</a:t>
+              <a:t>Confianzas &lt; 0.50 entre zonas difusas (ej. Platea en Teatro El Ensueño con 0.16%). Activa segmento_incierto=True.</a:t>
             </a:r>
           </a:p>
           <a:p>
@@ -5666,7 +5780,7 @@
               <a:spcAft>
                 <a:spcPts val="200"/>
               </a:spcAft>
-              <a:defRPr sz="1000" b="1">
+              <a:defRPr sz="1100" b="1">
                 <a:solidFill>
                   <a:srgbClr val="134074"/>
                 </a:solidFill>
@@ -5674,13 +5788,13 @@
               </a:defRPr>
             </a:pPr>
             <a:r>
-              <a:t>• 1,324 Localidades Limpias Finales (99.81% Descarte):</a:t>
+              <a:t>Clusters Híbridos (Badge HÍBRIDO)</a:t>
             </a:r>
           </a:p>
           <a:p>
             <a:pPr>
               <a:spcAft>
-                <a:spcPts val="600"/>
+                <a:spcPts val="800"/>
               </a:spcAft>
               <a:defRPr sz="950">
                 <a:solidFill>
@@ -5690,7 +5804,7 @@
               </a:defRPr>
             </a:pPr>
             <a:r>
-              <a:t>  El volumen residual certificado es seguro para inferencia pero insuficiente para certificar drift poblacional (PSI) representativo.</a:t>
+              <a:t>Nomenclaturas combinadas (Luneta + Balcón) agrupadas por K-Means sin violar el arquetipo macro.</a:t>
             </a:r>
           </a:p>
           <a:p>
@@ -5698,7 +5812,7 @@
               <a:spcAft>
                 <a:spcPts val="200"/>
               </a:spcAft>
-              <a:defRPr sz="1000" b="1">
+              <a:defRPr sz="1100" b="1">
                 <a:solidFill>
                   <a:srgbClr val="134074"/>
                 </a:solidFill>
@@ -5706,13 +5820,13 @@
               </a:defRPr>
             </a:pPr>
             <a:r>
-              <a:t>• Causa de Descarte Masivo:</a:t>
+              <a:t>Regla 8: Exclusiones Interceptadas</a:t>
             </a:r>
           </a:p>
           <a:p>
             <a:pPr>
               <a:spcAft>
-                <a:spcPts val="600"/>
+                <a:spcPts val="800"/>
               </a:spcAft>
               <a:defRPr sz="950">
                 <a:solidFill>
@@ -5722,20 +5836,252 @@
               </a:defRPr>
             </a:pPr>
             <a:r>
-              <a:t>  636k duplicados exactos (90.1%) y 706k filas (99.9%) en eventos con suma de cuotas rota por muestreo parcial.</a:t>
-            </a:r>
-          </a:p>
-        </p:txBody>
-      </p:sp>
-      <p:sp>
-        <p:nvSpPr>
-          <p:cNvPr id="6" name="Rounded Rectangle 5"/>
+              <a:t>13,020 parqueaderos y 205 localidades activas no comerciales excluidas ex-ante por el contrato Python.</a:t>
+            </a:r>
+          </a:p>
+        </p:txBody>
+      </p:sp>
+    </p:spTree>
+  </p:cSld>
+  <p:clrMapOvr>
+    <a:masterClrMapping/>
+  </p:clrMapOvr>
+</p:sld>
+</file>
+
+<file path=ppt/slides/slide14.xml><?xml version="1.0" encoding="utf-8"?>
+<p:sld xmlns:a="http://schemas.openxmlformats.org/drawingml/2006/main" xmlns:p="http://schemas.openxmlformats.org/presentationml/2006/main" xmlns:r="http://schemas.openxmlformats.org/officeDocument/2006/relationships">
+  <p:cSld>
+    <p:bg>
+      <p:bgPr>
+        <a:blipFill dpi="0" rotWithShape="1">
+          <a:blip r:embed="rId2">
+            <a:lum/>
+          </a:blip>
+          <a:srcRect/>
+          <a:stretch>
+            <a:fillRect/>
+          </a:stretch>
+        </a:blipFill>
+        <a:effectLst/>
+      </p:bgPr>
+    </p:bg>
+    <p:spTree>
+      <p:nvGrpSpPr>
+        <p:cNvPr id="1" name=""/>
+        <p:cNvGrpSpPr/>
+        <p:nvPr/>
+      </p:nvGrpSpPr>
+      <p:grpSpPr/>
+      <p:sp>
+        <p:nvSpPr>
+          <p:cNvPr id="2" name="TextBox 1"/>
+          <p:cNvSpPr txBox="1"/>
+          <p:nvPr/>
+        </p:nvSpPr>
+        <p:spPr>
+          <a:xfrm>
+            <a:off x="841248" y="173736"/>
+            <a:ext cx="10515600" cy="365760"/>
+          </a:xfrm>
+          <a:prstGeom prst="rect">
+            <a:avLst/>
+          </a:prstGeom>
+          <a:noFill/>
+        </p:spPr>
+        <p:txBody>
+          <a:bodyPr wrap="square">
+            <a:spAutoFit/>
+          </a:bodyPr>
+          <a:lstStyle/>
+          <a:p>
+            <a:pPr>
+              <a:defRPr sz="1700" b="1">
+                <a:solidFill>
+                  <a:srgbClr val="FFFFFF"/>
+                </a:solidFill>
+                <a:latin typeface="Montserrat"/>
+              </a:defRPr>
+            </a:pPr>
+            <a:r>
+              <a:t>DISTRIBUCIÓN DE LAS 1,324 ASIGNACIONES EN MARCHA BLANCA</a:t>
+            </a:r>
+          </a:p>
+        </p:txBody>
+      </p:sp>
+      <p:sp>
+        <p:nvSpPr>
+          <p:cNvPr id="3" name="TextBox 2"/>
+          <p:cNvSpPr txBox="1"/>
+          <p:nvPr/>
+        </p:nvSpPr>
+        <p:spPr>
+          <a:xfrm>
+            <a:off x="841248" y="621792"/>
+            <a:ext cx="10515600" cy="594360"/>
+          </a:xfrm>
+          <a:prstGeom prst="rect">
+            <a:avLst/>
+          </a:prstGeom>
+          <a:noFill/>
+        </p:spPr>
+        <p:txBody>
+          <a:bodyPr wrap="square">
+            <a:spAutoFit/>
+          </a:bodyPr>
+          <a:lstStyle/>
+          <a:p>
+            <a:pPr>
+              <a:defRPr sz="1300">
+                <a:solidFill>
+                  <a:srgbClr val="0B2545"/>
+                </a:solidFill>
+                <a:latin typeface="Montserrat"/>
+              </a:defRPr>
+            </a:pPr>
+            <a:r>
+              <a:t>¿Dónde Cayeron las 1,324?: Frecuencia por Micro-Cluster y Diagnóstico Honesto de Sesgo Muestral</a:t>
+            </a:r>
+          </a:p>
+        </p:txBody>
+      </p:sp>
+      <p:pic>
+        <p:nvPicPr>
+          <p:cNvPr id="4" name="Picture 3" descr="fig_frecuencia_microclusters.png"/>
+          <p:cNvPicPr>
+            <a:picLocks noChangeAspect="1"/>
+          </p:cNvPicPr>
+          <p:nvPr/>
+        </p:nvPicPr>
+        <p:blipFill>
+          <a:blip r:embed="rId4"/>
+          <a:stretch>
+            <a:fillRect/>
+          </a:stretch>
+        </p:blipFill>
+        <p:spPr>
+          <a:xfrm>
+            <a:off x="731520" y="1280160"/>
+            <a:ext cx="10698480" cy="5029200"/>
+          </a:xfrm>
+          <a:prstGeom prst="rect">
+            <a:avLst/>
+          </a:prstGeom>
+        </p:spPr>
+      </p:pic>
+    </p:spTree>
+  </p:cSld>
+  <p:clrMapOvr>
+    <a:masterClrMapping/>
+  </p:clrMapOvr>
+</p:sld>
+</file>
+
+<file path=ppt/slides/slide15.xml><?xml version="1.0" encoding="utf-8"?>
+<p:sld xmlns:a="http://schemas.openxmlformats.org/drawingml/2006/main" xmlns:p="http://schemas.openxmlformats.org/presentationml/2006/main" xmlns:r="http://schemas.openxmlformats.org/officeDocument/2006/relationships">
+  <p:cSld>
+    <p:bg>
+      <p:bgPr>
+        <a:blipFill dpi="0" rotWithShape="1">
+          <a:blip r:embed="rId2">
+            <a:lum/>
+          </a:blip>
+          <a:srcRect/>
+          <a:stretch>
+            <a:fillRect/>
+          </a:stretch>
+        </a:blipFill>
+        <a:effectLst/>
+      </p:bgPr>
+    </p:bg>
+    <p:spTree>
+      <p:nvGrpSpPr>
+        <p:cNvPr id="1" name=""/>
+        <p:cNvGrpSpPr/>
+        <p:nvPr/>
+      </p:nvGrpSpPr>
+      <p:grpSpPr/>
+      <p:sp>
+        <p:nvSpPr>
+          <p:cNvPr id="2" name="TextBox 1"/>
+          <p:cNvSpPr txBox="1"/>
+          <p:nvPr/>
+        </p:nvSpPr>
+        <p:spPr>
+          <a:xfrm>
+            <a:off x="841248" y="173736"/>
+            <a:ext cx="10515600" cy="365760"/>
+          </a:xfrm>
+          <a:prstGeom prst="rect">
+            <a:avLst/>
+          </a:prstGeom>
+          <a:noFill/>
+        </p:spPr>
+        <p:txBody>
+          <a:bodyPr wrap="square">
+            <a:spAutoFit/>
+          </a:bodyPr>
+          <a:lstStyle/>
+          <a:p>
+            <a:pPr>
+              <a:defRPr sz="1700" b="1">
+                <a:solidFill>
+                  <a:srgbClr val="FFFFFF"/>
+                </a:solidFill>
+                <a:latin typeface="Montserrat"/>
+              </a:defRPr>
+            </a:pPr>
+            <a:r>
+              <a:t>ANEXO VERIFICABLE DE MARCHA BLANCA</a:t>
+            </a:r>
+          </a:p>
+        </p:txBody>
+      </p:sp>
+      <p:sp>
+        <p:nvSpPr>
+          <p:cNvPr id="3" name="TextBox 2"/>
+          <p:cNvSpPr txBox="1"/>
+          <p:nvPr/>
+        </p:nvSpPr>
+        <p:spPr>
+          <a:xfrm>
+            <a:off x="841248" y="621792"/>
+            <a:ext cx="10515600" cy="594360"/>
+          </a:xfrm>
+          <a:prstGeom prst="rect">
+            <a:avLst/>
+          </a:prstGeom>
+          <a:noFill/>
+        </p:spPr>
+        <p:txBody>
+          <a:bodyPr wrap="square">
+            <a:spAutoFit/>
+          </a:bodyPr>
+          <a:lstStyle/>
+          <a:p>
+            <a:pPr>
+              <a:defRPr sz="1300">
+                <a:solidFill>
+                  <a:srgbClr val="0B2545"/>
+                </a:solidFill>
+                <a:latin typeface="Montserrat"/>
+              </a:defRPr>
+            </a:pPr>
+            <a:r>
+              <a:t>Acceso Completo a las 1,324 Asignaciones: Excel Ejecutivo y Repositorio Versionado</a:t>
+            </a:r>
+          </a:p>
+        </p:txBody>
+      </p:sp>
+      <p:sp>
+        <p:nvSpPr>
+          <p:cNvPr id="4" name="Rounded Rectangle 3"/>
           <p:cNvSpPr/>
           <p:nvPr/>
         </p:nvSpPr>
         <p:spPr>
           <a:xfrm>
-            <a:off x="6217920" y="1371600"/>
+            <a:off x="731520" y="1371600"/>
             <a:ext cx="5212080" cy="4937760"/>
           </a:xfrm>
           <a:prstGeom prst="roundRect">
@@ -5774,14 +6120,59 @@
       </p:sp>
       <p:sp>
         <p:nvSpPr>
-          <p:cNvPr id="7" name="TextBox 6"/>
+          <p:cNvPr id="5" name="Rounded Rectangle 4"/>
+          <p:cNvSpPr/>
+          <p:nvPr/>
+        </p:nvSpPr>
+        <p:spPr>
+          <a:xfrm>
+            <a:off x="731520" y="1371600"/>
+            <a:ext cx="5212080" cy="640080"/>
+          </a:xfrm>
+          <a:prstGeom prst="roundRect">
+            <a:avLst/>
+          </a:prstGeom>
+          <a:solidFill>
+            <a:srgbClr val="009688"/>
+          </a:solidFill>
+          <a:ln>
+            <a:solidFill>
+              <a:srgbClr val="009688"/>
+            </a:solidFill>
+          </a:ln>
+        </p:spPr>
+        <p:style>
+          <a:lnRef idx="1">
+            <a:schemeClr val="accent1"/>
+          </a:lnRef>
+          <a:fillRef idx="3">
+            <a:schemeClr val="accent1"/>
+          </a:fillRef>
+          <a:effectRef idx="2">
+            <a:schemeClr val="accent1"/>
+          </a:effectRef>
+          <a:fontRef idx="minor">
+            <a:schemeClr val="lt1"/>
+          </a:fontRef>
+        </p:style>
+        <p:txBody>
+          <a:bodyPr rtlCol="0" anchor="ctr"/>
+          <a:lstStyle/>
+          <a:p>
+            <a:pPr algn="ctr"/>
+          </a:p>
+        </p:txBody>
+      </p:sp>
+      <p:sp>
+        <p:nvSpPr>
+          <p:cNvPr id="6" name="TextBox 5"/>
           <p:cNvSpPr txBox="1"/>
           <p:nvPr/>
         </p:nvSpPr>
         <p:spPr>
           <a:xfrm>
-            <a:off x="6400800" y="1554480"/>
-            <a:ext cx="4846320" cy="4572000"/>
+            <a:off x="822960" y="1417320"/>
+            <a:ext cx="5029200" cy="457200"/>
           </a:xfrm>
           <a:prstGeom prst="rect">
             <a:avLst/>
@@ -5789,6 +6180,42 @@
           <a:noFill/>
         </p:spPr>
         <p:txBody>
+          <a:bodyPr wrap="none">
+            <a:spAutoFit/>
+          </a:bodyPr>
+          <a:lstStyle/>
+          <a:p>
+            <a:pPr>
+              <a:defRPr sz="1050" b="1">
+                <a:solidFill>
+                  <a:srgbClr val="FFFFFF"/>
+                </a:solidFill>
+                <a:latin typeface="Montserrat"/>
+              </a:defRPr>
+            </a:pPr>
+            <a:r>
+              <a:t>LIBRO DE EXCEL EJECUTIVO (AUDITORÍA INMEDIATA)</a:t>
+            </a:r>
+          </a:p>
+        </p:txBody>
+      </p:sp>
+      <p:sp>
+        <p:nvSpPr>
+          <p:cNvPr id="7" name="TextBox 6"/>
+          <p:cNvSpPr txBox="1"/>
+          <p:nvPr/>
+        </p:nvSpPr>
+        <p:spPr>
+          <a:xfrm>
+            <a:off x="914400" y="2103120"/>
+            <a:ext cx="4846320" cy="4114800"/>
+          </a:xfrm>
+          <a:prstGeom prst="rect">
+            <a:avLst/>
+          </a:prstGeom>
+          <a:noFill/>
+        </p:spPr>
+        <p:txBody>
           <a:bodyPr wrap="square">
             <a:spAutoFit/>
           </a:bodyPr>
@@ -5796,9 +6223,9 @@
           <a:p>
             <a:pPr>
               <a:spcAft>
-                <a:spcPts val="1000"/>
+                <a:spcPts val="800"/>
               </a:spcAft>
-              <a:defRPr sz="1150" b="1">
+              <a:defRPr sz="1100" b="1">
                 <a:solidFill>
                   <a:srgbClr val="0B2545"/>
                 </a:solidFill>
@@ -5806,15 +6233,15 @@
               </a:defRPr>
             </a:pPr>
             <a:r>
-              <a:t>LOS 5 CRITERIOS DE ACEPTACIÓN PARA EL NUEVO BLOB</a:t>
+              <a:t>reports/anexo_asignaciones_marcha_blanca.xlsx</a:t>
             </a:r>
           </a:p>
           <a:p>
             <a:pPr>
               <a:spcAft>
-                <a:spcPts val="200"/>
+                <a:spcPts val="400"/>
               </a:spcAft>
-              <a:defRPr sz="1000" b="1">
+              <a:defRPr sz="950" b="1">
                 <a:solidFill>
                   <a:srgbClr val="134074"/>
                 </a:solidFill>
@@ -5822,31 +6249,47 @@
               </a:defRPr>
             </a:pPr>
             <a:r>
-              <a:t>• Check A (Duplicados en Crudo):</a:t>
+              <a:t>• Volumen Total: </a:t>
+            </a:r>
+            <a:r>
+              <a:rPr b="0">
+                <a:solidFill>
+                  <a:srgbClr val="212529"/>
+                </a:solidFill>
+              </a:rPr>
+              <a:t>1,324 filas de localidades limpias certificadas</a:t>
             </a:r>
           </a:p>
           <a:p>
             <a:pPr>
               <a:spcAft>
-                <a:spcPts val="600"/>
+                <a:spcPts val="400"/>
               </a:spcAft>
-              <a:defRPr sz="950">
+              <a:defRPr sz="950" b="1">
+                <a:solidFill>
+                  <a:srgbClr val="134074"/>
+                </a:solidFill>
+                <a:latin typeface="Montserrat"/>
+              </a:defRPr>
+            </a:pPr>
+            <a:r>
+              <a:t>• Hoja Única: </a:t>
+            </a:r>
+            <a:r>
+              <a:rPr b="0">
                 <a:solidFill>
                   <a:srgbClr val="212529"/>
                 </a:solidFill>
-                <a:latin typeface="Montserrat"/>
-              </a:defRPr>
-            </a:pPr>
-            <a:r>
-              <a:t>  Tasa de duplicidad estricta &lt; 1.0%.</a:t>
+              </a:rPr>
+              <a:t>'Asignaciones_Marcha_Blanca' con autofiltro nativo</a:t>
             </a:r>
           </a:p>
           <a:p>
             <a:pPr>
               <a:spcAft>
-                <a:spcPts val="200"/>
+                <a:spcPts val="400"/>
               </a:spcAft>
-              <a:defRPr sz="1000" b="1">
+              <a:defRPr sz="950" b="1">
                 <a:solidFill>
                   <a:srgbClr val="134074"/>
                 </a:solidFill>
@@ -5854,31 +6297,47 @@
               </a:defRPr>
             </a:pPr>
             <a:r>
-              <a:t>• Check B (Supervivencia de Filtro):</a:t>
+              <a:t>• Usabilidad: </a:t>
+            </a:r>
+            <a:r>
+              <a:rPr b="0">
+                <a:solidFill>
+                  <a:srgbClr val="212529"/>
+                </a:solidFill>
+              </a:rPr>
+              <a:t>Fila de encabezado congelada para navegación fluida</a:t>
             </a:r>
           </a:p>
           <a:p>
             <a:pPr>
               <a:spcAft>
-                <a:spcPts val="600"/>
+                <a:spcPts val="400"/>
               </a:spcAft>
-              <a:defRPr sz="950">
+              <a:defRPr sz="950" b="1">
+                <a:solidFill>
+                  <a:srgbClr val="134074"/>
+                </a:solidFill>
+                <a:latin typeface="Montserrat"/>
+              </a:defRPr>
+            </a:pPr>
+            <a:r>
+              <a:t>• Formato Porcentual: </a:t>
+            </a:r>
+            <a:r>
+              <a:rPr b="0">
                 <a:solidFill>
                   <a:srgbClr val="212529"/>
                 </a:solidFill>
-                <a:latin typeface="Montserrat"/>
-              </a:defRPr>
-            </a:pPr>
-            <a:r>
-              <a:t>  Tasa de retención consistente &gt; 90.0%.</a:t>
+              </a:rPr>
+              <a:t>score_confianza formateado como porcentaje (0.0%)</a:t>
             </a:r>
           </a:p>
           <a:p>
             <a:pPr>
               <a:spcAft>
-                <a:spcPts val="200"/>
+                <a:spcPts val="400"/>
               </a:spcAft>
-              <a:defRPr sz="1000" b="1">
+              <a:defRPr sz="950" b="1">
                 <a:solidFill>
                   <a:srgbClr val="134074"/>
                 </a:solidFill>
@@ -5886,31 +6345,212 @@
               </a:defRPr>
             </a:pPr>
             <a:r>
-              <a:t>• Check C (Coherencia de Aforos):</a:t>
+              <a:t>• Formato Moneda: </a:t>
+            </a:r>
+            <a:r>
+              <a:rPr b="0">
+                <a:solidFill>
+                  <a:srgbClr val="212529"/>
+                </a:solidFill>
+              </a:rPr>
+              <a:t>precio con separador de miles en pesos colombianos</a:t>
             </a:r>
           </a:p>
           <a:p>
             <a:pPr>
               <a:spcAft>
-                <a:spcPts val="600"/>
+                <a:spcPts val="400"/>
               </a:spcAft>
-              <a:defRPr sz="950">
+              <a:defRPr sz="950" b="1">
+                <a:solidFill>
+                  <a:srgbClr val="134074"/>
+                </a:solidFill>
+                <a:latin typeface="Montserrat"/>
+              </a:defRPr>
+            </a:pPr>
+            <a:r>
+              <a:t>• Columnas Clave: </a:t>
+            </a:r>
+            <a:r>
+              <a:rPr b="0">
                 <a:solidFill>
                   <a:srgbClr val="212529"/>
                 </a:solidFill>
-                <a:latin typeface="Montserrat"/>
-              </a:defRPr>
-            </a:pPr>
-            <a:r>
-              <a:t>  0 eventos con discrepancias físicas en la suma de cuotas.</a:t>
-            </a:r>
-          </a:p>
+              </a:rPr>
+              <a:t>localidad, recinto, precio, type_site, micro_cluster_id, label_auto, arquetipo_demanda, score_confianza, es_frontera</a:t>
+            </a:r>
+          </a:p>
+        </p:txBody>
+      </p:sp>
+      <p:sp>
+        <p:nvSpPr>
+          <p:cNvPr id="8" name="Rounded Rectangle 7"/>
+          <p:cNvSpPr/>
+          <p:nvPr/>
+        </p:nvSpPr>
+        <p:spPr>
+          <a:xfrm>
+            <a:off x="6217920" y="1371600"/>
+            <a:ext cx="5212080" cy="4937760"/>
+          </a:xfrm>
+          <a:prstGeom prst="roundRect">
+            <a:avLst/>
+          </a:prstGeom>
+          <a:solidFill>
+            <a:srgbClr val="FFFFFF"/>
+          </a:solidFill>
+          <a:ln>
+            <a:solidFill>
+              <a:srgbClr val="D7DCE4"/>
+            </a:solidFill>
+          </a:ln>
+        </p:spPr>
+        <p:style>
+          <a:lnRef idx="1">
+            <a:schemeClr val="accent1"/>
+          </a:lnRef>
+          <a:fillRef idx="3">
+            <a:schemeClr val="accent1"/>
+          </a:fillRef>
+          <a:effectRef idx="2">
+            <a:schemeClr val="accent1"/>
+          </a:effectRef>
+          <a:fontRef idx="minor">
+            <a:schemeClr val="lt1"/>
+          </a:fontRef>
+        </p:style>
+        <p:txBody>
+          <a:bodyPr rtlCol="0" anchor="ctr"/>
+          <a:lstStyle/>
+          <a:p>
+            <a:pPr algn="ctr"/>
+          </a:p>
+        </p:txBody>
+      </p:sp>
+      <p:sp>
+        <p:nvSpPr>
+          <p:cNvPr id="9" name="Rounded Rectangle 8"/>
+          <p:cNvSpPr/>
+          <p:nvPr/>
+        </p:nvSpPr>
+        <p:spPr>
+          <a:xfrm>
+            <a:off x="6217920" y="1371600"/>
+            <a:ext cx="5212080" cy="640080"/>
+          </a:xfrm>
+          <a:prstGeom prst="roundRect">
+            <a:avLst/>
+          </a:prstGeom>
+          <a:solidFill>
+            <a:srgbClr val="134074"/>
+          </a:solidFill>
+          <a:ln>
+            <a:solidFill>
+              <a:srgbClr val="134074"/>
+            </a:solidFill>
+          </a:ln>
+        </p:spPr>
+        <p:style>
+          <a:lnRef idx="1">
+            <a:schemeClr val="accent1"/>
+          </a:lnRef>
+          <a:fillRef idx="3">
+            <a:schemeClr val="accent1"/>
+          </a:fillRef>
+          <a:effectRef idx="2">
+            <a:schemeClr val="accent1"/>
+          </a:effectRef>
+          <a:fontRef idx="minor">
+            <a:schemeClr val="lt1"/>
+          </a:fontRef>
+        </p:style>
+        <p:txBody>
+          <a:bodyPr rtlCol="0" anchor="ctr"/>
+          <a:lstStyle/>
+          <a:p>
+            <a:pPr algn="ctr"/>
+          </a:p>
+        </p:txBody>
+      </p:sp>
+      <p:sp>
+        <p:nvSpPr>
+          <p:cNvPr id="10" name="TextBox 9"/>
+          <p:cNvSpPr txBox="1"/>
+          <p:nvPr/>
+        </p:nvSpPr>
+        <p:spPr>
+          <a:xfrm>
+            <a:off x="6309360" y="1417320"/>
+            <a:ext cx="5029200" cy="457200"/>
+          </a:xfrm>
+          <a:prstGeom prst="rect">
+            <a:avLst/>
+          </a:prstGeom>
+          <a:noFill/>
+        </p:spPr>
+        <p:txBody>
+          <a:bodyPr wrap="none">
+            <a:spAutoFit/>
+          </a:bodyPr>
+          <a:lstStyle/>
+          <a:p>
+            <a:pPr>
+              <a:defRPr sz="1050" b="1">
+                <a:solidFill>
+                  <a:srgbClr val="FFFFFF"/>
+                </a:solidFill>
+                <a:latin typeface="Montserrat"/>
+              </a:defRPr>
+            </a:pPr>
+            <a:r>
+              <a:t>ARTEFACTOS DE CÓDIGO Y DATOS EN REPOSITORIO</a:t>
+            </a:r>
+          </a:p>
+        </p:txBody>
+      </p:sp>
+      <p:sp>
+        <p:nvSpPr>
+          <p:cNvPr id="11" name="TextBox 10"/>
+          <p:cNvSpPr txBox="1"/>
+          <p:nvPr/>
+        </p:nvSpPr>
+        <p:spPr>
+          <a:xfrm>
+            <a:off x="6400800" y="2103120"/>
+            <a:ext cx="4846320" cy="4114800"/>
+          </a:xfrm>
+          <a:prstGeom prst="rect">
+            <a:avLst/>
+          </a:prstGeom>
+          <a:noFill/>
+        </p:spPr>
+        <p:txBody>
+          <a:bodyPr wrap="square">
+            <a:spAutoFit/>
+          </a:bodyPr>
+          <a:lstStyle/>
           <a:p>
             <a:pPr>
               <a:spcAft>
-                <a:spcPts val="200"/>
+                <a:spcPts val="800"/>
               </a:spcAft>
-              <a:defRPr sz="1000" b="1">
+              <a:defRPr sz="1100" b="1">
+                <a:solidFill>
+                  <a:srgbClr val="0B2545"/>
+                </a:solidFill>
+                <a:latin typeface="Montserrat"/>
+              </a:defRPr>
+            </a:pPr>
+            <a:r>
+              <a:t>c:/dev/clusterizacion-localidades/ (Git Versionado)</a:t>
+            </a:r>
+          </a:p>
+          <a:p>
+            <a:pPr>
+              <a:spcAft>
+                <a:spcPts val="400"/>
+              </a:spcAft>
+              <a:defRPr sz="950" b="1">
                 <a:solidFill>
                   <a:srgbClr val="134074"/>
                 </a:solidFill>
@@ -5918,31 +6558,47 @@
               </a:defRPr>
             </a:pPr>
             <a:r>
-              <a:t>• Check D (Volumetría):</a:t>
+              <a:t>• CSV Completo: </a:t>
+            </a:r>
+            <a:r>
+              <a:rPr b="0">
+                <a:solidFill>
+                  <a:srgbClr val="212529"/>
+                </a:solidFill>
+              </a:rPr>
+              <a:t>data/processed/asignacion_microclusters.csv (1,324 filas)</a:t>
             </a:r>
           </a:p>
           <a:p>
             <a:pPr>
               <a:spcAft>
-                <a:spcPts val="600"/>
+                <a:spcPts val="400"/>
               </a:spcAft>
-              <a:defRPr sz="950">
+              <a:defRPr sz="950" b="1">
+                <a:solidFill>
+                  <a:srgbClr val="134074"/>
+                </a:solidFill>
+                <a:latin typeface="Montserrat"/>
+              </a:defRPr>
+            </a:pPr>
+            <a:r>
+              <a:t>• CSV Galería: </a:t>
+            </a:r>
+            <a:r>
+              <a:rPr b="0">
                 <a:solidFill>
                   <a:srgbClr val="212529"/>
                 </a:solidFill>
-                <a:latin typeface="Montserrat"/>
-              </a:defRPr>
-            </a:pPr>
-            <a:r>
-              <a:t>  Tamaño comparable al histórico (|Delta| &lt; 20% vs 33,775).</a:t>
+              </a:rPr>
+              <a:t>reports/ejemplos_galeria_extendida.csv (25 filas estratificadas)</a:t>
             </a:r>
           </a:p>
           <a:p>
             <a:pPr>
               <a:spcAft>
-                <a:spcPts val="200"/>
+                <a:spcPts val="400"/>
               </a:spcAft>
-              <a:defRPr sz="1000" b="1">
+              <a:defRPr sz="950" b="1">
                 <a:solidFill>
                   <a:srgbClr val="134074"/>
                 </a:solidFill>
@@ -5950,23 +6606,87 @@
               </a:defRPr>
             </a:pPr>
             <a:r>
-              <a:t>• Check E (Patrones no Comerciales):</a:t>
+              <a:t>• Eventos Seleccionados: </a:t>
+            </a:r>
+            <a:r>
+              <a:rPr b="0">
+                <a:solidFill>
+                  <a:srgbClr val="212529"/>
+                </a:solidFill>
+              </a:rPr>
+              <a:t>reports/eventos_seleccionados.csv (5 quintiles certificados)</a:t>
             </a:r>
           </a:p>
           <a:p>
             <a:pPr>
               <a:spcAft>
-                <a:spcPts val="600"/>
+                <a:spcPts val="400"/>
               </a:spcAft>
-              <a:defRPr sz="950">
+              <a:defRPr sz="950" b="1">
+                <a:solidFill>
+                  <a:srgbClr val="134074"/>
+                </a:solidFill>
+                <a:latin typeface="Montserrat"/>
+              </a:defRPr>
+            </a:pPr>
+            <a:r>
+              <a:t>• Catálogo v3.0: </a:t>
+            </a:r>
+            <a:r>
+              <a:rPr b="0">
                 <a:solidFill>
                   <a:srgbClr val="212529"/>
                 </a:solidFill>
-                <a:latin typeface="Montserrat"/>
-              </a:defRPr>
-            </a:pPr>
-            <a:r>
-              <a:t>  0 filas con TEST, CANCELAD, PARQUEA o sobreventas.</a:t>
+              </a:rPr>
+              <a:t>data/processed/cluster_catalog_v3.csv (18 micro-clusters)</a:t>
+            </a:r>
+          </a:p>
+          <a:p>
+            <a:pPr>
+              <a:spcAft>
+                <a:spcPts val="400"/>
+              </a:spcAft>
+              <a:defRPr sz="950" b="1">
+                <a:solidFill>
+                  <a:srgbClr val="134074"/>
+                </a:solidFill>
+                <a:latin typeface="Montserrat"/>
+              </a:defRPr>
+            </a:pPr>
+            <a:r>
+              <a:t>• Auditoría Data Eng: </a:t>
+            </a:r>
+            <a:r>
+              <a:rPr b="0">
+                <a:solidFill>
+                  <a:srgbClr val="212529"/>
+                </a:solidFill>
+              </a:rPr>
+              <a:t>reports/hallazgos_blob_test_gold_20261007.md</a:t>
+            </a:r>
+          </a:p>
+          <a:p>
+            <a:pPr>
+              <a:spcAft>
+                <a:spcPts val="400"/>
+              </a:spcAft>
+              <a:defRPr sz="950" b="1">
+                <a:solidFill>
+                  <a:srgbClr val="134074"/>
+                </a:solidFill>
+                <a:latin typeface="Montserrat"/>
+              </a:defRPr>
+            </a:pPr>
+            <a:r>
+              <a:t>• Reproducibilidad: </a:t>
+            </a:r>
+            <a:r>
+              <a:rPr b="0">
+                <a:solidFill>
+                  <a:srgbClr val="212529"/>
+                </a:solidFill>
+              </a:rPr>
+              <a:t>Pipeline determinístico; scripts de generación automatizados</a:t>
             </a:r>
           </a:p>
         </p:txBody>
@@ -5979,7 +6699,1271 @@
 </p:sld>
 </file>
 
-<file path=ppt/slides/slide12.xml><?xml version="1.0" encoding="utf-8"?>
+<file path=ppt/slides/slide16.xml><?xml version="1.0" encoding="utf-8"?>
+<p:sld xmlns:a="http://schemas.openxmlformats.org/drawingml/2006/main" xmlns:p="http://schemas.openxmlformats.org/presentationml/2006/main" xmlns:r="http://schemas.openxmlformats.org/officeDocument/2006/relationships">
+  <p:cSld>
+    <p:bg>
+      <p:bgPr>
+        <a:blipFill dpi="0" rotWithShape="1">
+          <a:blip r:embed="rId2">
+            <a:lum/>
+          </a:blip>
+          <a:srcRect/>
+          <a:stretch>
+            <a:fillRect/>
+          </a:stretch>
+        </a:blipFill>
+        <a:effectLst/>
+      </p:bgPr>
+    </p:bg>
+    <p:spTree>
+      <p:nvGrpSpPr>
+        <p:cNvPr id="1" name=""/>
+        <p:cNvGrpSpPr/>
+        <p:nvPr/>
+      </p:nvGrpSpPr>
+      <p:grpSpPr/>
+      <p:sp>
+        <p:nvSpPr>
+          <p:cNvPr id="2" name="TextBox 1"/>
+          <p:cNvSpPr txBox="1"/>
+          <p:nvPr/>
+        </p:nvSpPr>
+        <p:spPr>
+          <a:xfrm>
+            <a:off x="841248" y="173736"/>
+            <a:ext cx="10515600" cy="365760"/>
+          </a:xfrm>
+          <a:prstGeom prst="rect">
+            <a:avLst/>
+          </a:prstGeom>
+          <a:noFill/>
+        </p:spPr>
+        <p:txBody>
+          <a:bodyPr wrap="square">
+            <a:spAutoFit/>
+          </a:bodyPr>
+          <a:lstStyle/>
+          <a:p>
+            <a:pPr>
+              <a:defRPr sz="1700" b="1">
+                <a:solidFill>
+                  <a:srgbClr val="FFFFFF"/>
+                </a:solidFill>
+                <a:latin typeface="Montserrat"/>
+              </a:defRPr>
+            </a:pPr>
+            <a:r>
+              <a:t>MÉTRICAS DE CALIDAD Y CONFIABILIDAD</a:t>
+            </a:r>
+          </a:p>
+        </p:txBody>
+      </p:sp>
+      <p:sp>
+        <p:nvSpPr>
+          <p:cNvPr id="3" name="TextBox 2"/>
+          <p:cNvSpPr txBox="1"/>
+          <p:nvPr/>
+        </p:nvSpPr>
+        <p:spPr>
+          <a:xfrm>
+            <a:off x="841248" y="621792"/>
+            <a:ext cx="10515600" cy="594360"/>
+          </a:xfrm>
+          <a:prstGeom prst="rect">
+            <a:avLst/>
+          </a:prstGeom>
+          <a:noFill/>
+        </p:spPr>
+        <p:txBody>
+          <a:bodyPr wrap="square">
+            <a:spAutoFit/>
+          </a:bodyPr>
+          <a:lstStyle/>
+          <a:p>
+            <a:pPr>
+              <a:defRPr sz="1300">
+                <a:solidFill>
+                  <a:srgbClr val="0B2545"/>
+                </a:solidFill>
+                <a:latin typeface="Montserrat"/>
+              </a:defRPr>
+            </a:pPr>
+            <a:r>
+              <a:t>Evaluación Cuantitativa de la Marcha Blanca y Estabilidad Estadística Documentada</a:t>
+            </a:r>
+          </a:p>
+        </p:txBody>
+      </p:sp>
+      <p:sp>
+        <p:nvSpPr>
+          <p:cNvPr id="4" name="Rounded Rectangle 3"/>
+          <p:cNvSpPr/>
+          <p:nvPr/>
+        </p:nvSpPr>
+        <p:spPr>
+          <a:xfrm>
+            <a:off x="731520" y="1371600"/>
+            <a:ext cx="5212080" cy="2286000"/>
+          </a:xfrm>
+          <a:prstGeom prst="roundRect">
+            <a:avLst/>
+          </a:prstGeom>
+          <a:solidFill>
+            <a:srgbClr val="FFFFFF"/>
+          </a:solidFill>
+          <a:ln>
+            <a:solidFill>
+              <a:srgbClr val="D7DCE4"/>
+            </a:solidFill>
+          </a:ln>
+        </p:spPr>
+        <p:style>
+          <a:lnRef idx="1">
+            <a:schemeClr val="accent1"/>
+          </a:lnRef>
+          <a:fillRef idx="3">
+            <a:schemeClr val="accent1"/>
+          </a:fillRef>
+          <a:effectRef idx="2">
+            <a:schemeClr val="accent1"/>
+          </a:effectRef>
+          <a:fontRef idx="minor">
+            <a:schemeClr val="lt1"/>
+          </a:fontRef>
+        </p:style>
+        <p:txBody>
+          <a:bodyPr rtlCol="0" anchor="ctr"/>
+          <a:lstStyle/>
+          <a:p>
+            <a:pPr algn="ctr"/>
+          </a:p>
+        </p:txBody>
+      </p:sp>
+      <p:sp>
+        <p:nvSpPr>
+          <p:cNvPr id="5" name="Rounded Rectangle 4"/>
+          <p:cNvSpPr/>
+          <p:nvPr/>
+        </p:nvSpPr>
+        <p:spPr>
+          <a:xfrm>
+            <a:off x="731520" y="1371600"/>
+            <a:ext cx="182880" cy="2286000"/>
+          </a:xfrm>
+          <a:prstGeom prst="roundRect">
+            <a:avLst/>
+          </a:prstGeom>
+          <a:solidFill>
+            <a:srgbClr val="009688"/>
+          </a:solidFill>
+          <a:ln>
+            <a:solidFill>
+              <a:srgbClr val="009688"/>
+            </a:solidFill>
+          </a:ln>
+        </p:spPr>
+        <p:style>
+          <a:lnRef idx="1">
+            <a:schemeClr val="accent1"/>
+          </a:lnRef>
+          <a:fillRef idx="3">
+            <a:schemeClr val="accent1"/>
+          </a:fillRef>
+          <a:effectRef idx="2">
+            <a:schemeClr val="accent1"/>
+          </a:effectRef>
+          <a:fontRef idx="minor">
+            <a:schemeClr val="lt1"/>
+          </a:fontRef>
+        </p:style>
+        <p:txBody>
+          <a:bodyPr rtlCol="0" anchor="ctr"/>
+          <a:lstStyle/>
+          <a:p>
+            <a:pPr algn="ctr"/>
+          </a:p>
+        </p:txBody>
+      </p:sp>
+      <p:sp>
+        <p:nvSpPr>
+          <p:cNvPr id="6" name="TextBox 5"/>
+          <p:cNvSpPr txBox="1"/>
+          <p:nvPr/>
+        </p:nvSpPr>
+        <p:spPr>
+          <a:xfrm>
+            <a:off x="1097280" y="1554480"/>
+            <a:ext cx="4663440" cy="1920240"/>
+          </a:xfrm>
+          <a:prstGeom prst="rect">
+            <a:avLst/>
+          </a:prstGeom>
+          <a:noFill/>
+        </p:spPr>
+        <p:txBody>
+          <a:bodyPr wrap="square">
+            <a:spAutoFit/>
+          </a:bodyPr>
+          <a:lstStyle/>
+          <a:p>
+            <a:pPr>
+              <a:spcAft>
+                <a:spcPts val="200"/>
+              </a:spcAft>
+              <a:defRPr sz="2400" b="1">
+                <a:solidFill>
+                  <a:srgbClr val="009688"/>
+                </a:solidFill>
+                <a:latin typeface="Montserrat"/>
+              </a:defRPr>
+            </a:pPr>
+            <a:r>
+              <a:t>0.6314 (63.14%)</a:t>
+            </a:r>
+          </a:p>
+          <a:p>
+            <a:pPr>
+              <a:spcAft>
+                <a:spcPts val="600"/>
+              </a:spcAft>
+              <a:defRPr sz="1100" b="1">
+                <a:solidFill>
+                  <a:srgbClr val="0B2545"/>
+                </a:solidFill>
+                <a:latin typeface="Montserrat"/>
+              </a:defRPr>
+            </a:pPr>
+            <a:r>
+              <a:t>SCORE DE CONFIANZA GEOMÉTRICO MEDIO</a:t>
+            </a:r>
+          </a:p>
+          <a:p>
+            <a:pPr>
+              <a:defRPr sz="1000">
+                <a:solidFill>
+                  <a:srgbClr val="212529"/>
+                </a:solidFill>
+                <a:latin typeface="Montserrat"/>
+              </a:defRPr>
+            </a:pPr>
+            <a:r>
+              <a:t>Supera ampliamente el umbral operacional mínimo de 0.50. Alta certidumbre en asignación de centroides.</a:t>
+            </a:r>
+          </a:p>
+        </p:txBody>
+      </p:sp>
+      <p:sp>
+        <p:nvSpPr>
+          <p:cNvPr id="7" name="Rounded Rectangle 6"/>
+          <p:cNvSpPr/>
+          <p:nvPr/>
+        </p:nvSpPr>
+        <p:spPr>
+          <a:xfrm>
+            <a:off x="6217920" y="1371600"/>
+            <a:ext cx="5212080" cy="2286000"/>
+          </a:xfrm>
+          <a:prstGeom prst="roundRect">
+            <a:avLst/>
+          </a:prstGeom>
+          <a:solidFill>
+            <a:srgbClr val="FFFFFF"/>
+          </a:solidFill>
+          <a:ln>
+            <a:solidFill>
+              <a:srgbClr val="D7DCE4"/>
+            </a:solidFill>
+          </a:ln>
+        </p:spPr>
+        <p:style>
+          <a:lnRef idx="1">
+            <a:schemeClr val="accent1"/>
+          </a:lnRef>
+          <a:fillRef idx="3">
+            <a:schemeClr val="accent1"/>
+          </a:fillRef>
+          <a:effectRef idx="2">
+            <a:schemeClr val="accent1"/>
+          </a:effectRef>
+          <a:fontRef idx="minor">
+            <a:schemeClr val="lt1"/>
+          </a:fontRef>
+        </p:style>
+        <p:txBody>
+          <a:bodyPr rtlCol="0" anchor="ctr"/>
+          <a:lstStyle/>
+          <a:p>
+            <a:pPr algn="ctr"/>
+          </a:p>
+        </p:txBody>
+      </p:sp>
+      <p:sp>
+        <p:nvSpPr>
+          <p:cNvPr id="8" name="Rounded Rectangle 7"/>
+          <p:cNvSpPr/>
+          <p:nvPr/>
+        </p:nvSpPr>
+        <p:spPr>
+          <a:xfrm>
+            <a:off x="6217920" y="1371600"/>
+            <a:ext cx="182880" cy="2286000"/>
+          </a:xfrm>
+          <a:prstGeom prst="roundRect">
+            <a:avLst/>
+          </a:prstGeom>
+          <a:solidFill>
+            <a:srgbClr val="134074"/>
+          </a:solidFill>
+          <a:ln>
+            <a:solidFill>
+              <a:srgbClr val="134074"/>
+            </a:solidFill>
+          </a:ln>
+        </p:spPr>
+        <p:style>
+          <a:lnRef idx="1">
+            <a:schemeClr val="accent1"/>
+          </a:lnRef>
+          <a:fillRef idx="3">
+            <a:schemeClr val="accent1"/>
+          </a:fillRef>
+          <a:effectRef idx="2">
+            <a:schemeClr val="accent1"/>
+          </a:effectRef>
+          <a:fontRef idx="minor">
+            <a:schemeClr val="lt1"/>
+          </a:fontRef>
+        </p:style>
+        <p:txBody>
+          <a:bodyPr rtlCol="0" anchor="ctr"/>
+          <a:lstStyle/>
+          <a:p>
+            <a:pPr algn="ctr"/>
+          </a:p>
+        </p:txBody>
+      </p:sp>
+      <p:sp>
+        <p:nvSpPr>
+          <p:cNvPr id="9" name="TextBox 8"/>
+          <p:cNvSpPr txBox="1"/>
+          <p:nvPr/>
+        </p:nvSpPr>
+        <p:spPr>
+          <a:xfrm>
+            <a:off x="6583680" y="1554480"/>
+            <a:ext cx="4663440" cy="1920240"/>
+          </a:xfrm>
+          <a:prstGeom prst="rect">
+            <a:avLst/>
+          </a:prstGeom>
+          <a:noFill/>
+        </p:spPr>
+        <p:txBody>
+          <a:bodyPr wrap="square">
+            <a:spAutoFit/>
+          </a:bodyPr>
+          <a:lstStyle/>
+          <a:p>
+            <a:pPr>
+              <a:spcAft>
+                <a:spcPts val="200"/>
+              </a:spcAft>
+              <a:defRPr sz="2400" b="1">
+                <a:solidFill>
+                  <a:srgbClr val="134074"/>
+                </a:solidFill>
+                <a:latin typeface="Montserrat"/>
+              </a:defRPr>
+            </a:pPr>
+            <a:r>
+              <a:t>14.27%</a:t>
+            </a:r>
+          </a:p>
+          <a:p>
+            <a:pPr>
+              <a:spcAft>
+                <a:spcPts val="600"/>
+              </a:spcAft>
+              <a:defRPr sz="1100" b="1">
+                <a:solidFill>
+                  <a:srgbClr val="0B2545"/>
+                </a:solidFill>
+                <a:latin typeface="Montserrat"/>
+              </a:defRPr>
+            </a:pPr>
+            <a:r>
+              <a:t>TASA DE LOCALIDADES EN FRONTERA</a:t>
+            </a:r>
+          </a:p>
+          <a:p>
+            <a:pPr>
+              <a:defRPr sz="1000">
+                <a:solidFill>
+                  <a:srgbClr val="212529"/>
+                </a:solidFill>
+                <a:latin typeface="Montserrat"/>
+              </a:defRPr>
+            </a:pPr>
+            <a:r>
+              <a:t>Dentro del margen seguro previsto (&lt; 20.0%). El 85.73% restante de las localidades se ubica con certidumbre nítida.</a:t>
+            </a:r>
+          </a:p>
+        </p:txBody>
+      </p:sp>
+      <p:sp>
+        <p:nvSpPr>
+          <p:cNvPr id="10" name="Rounded Rectangle 9"/>
+          <p:cNvSpPr/>
+          <p:nvPr/>
+        </p:nvSpPr>
+        <p:spPr>
+          <a:xfrm>
+            <a:off x="731520" y="3840480"/>
+            <a:ext cx="5212080" cy="2286000"/>
+          </a:xfrm>
+          <a:prstGeom prst="roundRect">
+            <a:avLst/>
+          </a:prstGeom>
+          <a:solidFill>
+            <a:srgbClr val="FFFFFF"/>
+          </a:solidFill>
+          <a:ln>
+            <a:solidFill>
+              <a:srgbClr val="D7DCE4"/>
+            </a:solidFill>
+          </a:ln>
+        </p:spPr>
+        <p:style>
+          <a:lnRef idx="1">
+            <a:schemeClr val="accent1"/>
+          </a:lnRef>
+          <a:fillRef idx="3">
+            <a:schemeClr val="accent1"/>
+          </a:fillRef>
+          <a:effectRef idx="2">
+            <a:schemeClr val="accent1"/>
+          </a:effectRef>
+          <a:fontRef idx="minor">
+            <a:schemeClr val="lt1"/>
+          </a:fontRef>
+        </p:style>
+        <p:txBody>
+          <a:bodyPr rtlCol="0" anchor="ctr"/>
+          <a:lstStyle/>
+          <a:p>
+            <a:pPr algn="ctr"/>
+          </a:p>
+        </p:txBody>
+      </p:sp>
+      <p:sp>
+        <p:nvSpPr>
+          <p:cNvPr id="11" name="Rounded Rectangle 10"/>
+          <p:cNvSpPr/>
+          <p:nvPr/>
+        </p:nvSpPr>
+        <p:spPr>
+          <a:xfrm>
+            <a:off x="731520" y="3840480"/>
+            <a:ext cx="182880" cy="2286000"/>
+          </a:xfrm>
+          <a:prstGeom prst="roundRect">
+            <a:avLst/>
+          </a:prstGeom>
+          <a:solidFill>
+            <a:srgbClr val="0B2545"/>
+          </a:solidFill>
+          <a:ln>
+            <a:solidFill>
+              <a:srgbClr val="0B2545"/>
+            </a:solidFill>
+          </a:ln>
+        </p:spPr>
+        <p:style>
+          <a:lnRef idx="1">
+            <a:schemeClr val="accent1"/>
+          </a:lnRef>
+          <a:fillRef idx="3">
+            <a:schemeClr val="accent1"/>
+          </a:fillRef>
+          <a:effectRef idx="2">
+            <a:schemeClr val="accent1"/>
+          </a:effectRef>
+          <a:fontRef idx="minor">
+            <a:schemeClr val="lt1"/>
+          </a:fontRef>
+        </p:style>
+        <p:txBody>
+          <a:bodyPr rtlCol="0" anchor="ctr"/>
+          <a:lstStyle/>
+          <a:p>
+            <a:pPr algn="ctr"/>
+          </a:p>
+        </p:txBody>
+      </p:sp>
+      <p:sp>
+        <p:nvSpPr>
+          <p:cNvPr id="12" name="TextBox 11"/>
+          <p:cNvSpPr txBox="1"/>
+          <p:nvPr/>
+        </p:nvSpPr>
+        <p:spPr>
+          <a:xfrm>
+            <a:off x="1097280" y="4023360"/>
+            <a:ext cx="4663440" cy="1920240"/>
+          </a:xfrm>
+          <a:prstGeom prst="rect">
+            <a:avLst/>
+          </a:prstGeom>
+          <a:noFill/>
+        </p:spPr>
+        <p:txBody>
+          <a:bodyPr wrap="square">
+            <a:spAutoFit/>
+          </a:bodyPr>
+          <a:lstStyle/>
+          <a:p>
+            <a:pPr>
+              <a:spcAft>
+                <a:spcPts val="200"/>
+              </a:spcAft>
+              <a:defRPr sz="2400" b="1">
+                <a:solidFill>
+                  <a:srgbClr val="0B2545"/>
+                </a:solidFill>
+                <a:latin typeface="Montserrat"/>
+              </a:defRPr>
+            </a:pPr>
+            <a:r>
+              <a:t>0.00%</a:t>
+            </a:r>
+          </a:p>
+          <a:p>
+            <a:pPr>
+              <a:spcAft>
+                <a:spcPts val="600"/>
+              </a:spcAft>
+              <a:defRPr sz="1100" b="1">
+                <a:solidFill>
+                  <a:srgbClr val="0B2545"/>
+                </a:solidFill>
+                <a:latin typeface="Montserrat"/>
+              </a:defRPr>
+            </a:pPr>
+            <a:r>
+              <a:t>TASA DE TEXTO VACÍO POST-FILTRO</a:t>
+            </a:r>
+          </a:p>
+          <a:p>
+            <a:pPr>
+              <a:defRPr sz="1000">
+                <a:solidFill>
+                  <a:srgbClr val="212529"/>
+                </a:solidFill>
+                <a:latin typeface="Montserrat"/>
+              </a:defRPr>
+            </a:pPr>
+            <a:r>
+              <a:t>100% de cobertura de nombres semánticos. Cero localidades en blanco procesadas por el modelo.</a:t>
+            </a:r>
+          </a:p>
+        </p:txBody>
+      </p:sp>
+      <p:sp>
+        <p:nvSpPr>
+          <p:cNvPr id="13" name="Rounded Rectangle 12"/>
+          <p:cNvSpPr/>
+          <p:nvPr/>
+        </p:nvSpPr>
+        <p:spPr>
+          <a:xfrm>
+            <a:off x="6217920" y="3840480"/>
+            <a:ext cx="5212080" cy="2286000"/>
+          </a:xfrm>
+          <a:prstGeom prst="roundRect">
+            <a:avLst/>
+          </a:prstGeom>
+          <a:solidFill>
+            <a:srgbClr val="FFFFFF"/>
+          </a:solidFill>
+          <a:ln>
+            <a:solidFill>
+              <a:srgbClr val="D7DCE4"/>
+            </a:solidFill>
+          </a:ln>
+        </p:spPr>
+        <p:style>
+          <a:lnRef idx="1">
+            <a:schemeClr val="accent1"/>
+          </a:lnRef>
+          <a:fillRef idx="3">
+            <a:schemeClr val="accent1"/>
+          </a:fillRef>
+          <a:effectRef idx="2">
+            <a:schemeClr val="accent1"/>
+          </a:effectRef>
+          <a:fontRef idx="minor">
+            <a:schemeClr val="lt1"/>
+          </a:fontRef>
+        </p:style>
+        <p:txBody>
+          <a:bodyPr rtlCol="0" anchor="ctr"/>
+          <a:lstStyle/>
+          <a:p>
+            <a:pPr algn="ctr"/>
+          </a:p>
+        </p:txBody>
+      </p:sp>
+      <p:sp>
+        <p:nvSpPr>
+          <p:cNvPr id="14" name="Rounded Rectangle 13"/>
+          <p:cNvSpPr/>
+          <p:nvPr/>
+        </p:nvSpPr>
+        <p:spPr>
+          <a:xfrm>
+            <a:off x="6217920" y="3840480"/>
+            <a:ext cx="182880" cy="2286000"/>
+          </a:xfrm>
+          <a:prstGeom prst="roundRect">
+            <a:avLst/>
+          </a:prstGeom>
+          <a:solidFill>
+            <a:srgbClr val="E76F51"/>
+          </a:solidFill>
+          <a:ln>
+            <a:solidFill>
+              <a:srgbClr val="E76F51"/>
+            </a:solidFill>
+          </a:ln>
+        </p:spPr>
+        <p:style>
+          <a:lnRef idx="1">
+            <a:schemeClr val="accent1"/>
+          </a:lnRef>
+          <a:fillRef idx="3">
+            <a:schemeClr val="accent1"/>
+          </a:fillRef>
+          <a:effectRef idx="2">
+            <a:schemeClr val="accent1"/>
+          </a:effectRef>
+          <a:fontRef idx="minor">
+            <a:schemeClr val="lt1"/>
+          </a:fontRef>
+        </p:style>
+        <p:txBody>
+          <a:bodyPr rtlCol="0" anchor="ctr"/>
+          <a:lstStyle/>
+          <a:p>
+            <a:pPr algn="ctr"/>
+          </a:p>
+        </p:txBody>
+      </p:sp>
+      <p:sp>
+        <p:nvSpPr>
+          <p:cNvPr id="15" name="TextBox 14"/>
+          <p:cNvSpPr txBox="1"/>
+          <p:nvPr/>
+        </p:nvSpPr>
+        <p:spPr>
+          <a:xfrm>
+            <a:off x="6583680" y="4023360"/>
+            <a:ext cx="4663440" cy="1920240"/>
+          </a:xfrm>
+          <a:prstGeom prst="rect">
+            <a:avLst/>
+          </a:prstGeom>
+          <a:noFill/>
+        </p:spPr>
+        <p:txBody>
+          <a:bodyPr wrap="square">
+            <a:spAutoFit/>
+          </a:bodyPr>
+          <a:lstStyle/>
+          <a:p>
+            <a:pPr>
+              <a:spcAft>
+                <a:spcPts val="200"/>
+              </a:spcAft>
+              <a:defRPr sz="2400" b="1">
+                <a:solidFill>
+                  <a:srgbClr val="E76F51"/>
+                </a:solidFill>
+                <a:latin typeface="Montserrat"/>
+              </a:defRPr>
+            </a:pPr>
+            <a:r>
+              <a:t>&gt; 0.88</a:t>
+            </a:r>
+          </a:p>
+          <a:p>
+            <a:pPr>
+              <a:spcAft>
+                <a:spcPts val="600"/>
+              </a:spcAft>
+              <a:defRPr sz="1100" b="1">
+                <a:solidFill>
+                  <a:srgbClr val="0B2545"/>
+                </a:solidFill>
+                <a:latin typeface="Montserrat"/>
+              </a:defRPr>
+            </a:pPr>
+            <a:r>
+              <a:t>ESTABILIDAD BOOTSTRAP-ARI PROMEDIO</a:t>
+            </a:r>
+          </a:p>
+          <a:p>
+            <a:pPr>
+              <a:defRPr sz="1000">
+                <a:solidFill>
+                  <a:srgbClr val="212529"/>
+                </a:solidFill>
+                <a:latin typeface="Montserrat"/>
+              </a:defRPr>
+            </a:pPr>
+            <a:r>
+              <a:t>Compuerta de reproducibilidad superada en réplicas al 80% (Popular: 0.985, Platea: 0.979, VIP: 0.934).</a:t>
+            </a:r>
+          </a:p>
+        </p:txBody>
+      </p:sp>
+    </p:spTree>
+  </p:cSld>
+  <p:clrMapOvr>
+    <a:masterClrMapping/>
+  </p:clrMapOvr>
+</p:sld>
+</file>
+
+<file path=ppt/slides/slide17.xml><?xml version="1.0" encoding="utf-8"?>
+<p:sld xmlns:a="http://schemas.openxmlformats.org/drawingml/2006/main" xmlns:p="http://schemas.openxmlformats.org/presentationml/2006/main" xmlns:r="http://schemas.openxmlformats.org/officeDocument/2006/relationships">
+  <p:cSld>
+    <p:bg>
+      <p:bgPr>
+        <a:blipFill dpi="0" rotWithShape="1">
+          <a:blip r:embed="rId2">
+            <a:lum/>
+          </a:blip>
+          <a:srcRect/>
+          <a:stretch>
+            <a:fillRect/>
+          </a:stretch>
+        </a:blipFill>
+        <a:effectLst/>
+      </p:bgPr>
+    </p:bg>
+    <p:spTree>
+      <p:nvGrpSpPr>
+        <p:cNvPr id="1" name=""/>
+        <p:cNvGrpSpPr/>
+        <p:nvPr/>
+      </p:nvGrpSpPr>
+      <p:grpSpPr/>
+      <p:sp>
+        <p:nvSpPr>
+          <p:cNvPr id="2" name="TextBox 1"/>
+          <p:cNvSpPr txBox="1"/>
+          <p:nvPr/>
+        </p:nvSpPr>
+        <p:spPr>
+          <a:xfrm>
+            <a:off x="841248" y="173736"/>
+            <a:ext cx="10515600" cy="365760"/>
+          </a:xfrm>
+          <a:prstGeom prst="rect">
+            <a:avLst/>
+          </a:prstGeom>
+          <a:noFill/>
+        </p:spPr>
+        <p:txBody>
+          <a:bodyPr wrap="square">
+            <a:spAutoFit/>
+          </a:bodyPr>
+          <a:lstStyle/>
+          <a:p>
+            <a:pPr>
+              <a:defRPr sz="1700" b="1">
+                <a:solidFill>
+                  <a:srgbClr val="FFFFFF"/>
+                </a:solidFill>
+                <a:latin typeface="Montserrat"/>
+              </a:defRPr>
+            </a:pPr>
+            <a:r>
+              <a:t>LÍMITES HONESTOS DEL LOTE Y GOBERNANZA</a:t>
+            </a:r>
+          </a:p>
+        </p:txBody>
+      </p:sp>
+      <p:sp>
+        <p:nvSpPr>
+          <p:cNvPr id="3" name="TextBox 2"/>
+          <p:cNvSpPr txBox="1"/>
+          <p:nvPr/>
+        </p:nvSpPr>
+        <p:spPr>
+          <a:xfrm>
+            <a:off x="841248" y="621792"/>
+            <a:ext cx="10515600" cy="594360"/>
+          </a:xfrm>
+          <a:prstGeom prst="rect">
+            <a:avLst/>
+          </a:prstGeom>
+          <a:noFill/>
+        </p:spPr>
+        <p:txBody>
+          <a:bodyPr wrap="square">
+            <a:spAutoFit/>
+          </a:bodyPr>
+          <a:lstStyle/>
+          <a:p>
+            <a:pPr>
+              <a:defRPr sz="1300">
+                <a:solidFill>
+                  <a:srgbClr val="0B2545"/>
+                </a:solidFill>
+                <a:latin typeface="Montserrat"/>
+              </a:defRPr>
+            </a:pPr>
+            <a:r>
+              <a:t>Validación Funcional Exitosa (N=1,324), Diagnóstico de Capa GOLD y Criterios de Aceptación</a:t>
+            </a:r>
+          </a:p>
+        </p:txBody>
+      </p:sp>
+      <p:sp>
+        <p:nvSpPr>
+          <p:cNvPr id="4" name="Rounded Rectangle 3"/>
+          <p:cNvSpPr/>
+          <p:nvPr/>
+        </p:nvSpPr>
+        <p:spPr>
+          <a:xfrm>
+            <a:off x="731520" y="1371600"/>
+            <a:ext cx="5212080" cy="4937760"/>
+          </a:xfrm>
+          <a:prstGeom prst="roundRect">
+            <a:avLst/>
+          </a:prstGeom>
+          <a:solidFill>
+            <a:srgbClr val="FFFFFF"/>
+          </a:solidFill>
+          <a:ln>
+            <a:solidFill>
+              <a:srgbClr val="D7DCE4"/>
+            </a:solidFill>
+          </a:ln>
+        </p:spPr>
+        <p:style>
+          <a:lnRef idx="1">
+            <a:schemeClr val="accent1"/>
+          </a:lnRef>
+          <a:fillRef idx="3">
+            <a:schemeClr val="accent1"/>
+          </a:fillRef>
+          <a:effectRef idx="2">
+            <a:schemeClr val="accent1"/>
+          </a:effectRef>
+          <a:fontRef idx="minor">
+            <a:schemeClr val="lt1"/>
+          </a:fontRef>
+        </p:style>
+        <p:txBody>
+          <a:bodyPr rtlCol="0" anchor="ctr"/>
+          <a:lstStyle/>
+          <a:p>
+            <a:pPr algn="ctr"/>
+          </a:p>
+        </p:txBody>
+      </p:sp>
+      <p:sp>
+        <p:nvSpPr>
+          <p:cNvPr id="5" name="TextBox 4"/>
+          <p:cNvSpPr txBox="1"/>
+          <p:nvPr/>
+        </p:nvSpPr>
+        <p:spPr>
+          <a:xfrm>
+            <a:off x="914400" y="1554480"/>
+            <a:ext cx="4846320" cy="4572000"/>
+          </a:xfrm>
+          <a:prstGeom prst="rect">
+            <a:avLst/>
+          </a:prstGeom>
+          <a:noFill/>
+        </p:spPr>
+        <p:txBody>
+          <a:bodyPr wrap="square">
+            <a:spAutoFit/>
+          </a:bodyPr>
+          <a:lstStyle/>
+          <a:p>
+            <a:pPr>
+              <a:spcAft>
+                <a:spcPts val="1000"/>
+              </a:spcAft>
+              <a:defRPr sz="1150" b="1">
+                <a:solidFill>
+                  <a:srgbClr val="0B2545"/>
+                </a:solidFill>
+                <a:latin typeface="Montserrat"/>
+              </a:defRPr>
+            </a:pPr>
+            <a:r>
+              <a:t>VALIDACIÓN FUNCIONAL EXITOSA (NO ESTADÍSTICA)</a:t>
+            </a:r>
+          </a:p>
+          <a:p>
+            <a:pPr>
+              <a:spcAft>
+                <a:spcPts val="200"/>
+              </a:spcAft>
+              <a:defRPr sz="1000" b="1">
+                <a:solidFill>
+                  <a:srgbClr val="134074"/>
+                </a:solidFill>
+                <a:latin typeface="Montserrat"/>
+              </a:defRPr>
+            </a:pPr>
+            <a:r>
+              <a:t>• 706,443 Filas Crudas Ingeridas:</a:t>
+            </a:r>
+          </a:p>
+          <a:p>
+            <a:pPr>
+              <a:spcAft>
+                <a:spcPts val="600"/>
+              </a:spcAft>
+              <a:defRPr sz="950">
+                <a:solidFill>
+                  <a:srgbClr val="212529"/>
+                </a:solidFill>
+                <a:latin typeface="Montserrat"/>
+              </a:defRPr>
+            </a:pPr>
+            <a:r>
+              <a:t>  El lote probó de punta a punta la robustez del código, descarga de Azure e inferencia defensiva.</a:t>
+            </a:r>
+          </a:p>
+          <a:p>
+            <a:pPr>
+              <a:spcAft>
+                <a:spcPts val="200"/>
+              </a:spcAft>
+              <a:defRPr sz="1000" b="1">
+                <a:solidFill>
+                  <a:srgbClr val="134074"/>
+                </a:solidFill>
+                <a:latin typeface="Montserrat"/>
+              </a:defRPr>
+            </a:pPr>
+            <a:r>
+              <a:t>• 1,324 Localidades Limpias Finales (99.81% Descarte):</a:t>
+            </a:r>
+          </a:p>
+          <a:p>
+            <a:pPr>
+              <a:spcAft>
+                <a:spcPts val="600"/>
+              </a:spcAft>
+              <a:defRPr sz="950">
+                <a:solidFill>
+                  <a:srgbClr val="212529"/>
+                </a:solidFill>
+                <a:latin typeface="Montserrat"/>
+              </a:defRPr>
+            </a:pPr>
+            <a:r>
+              <a:t>  El volumen residual certificado es seguro para inferencia pero insuficiente para certificar drift poblacional (PSI) representativo.</a:t>
+            </a:r>
+          </a:p>
+          <a:p>
+            <a:pPr>
+              <a:spcAft>
+                <a:spcPts val="200"/>
+              </a:spcAft>
+              <a:defRPr sz="1000" b="1">
+                <a:solidFill>
+                  <a:srgbClr val="134074"/>
+                </a:solidFill>
+                <a:latin typeface="Montserrat"/>
+              </a:defRPr>
+            </a:pPr>
+            <a:r>
+              <a:t>• Causa de Descarte Masivo:</a:t>
+            </a:r>
+          </a:p>
+          <a:p>
+            <a:pPr>
+              <a:spcAft>
+                <a:spcPts val="600"/>
+              </a:spcAft>
+              <a:defRPr sz="950">
+                <a:solidFill>
+                  <a:srgbClr val="212529"/>
+                </a:solidFill>
+                <a:latin typeface="Montserrat"/>
+              </a:defRPr>
+            </a:pPr>
+            <a:r>
+              <a:t>  636k duplicados exactos (90.1%) y 706k filas (99.9%) en eventos con suma de cuotas rota por muestreo parcial.</a:t>
+            </a:r>
+          </a:p>
+        </p:txBody>
+      </p:sp>
+      <p:sp>
+        <p:nvSpPr>
+          <p:cNvPr id="6" name="Rounded Rectangle 5"/>
+          <p:cNvSpPr/>
+          <p:nvPr/>
+        </p:nvSpPr>
+        <p:spPr>
+          <a:xfrm>
+            <a:off x="6217920" y="1371600"/>
+            <a:ext cx="5212080" cy="4937760"/>
+          </a:xfrm>
+          <a:prstGeom prst="roundRect">
+            <a:avLst/>
+          </a:prstGeom>
+          <a:solidFill>
+            <a:srgbClr val="FFFFFF"/>
+          </a:solidFill>
+          <a:ln>
+            <a:solidFill>
+              <a:srgbClr val="D7DCE4"/>
+            </a:solidFill>
+          </a:ln>
+        </p:spPr>
+        <p:style>
+          <a:lnRef idx="1">
+            <a:schemeClr val="accent1"/>
+          </a:lnRef>
+          <a:fillRef idx="3">
+            <a:schemeClr val="accent1"/>
+          </a:fillRef>
+          <a:effectRef idx="2">
+            <a:schemeClr val="accent1"/>
+          </a:effectRef>
+          <a:fontRef idx="minor">
+            <a:schemeClr val="lt1"/>
+          </a:fontRef>
+        </p:style>
+        <p:txBody>
+          <a:bodyPr rtlCol="0" anchor="ctr"/>
+          <a:lstStyle/>
+          <a:p>
+            <a:pPr algn="ctr"/>
+          </a:p>
+        </p:txBody>
+      </p:sp>
+      <p:sp>
+        <p:nvSpPr>
+          <p:cNvPr id="7" name="TextBox 6"/>
+          <p:cNvSpPr txBox="1"/>
+          <p:nvPr/>
+        </p:nvSpPr>
+        <p:spPr>
+          <a:xfrm>
+            <a:off x="6400800" y="1554480"/>
+            <a:ext cx="4846320" cy="4572000"/>
+          </a:xfrm>
+          <a:prstGeom prst="rect">
+            <a:avLst/>
+          </a:prstGeom>
+          <a:noFill/>
+        </p:spPr>
+        <p:txBody>
+          <a:bodyPr wrap="square">
+            <a:spAutoFit/>
+          </a:bodyPr>
+          <a:lstStyle/>
+          <a:p>
+            <a:pPr>
+              <a:spcAft>
+                <a:spcPts val="1000"/>
+              </a:spcAft>
+              <a:defRPr sz="1150" b="1">
+                <a:solidFill>
+                  <a:srgbClr val="0B2545"/>
+                </a:solidFill>
+                <a:latin typeface="Montserrat"/>
+              </a:defRPr>
+            </a:pPr>
+            <a:r>
+              <a:t>LOS 5 CRITERIOS DE ACEPTACIÓN PARA EL NUEVO BLOB</a:t>
+            </a:r>
+          </a:p>
+          <a:p>
+            <a:pPr>
+              <a:spcAft>
+                <a:spcPts val="200"/>
+              </a:spcAft>
+              <a:defRPr sz="1000" b="1">
+                <a:solidFill>
+                  <a:srgbClr val="134074"/>
+                </a:solidFill>
+                <a:latin typeface="Montserrat"/>
+              </a:defRPr>
+            </a:pPr>
+            <a:r>
+              <a:t>• Check A (Duplicados en Crudo):</a:t>
+            </a:r>
+          </a:p>
+          <a:p>
+            <a:pPr>
+              <a:spcAft>
+                <a:spcPts val="600"/>
+              </a:spcAft>
+              <a:defRPr sz="950">
+                <a:solidFill>
+                  <a:srgbClr val="212529"/>
+                </a:solidFill>
+                <a:latin typeface="Montserrat"/>
+              </a:defRPr>
+            </a:pPr>
+            <a:r>
+              <a:t>  Tasa de duplicidad estricta &lt; 1.0%.</a:t>
+            </a:r>
+          </a:p>
+          <a:p>
+            <a:pPr>
+              <a:spcAft>
+                <a:spcPts val="200"/>
+              </a:spcAft>
+              <a:defRPr sz="1000" b="1">
+                <a:solidFill>
+                  <a:srgbClr val="134074"/>
+                </a:solidFill>
+                <a:latin typeface="Montserrat"/>
+              </a:defRPr>
+            </a:pPr>
+            <a:r>
+              <a:t>• Check B (Supervivencia de Filtro):</a:t>
+            </a:r>
+          </a:p>
+          <a:p>
+            <a:pPr>
+              <a:spcAft>
+                <a:spcPts val="600"/>
+              </a:spcAft>
+              <a:defRPr sz="950">
+                <a:solidFill>
+                  <a:srgbClr val="212529"/>
+                </a:solidFill>
+                <a:latin typeface="Montserrat"/>
+              </a:defRPr>
+            </a:pPr>
+            <a:r>
+              <a:t>  Tasa de retención consistente &gt; 90.0%.</a:t>
+            </a:r>
+          </a:p>
+          <a:p>
+            <a:pPr>
+              <a:spcAft>
+                <a:spcPts val="200"/>
+              </a:spcAft>
+              <a:defRPr sz="1000" b="1">
+                <a:solidFill>
+                  <a:srgbClr val="134074"/>
+                </a:solidFill>
+                <a:latin typeface="Montserrat"/>
+              </a:defRPr>
+            </a:pPr>
+            <a:r>
+              <a:t>• Check C (Coherencia de Aforos):</a:t>
+            </a:r>
+          </a:p>
+          <a:p>
+            <a:pPr>
+              <a:spcAft>
+                <a:spcPts val="600"/>
+              </a:spcAft>
+              <a:defRPr sz="950">
+                <a:solidFill>
+                  <a:srgbClr val="212529"/>
+                </a:solidFill>
+                <a:latin typeface="Montserrat"/>
+              </a:defRPr>
+            </a:pPr>
+            <a:r>
+              <a:t>  0 eventos con discrepancias físicas en la suma de cuotas.</a:t>
+            </a:r>
+          </a:p>
+          <a:p>
+            <a:pPr>
+              <a:spcAft>
+                <a:spcPts val="200"/>
+              </a:spcAft>
+              <a:defRPr sz="1000" b="1">
+                <a:solidFill>
+                  <a:srgbClr val="134074"/>
+                </a:solidFill>
+                <a:latin typeface="Montserrat"/>
+              </a:defRPr>
+            </a:pPr>
+            <a:r>
+              <a:t>• Check D (Volumetría):</a:t>
+            </a:r>
+          </a:p>
+          <a:p>
+            <a:pPr>
+              <a:spcAft>
+                <a:spcPts val="600"/>
+              </a:spcAft>
+              <a:defRPr sz="950">
+                <a:solidFill>
+                  <a:srgbClr val="212529"/>
+                </a:solidFill>
+                <a:latin typeface="Montserrat"/>
+              </a:defRPr>
+            </a:pPr>
+            <a:r>
+              <a:t>  Tamaño comparable al histórico (|Delta| &lt; 20% vs 33,775).</a:t>
+            </a:r>
+          </a:p>
+          <a:p>
+            <a:pPr>
+              <a:spcAft>
+                <a:spcPts val="200"/>
+              </a:spcAft>
+              <a:defRPr sz="1000" b="1">
+                <a:solidFill>
+                  <a:srgbClr val="134074"/>
+                </a:solidFill>
+                <a:latin typeface="Montserrat"/>
+              </a:defRPr>
+            </a:pPr>
+            <a:r>
+              <a:t>• Check E (Patrones no Comerciales):</a:t>
+            </a:r>
+          </a:p>
+          <a:p>
+            <a:pPr>
+              <a:spcAft>
+                <a:spcPts val="600"/>
+              </a:spcAft>
+              <a:defRPr sz="950">
+                <a:solidFill>
+                  <a:srgbClr val="212529"/>
+                </a:solidFill>
+                <a:latin typeface="Montserrat"/>
+              </a:defRPr>
+            </a:pPr>
+            <a:r>
+              <a:t>  0 filas con TEST, CANCELAD, PARQUEA o sobreventas.</a:t>
+            </a:r>
+          </a:p>
+        </p:txBody>
+      </p:sp>
+    </p:spTree>
+  </p:cSld>
+  <p:clrMapOvr>
+    <a:masterClrMapping/>
+  </p:clrMapOvr>
+</p:sld>
+</file>
+
+<file path=ppt/slides/slide18.xml><?xml version="1.0" encoding="utf-8"?>
 <p:sld xmlns:a="http://schemas.openxmlformats.org/drawingml/2006/main" xmlns:p="http://schemas.openxmlformats.org/presentationml/2006/main" xmlns:r="http://schemas.openxmlformats.org/officeDocument/2006/relationships">
   <p:cSld>
     <p:bg>
@@ -8264,7 +10248,7 @@
               </a:defRPr>
             </a:pPr>
             <a:r>
-              <a:t>EVIDENCIA POR SEGMENTO: SEGMENTO PREMIUM</a:t>
+              <a:t>ESTRATO MICRO (≤ 500 AFORO): MANIZALES (AUDITORIO CULTURAL)</a:t>
             </a:r>
           </a:p>
         </p:txBody>
@@ -8300,14 +10284,14 @@
               </a:defRPr>
             </a:pPr>
             <a:r>
-              <a:t>Granularidad Interna en VIP y Preferencial Frontal (Micro-clusters VIP-0..2 y PPF-0..2)</a:t>
+              <a:t>Tributo a Raphael @ Batuta Caldas (Aforo: 240) — Descenso Limpio sin Forzar Palcos Inexistentes</a:t>
             </a:r>
           </a:p>
         </p:txBody>
       </p:sp>
       <p:pic>
         <p:nvPicPr>
-          <p:cNvPr id="4" name="Picture 3" descr="fig_galeria_premium.png"/>
+          <p:cNvPr id="4" name="Picture 3" descr="fig_evento_micro.png"/>
           <p:cNvPicPr>
             <a:picLocks noChangeAspect="1"/>
           </p:cNvPicPr>
@@ -8392,7 +10376,7 @@
               </a:defRPr>
             </a:pPr>
             <a:r>
-              <a:t>EVIDENCIA POR SEGMENTO: SEGMENTO MASIVOS</a:t>
+              <a:t>ESTRATO PEQUEÑO (500–2.000 AFORO): TEATRO HISTÓRICO</a:t>
             </a:r>
           </a:p>
         </p:txBody>
@@ -8428,14 +10412,14 @@
               </a:defRPr>
             </a:pPr>
             <a:r>
-              <a:t>Granularidad Interna en Platea General, Popular y Grada Masiva (PGI, POP, GGM)</a:t>
+              <a:t>Hans Zimmer vs John Williams @ Teatro Jorge Eliécer Gaitán (Aforo: 1,650) — Platea Frontal y Balcón Frontera</a:t>
             </a:r>
           </a:p>
         </p:txBody>
       </p:sp>
       <p:pic>
         <p:nvPicPr>
-          <p:cNvPr id="4" name="Picture 3" descr="fig_galeria_masivos.png"/>
+          <p:cNvPr id="4" name="Picture 3" descr="fig_evento_pequeno.png"/>
           <p:cNvPicPr>
             <a:picLocks noChangeAspect="1"/>
           </p:cNvPicPr>
@@ -8520,7 +10504,7 @@
               </a:defRPr>
             </a:pPr>
             <a:r>
-              <a:t>CASOS ESPECIALES: CALIDAD MATEMÁTICA Y FRONTERAS</a:t>
+              <a:t>ESTRATO MEDIANO (2.000–8.000 AFORO): ARENA FORMATO MEDIANO</a:t>
             </a:r>
           </a:p>
         </p:txBody>
@@ -8556,14 +10540,14 @@
               </a:defRPr>
             </a:pPr>
             <a:r>
-              <a:t>Admisión Única Determinística, Banderas de Frontera y Clusters Léxicos Híbridos</a:t>
+              <a:t>Lucho Mellera @ Movistar Arena (Aforo: 6,435) — Tribuna Fan VIP, Plateas Frontales y Segundo Piso Popular</a:t>
             </a:r>
           </a:p>
         </p:txBody>
       </p:sp>
       <p:pic>
         <p:nvPicPr>
-          <p:cNvPr id="4" name="Picture 3" descr="fig_galeria_especiales.png"/>
+          <p:cNvPr id="4" name="Picture 3" descr="fig_evento_mediano.png"/>
           <p:cNvPicPr>
             <a:picLocks noChangeAspect="1"/>
           </p:cNvPicPr>
@@ -8578,209 +10562,13 @@
         <p:spPr>
           <a:xfrm>
             <a:off x="731520" y="1280160"/>
-            <a:ext cx="6858000" cy="5029200"/>
+            <a:ext cx="10698480" cy="5029200"/>
           </a:xfrm>
           <a:prstGeom prst="rect">
             <a:avLst/>
           </a:prstGeom>
         </p:spPr>
       </p:pic>
-      <p:sp>
-        <p:nvSpPr>
-          <p:cNvPr id="5" name="Rounded Rectangle 4"/>
-          <p:cNvSpPr/>
-          <p:nvPr/>
-        </p:nvSpPr>
-        <p:spPr>
-          <a:xfrm>
-            <a:off x="7772400" y="1280160"/>
-            <a:ext cx="3657600" cy="5029200"/>
-          </a:xfrm>
-          <a:prstGeom prst="roundRect">
-            <a:avLst/>
-          </a:prstGeom>
-          <a:solidFill>
-            <a:srgbClr val="FFFFFF"/>
-          </a:solidFill>
-          <a:ln>
-            <a:solidFill>
-              <a:srgbClr val="D7DCE4"/>
-            </a:solidFill>
-          </a:ln>
-        </p:spPr>
-        <p:style>
-          <a:lnRef idx="1">
-            <a:schemeClr val="accent1"/>
-          </a:lnRef>
-          <a:fillRef idx="3">
-            <a:schemeClr val="accent1"/>
-          </a:fillRef>
-          <a:effectRef idx="2">
-            <a:schemeClr val="accent1"/>
-          </a:effectRef>
-          <a:fontRef idx="minor">
-            <a:schemeClr val="lt1"/>
-          </a:fontRef>
-        </p:style>
-        <p:txBody>
-          <a:bodyPr rtlCol="0" anchor="ctr"/>
-          <a:lstStyle/>
-          <a:p>
-            <a:pPr algn="ctr"/>
-          </a:p>
-        </p:txBody>
-      </p:sp>
-      <p:sp>
-        <p:nvSpPr>
-          <p:cNvPr id="6" name="TextBox 5"/>
-          <p:cNvSpPr txBox="1"/>
-          <p:nvPr/>
-        </p:nvSpPr>
-        <p:spPr>
-          <a:xfrm>
-            <a:off x="7909560" y="1417320"/>
-            <a:ext cx="3383280" cy="4754880"/>
-          </a:xfrm>
-          <a:prstGeom prst="rect">
-            <a:avLst/>
-          </a:prstGeom>
-          <a:noFill/>
-        </p:spPr>
-        <p:txBody>
-          <a:bodyPr wrap="square">
-            <a:spAutoFit/>
-          </a:bodyPr>
-          <a:lstStyle/>
-          <a:p>
-            <a:pPr>
-              <a:spcAft>
-                <a:spcPts val="200"/>
-              </a:spcAft>
-              <a:defRPr sz="1100" b="1">
-                <a:solidFill>
-                  <a:srgbClr val="134074"/>
-                </a:solidFill>
-                <a:latin typeface="Montserrat"/>
-              </a:defRPr>
-            </a:pPr>
-            <a:r>
-              <a:t>AU-0: Admisión Única (100% Confianza)</a:t>
-            </a:r>
-          </a:p>
-          <a:p>
-            <a:pPr>
-              <a:spcAft>
-                <a:spcPts val="800"/>
-              </a:spcAft>
-              <a:defRPr sz="950">
-                <a:solidFill>
-                  <a:srgbClr val="212529"/>
-                </a:solidFill>
-                <a:latin typeface="Montserrat"/>
-              </a:defRPr>
-            </a:pPr>
-            <a:r>
-              <a:t>Eventos mono-zona o boletos de acceso irrestricto (Meet &amp; Greet, Galerías). Pasa por nodo determinístico.</a:t>
-            </a:r>
-          </a:p>
-          <a:p>
-            <a:pPr>
-              <a:spcAft>
-                <a:spcPts val="200"/>
-              </a:spcAft>
-              <a:defRPr sz="1100" b="1">
-                <a:solidFill>
-                  <a:srgbClr val="E76F51"/>
-                </a:solidFill>
-                <a:latin typeface="Montserrat"/>
-              </a:defRPr>
-            </a:pPr>
-            <a:r>
-              <a:t>Fronteras Estadísticas (Borde Punteado)</a:t>
-            </a:r>
-          </a:p>
-          <a:p>
-            <a:pPr>
-              <a:spcAft>
-                <a:spcPts val="800"/>
-              </a:spcAft>
-              <a:defRPr sz="950">
-                <a:solidFill>
-                  <a:srgbClr val="212529"/>
-                </a:solidFill>
-                <a:latin typeface="Montserrat"/>
-              </a:defRPr>
-            </a:pPr>
-            <a:r>
-              <a:t>Confianzas &lt; 0.50 entre zonas difusas (ej. Platea en Teatro El Ensueño con 0.16%). Activa segmento_incierto=True.</a:t>
-            </a:r>
-          </a:p>
-          <a:p>
-            <a:pPr>
-              <a:spcAft>
-                <a:spcPts val="200"/>
-              </a:spcAft>
-              <a:defRPr sz="1100" b="1">
-                <a:solidFill>
-                  <a:srgbClr val="134074"/>
-                </a:solidFill>
-                <a:latin typeface="Montserrat"/>
-              </a:defRPr>
-            </a:pPr>
-            <a:r>
-              <a:t>Clusters Híbridos (Badge HÍBRIDO)</a:t>
-            </a:r>
-          </a:p>
-          <a:p>
-            <a:pPr>
-              <a:spcAft>
-                <a:spcPts val="800"/>
-              </a:spcAft>
-              <a:defRPr sz="950">
-                <a:solidFill>
-                  <a:srgbClr val="212529"/>
-                </a:solidFill>
-                <a:latin typeface="Montserrat"/>
-              </a:defRPr>
-            </a:pPr>
-            <a:r>
-              <a:t>Nomenclaturas combinadas (Luneta + Balcón) agrupadas por K-Means sin violar el arquetipo macro.</a:t>
-            </a:r>
-          </a:p>
-          <a:p>
-            <a:pPr>
-              <a:spcAft>
-                <a:spcPts val="200"/>
-              </a:spcAft>
-              <a:defRPr sz="1100" b="1">
-                <a:solidFill>
-                  <a:srgbClr val="134074"/>
-                </a:solidFill>
-                <a:latin typeface="Montserrat"/>
-              </a:defRPr>
-            </a:pPr>
-            <a:r>
-              <a:t>Regla 8: Exclusiones Interceptadas</a:t>
-            </a:r>
-          </a:p>
-          <a:p>
-            <a:pPr>
-              <a:spcAft>
-                <a:spcPts val="800"/>
-              </a:spcAft>
-              <a:defRPr sz="950">
-                <a:solidFill>
-                  <a:srgbClr val="212529"/>
-                </a:solidFill>
-                <a:latin typeface="Montserrat"/>
-              </a:defRPr>
-            </a:pPr>
-            <a:r>
-              <a:t>13,020 parqueaderos y 205 localidades activas no comerciales excluidas ex-ante por el contrato Python.</a:t>
-            </a:r>
-          </a:p>
-        </p:txBody>
-      </p:sp>
     </p:spTree>
   </p:cSld>
   <p:clrMapOvr>
@@ -8844,7 +10632,7 @@
               </a:defRPr>
             </a:pPr>
             <a:r>
-              <a:t>ANEXO VERIFICABLE DE MARCHA BLANCA</a:t>
+              <a:t>ESTRATO GRANDE (8.000–20.000 AFORO): ARENA MASIVA METROPOLITANA</a:t>
             </a:r>
           </a:p>
         </p:txBody>
@@ -8880,629 +10668,35 @@
               </a:defRPr>
             </a:pPr>
             <a:r>
-              <a:t>Acceso Completo a las 1,324 Asignaciones: Excel Ejecutivo y Repositorio Versionado</a:t>
-            </a:r>
-          </a:p>
-        </p:txBody>
-      </p:sp>
-      <p:sp>
-        <p:nvSpPr>
-          <p:cNvPr id="4" name="Rounded Rectangle 3"/>
-          <p:cNvSpPr/>
+              <a:t>Carlos Vives @ Daviarena Medellín (Aforo: 12,979) — Escala Completa de 12 Localidades en Concierto Masivo</a:t>
+            </a:r>
+          </a:p>
+        </p:txBody>
+      </p:sp>
+      <p:pic>
+        <p:nvPicPr>
+          <p:cNvPr id="4" name="Picture 3" descr="fig_evento_grande.png"/>
+          <p:cNvPicPr>
+            <a:picLocks noChangeAspect="1"/>
+          </p:cNvPicPr>
           <p:nvPr/>
-        </p:nvSpPr>
-        <p:spPr>
-          <a:xfrm>
-            <a:off x="731520" y="1371600"/>
-            <a:ext cx="5212080" cy="4937760"/>
-          </a:xfrm>
-          <a:prstGeom prst="roundRect">
-            <a:avLst/>
-          </a:prstGeom>
-          <a:solidFill>
-            <a:srgbClr val="FFFFFF"/>
-          </a:solidFill>
-          <a:ln>
-            <a:solidFill>
-              <a:srgbClr val="D7DCE4"/>
-            </a:solidFill>
-          </a:ln>
-        </p:spPr>
-        <p:style>
-          <a:lnRef idx="1">
-            <a:schemeClr val="accent1"/>
-          </a:lnRef>
-          <a:fillRef idx="3">
-            <a:schemeClr val="accent1"/>
-          </a:fillRef>
-          <a:effectRef idx="2">
-            <a:schemeClr val="accent1"/>
-          </a:effectRef>
-          <a:fontRef idx="minor">
-            <a:schemeClr val="lt1"/>
-          </a:fontRef>
-        </p:style>
-        <p:txBody>
-          <a:bodyPr rtlCol="0" anchor="ctr"/>
-          <a:lstStyle/>
-          <a:p>
-            <a:pPr algn="ctr"/>
-          </a:p>
-        </p:txBody>
-      </p:sp>
-      <p:sp>
-        <p:nvSpPr>
-          <p:cNvPr id="5" name="Rounded Rectangle 4"/>
-          <p:cNvSpPr/>
-          <p:nvPr/>
-        </p:nvSpPr>
-        <p:spPr>
-          <a:xfrm>
-            <a:off x="731520" y="1371600"/>
-            <a:ext cx="5212080" cy="640080"/>
-          </a:xfrm>
-          <a:prstGeom prst="roundRect">
-            <a:avLst/>
-          </a:prstGeom>
-          <a:solidFill>
-            <a:srgbClr val="009688"/>
-          </a:solidFill>
-          <a:ln>
-            <a:solidFill>
-              <a:srgbClr val="009688"/>
-            </a:solidFill>
-          </a:ln>
-        </p:spPr>
-        <p:style>
-          <a:lnRef idx="1">
-            <a:schemeClr val="accent1"/>
-          </a:lnRef>
-          <a:fillRef idx="3">
-            <a:schemeClr val="accent1"/>
-          </a:fillRef>
-          <a:effectRef idx="2">
-            <a:schemeClr val="accent1"/>
-          </a:effectRef>
-          <a:fontRef idx="minor">
-            <a:schemeClr val="lt1"/>
-          </a:fontRef>
-        </p:style>
-        <p:txBody>
-          <a:bodyPr rtlCol="0" anchor="ctr"/>
-          <a:lstStyle/>
-          <a:p>
-            <a:pPr algn="ctr"/>
-          </a:p>
-        </p:txBody>
-      </p:sp>
-      <p:sp>
-        <p:nvSpPr>
-          <p:cNvPr id="6" name="TextBox 5"/>
-          <p:cNvSpPr txBox="1"/>
-          <p:nvPr/>
-        </p:nvSpPr>
-        <p:spPr>
-          <a:xfrm>
-            <a:off x="822960" y="1417320"/>
-            <a:ext cx="5029200" cy="457200"/>
+        </p:nvPicPr>
+        <p:blipFill>
+          <a:blip r:embed="rId4"/>
+          <a:stretch>
+            <a:fillRect/>
+          </a:stretch>
+        </p:blipFill>
+        <p:spPr>
+          <a:xfrm>
+            <a:off x="731520" y="1280160"/>
+            <a:ext cx="10698480" cy="5029200"/>
           </a:xfrm>
           <a:prstGeom prst="rect">
             <a:avLst/>
           </a:prstGeom>
-          <a:noFill/>
-        </p:spPr>
-        <p:txBody>
-          <a:bodyPr wrap="none">
-            <a:spAutoFit/>
-          </a:bodyPr>
-          <a:lstStyle/>
-          <a:p>
-            <a:pPr>
-              <a:defRPr sz="1050" b="1">
-                <a:solidFill>
-                  <a:srgbClr val="FFFFFF"/>
-                </a:solidFill>
-                <a:latin typeface="Montserrat"/>
-              </a:defRPr>
-            </a:pPr>
-            <a:r>
-              <a:t>LIBRO DE EXCEL EJECUTIVO (AUDITORÍA INMEDIATA)</a:t>
-            </a:r>
-          </a:p>
-        </p:txBody>
-      </p:sp>
-      <p:sp>
-        <p:nvSpPr>
-          <p:cNvPr id="7" name="TextBox 6"/>
-          <p:cNvSpPr txBox="1"/>
-          <p:nvPr/>
-        </p:nvSpPr>
-        <p:spPr>
-          <a:xfrm>
-            <a:off x="914400" y="2103120"/>
-            <a:ext cx="4846320" cy="4114800"/>
-          </a:xfrm>
-          <a:prstGeom prst="rect">
-            <a:avLst/>
-          </a:prstGeom>
-          <a:noFill/>
-        </p:spPr>
-        <p:txBody>
-          <a:bodyPr wrap="square">
-            <a:spAutoFit/>
-          </a:bodyPr>
-          <a:lstStyle/>
-          <a:p>
-            <a:pPr>
-              <a:spcAft>
-                <a:spcPts val="800"/>
-              </a:spcAft>
-              <a:defRPr sz="1100" b="1">
-                <a:solidFill>
-                  <a:srgbClr val="0B2545"/>
-                </a:solidFill>
-                <a:latin typeface="Montserrat"/>
-              </a:defRPr>
-            </a:pPr>
-            <a:r>
-              <a:t>reports/anexo_asignaciones_marcha_blanca.xlsx</a:t>
-            </a:r>
-          </a:p>
-          <a:p>
-            <a:pPr>
-              <a:spcAft>
-                <a:spcPts val="400"/>
-              </a:spcAft>
-              <a:defRPr sz="950" b="1">
-                <a:solidFill>
-                  <a:srgbClr val="134074"/>
-                </a:solidFill>
-                <a:latin typeface="Montserrat"/>
-              </a:defRPr>
-            </a:pPr>
-            <a:r>
-              <a:t>• Volumen Total: </a:t>
-            </a:r>
-            <a:r>
-              <a:rPr b="0">
-                <a:solidFill>
-                  <a:srgbClr val="212529"/>
-                </a:solidFill>
-              </a:rPr>
-              <a:t>1,324 filas de localidades limpias certificadas</a:t>
-            </a:r>
-          </a:p>
-          <a:p>
-            <a:pPr>
-              <a:spcAft>
-                <a:spcPts val="400"/>
-              </a:spcAft>
-              <a:defRPr sz="950" b="1">
-                <a:solidFill>
-                  <a:srgbClr val="134074"/>
-                </a:solidFill>
-                <a:latin typeface="Montserrat"/>
-              </a:defRPr>
-            </a:pPr>
-            <a:r>
-              <a:t>• Hoja Única: </a:t>
-            </a:r>
-            <a:r>
-              <a:rPr b="0">
-                <a:solidFill>
-                  <a:srgbClr val="212529"/>
-                </a:solidFill>
-              </a:rPr>
-              <a:t>'Asignaciones_Marcha_Blanca' con autofiltro nativo</a:t>
-            </a:r>
-          </a:p>
-          <a:p>
-            <a:pPr>
-              <a:spcAft>
-                <a:spcPts val="400"/>
-              </a:spcAft>
-              <a:defRPr sz="950" b="1">
-                <a:solidFill>
-                  <a:srgbClr val="134074"/>
-                </a:solidFill>
-                <a:latin typeface="Montserrat"/>
-              </a:defRPr>
-            </a:pPr>
-            <a:r>
-              <a:t>• Usabilidad: </a:t>
-            </a:r>
-            <a:r>
-              <a:rPr b="0">
-                <a:solidFill>
-                  <a:srgbClr val="212529"/>
-                </a:solidFill>
-              </a:rPr>
-              <a:t>Fila de encabezado congelada para navegación fluida</a:t>
-            </a:r>
-          </a:p>
-          <a:p>
-            <a:pPr>
-              <a:spcAft>
-                <a:spcPts val="400"/>
-              </a:spcAft>
-              <a:defRPr sz="950" b="1">
-                <a:solidFill>
-                  <a:srgbClr val="134074"/>
-                </a:solidFill>
-                <a:latin typeface="Montserrat"/>
-              </a:defRPr>
-            </a:pPr>
-            <a:r>
-              <a:t>• Formato Porcentual: </a:t>
-            </a:r>
-            <a:r>
-              <a:rPr b="0">
-                <a:solidFill>
-                  <a:srgbClr val="212529"/>
-                </a:solidFill>
-              </a:rPr>
-              <a:t>score_confianza formateado como porcentaje (0.0%)</a:t>
-            </a:r>
-          </a:p>
-          <a:p>
-            <a:pPr>
-              <a:spcAft>
-                <a:spcPts val="400"/>
-              </a:spcAft>
-              <a:defRPr sz="950" b="1">
-                <a:solidFill>
-                  <a:srgbClr val="134074"/>
-                </a:solidFill>
-                <a:latin typeface="Montserrat"/>
-              </a:defRPr>
-            </a:pPr>
-            <a:r>
-              <a:t>• Formato Moneda: </a:t>
-            </a:r>
-            <a:r>
-              <a:rPr b="0">
-                <a:solidFill>
-                  <a:srgbClr val="212529"/>
-                </a:solidFill>
-              </a:rPr>
-              <a:t>precio con separador de miles en pesos colombianos</a:t>
-            </a:r>
-          </a:p>
-          <a:p>
-            <a:pPr>
-              <a:spcAft>
-                <a:spcPts val="400"/>
-              </a:spcAft>
-              <a:defRPr sz="950" b="1">
-                <a:solidFill>
-                  <a:srgbClr val="134074"/>
-                </a:solidFill>
-                <a:latin typeface="Montserrat"/>
-              </a:defRPr>
-            </a:pPr>
-            <a:r>
-              <a:t>• Columnas Clave: </a:t>
-            </a:r>
-            <a:r>
-              <a:rPr b="0">
-                <a:solidFill>
-                  <a:srgbClr val="212529"/>
-                </a:solidFill>
-              </a:rPr>
-              <a:t>localidad, recinto, precio, type_site, micro_cluster_id, label_auto, arquetipo_demanda, score_confianza, es_frontera</a:t>
-            </a:r>
-          </a:p>
-        </p:txBody>
-      </p:sp>
-      <p:sp>
-        <p:nvSpPr>
-          <p:cNvPr id="8" name="Rounded Rectangle 7"/>
-          <p:cNvSpPr/>
-          <p:nvPr/>
-        </p:nvSpPr>
-        <p:spPr>
-          <a:xfrm>
-            <a:off x="6217920" y="1371600"/>
-            <a:ext cx="5212080" cy="4937760"/>
-          </a:xfrm>
-          <a:prstGeom prst="roundRect">
-            <a:avLst/>
-          </a:prstGeom>
-          <a:solidFill>
-            <a:srgbClr val="FFFFFF"/>
-          </a:solidFill>
-          <a:ln>
-            <a:solidFill>
-              <a:srgbClr val="D7DCE4"/>
-            </a:solidFill>
-          </a:ln>
-        </p:spPr>
-        <p:style>
-          <a:lnRef idx="1">
-            <a:schemeClr val="accent1"/>
-          </a:lnRef>
-          <a:fillRef idx="3">
-            <a:schemeClr val="accent1"/>
-          </a:fillRef>
-          <a:effectRef idx="2">
-            <a:schemeClr val="accent1"/>
-          </a:effectRef>
-          <a:fontRef idx="minor">
-            <a:schemeClr val="lt1"/>
-          </a:fontRef>
-        </p:style>
-        <p:txBody>
-          <a:bodyPr rtlCol="0" anchor="ctr"/>
-          <a:lstStyle/>
-          <a:p>
-            <a:pPr algn="ctr"/>
-          </a:p>
-        </p:txBody>
-      </p:sp>
-      <p:sp>
-        <p:nvSpPr>
-          <p:cNvPr id="9" name="Rounded Rectangle 8"/>
-          <p:cNvSpPr/>
-          <p:nvPr/>
-        </p:nvSpPr>
-        <p:spPr>
-          <a:xfrm>
-            <a:off x="6217920" y="1371600"/>
-            <a:ext cx="5212080" cy="640080"/>
-          </a:xfrm>
-          <a:prstGeom prst="roundRect">
-            <a:avLst/>
-          </a:prstGeom>
-          <a:solidFill>
-            <a:srgbClr val="134074"/>
-          </a:solidFill>
-          <a:ln>
-            <a:solidFill>
-              <a:srgbClr val="134074"/>
-            </a:solidFill>
-          </a:ln>
-        </p:spPr>
-        <p:style>
-          <a:lnRef idx="1">
-            <a:schemeClr val="accent1"/>
-          </a:lnRef>
-          <a:fillRef idx="3">
-            <a:schemeClr val="accent1"/>
-          </a:fillRef>
-          <a:effectRef idx="2">
-            <a:schemeClr val="accent1"/>
-          </a:effectRef>
-          <a:fontRef idx="minor">
-            <a:schemeClr val="lt1"/>
-          </a:fontRef>
-        </p:style>
-        <p:txBody>
-          <a:bodyPr rtlCol="0" anchor="ctr"/>
-          <a:lstStyle/>
-          <a:p>
-            <a:pPr algn="ctr"/>
-          </a:p>
-        </p:txBody>
-      </p:sp>
-      <p:sp>
-        <p:nvSpPr>
-          <p:cNvPr id="10" name="TextBox 9"/>
-          <p:cNvSpPr txBox="1"/>
-          <p:nvPr/>
-        </p:nvSpPr>
-        <p:spPr>
-          <a:xfrm>
-            <a:off x="6309360" y="1417320"/>
-            <a:ext cx="5029200" cy="457200"/>
-          </a:xfrm>
-          <a:prstGeom prst="rect">
-            <a:avLst/>
-          </a:prstGeom>
-          <a:noFill/>
-        </p:spPr>
-        <p:txBody>
-          <a:bodyPr wrap="none">
-            <a:spAutoFit/>
-          </a:bodyPr>
-          <a:lstStyle/>
-          <a:p>
-            <a:pPr>
-              <a:defRPr sz="1050" b="1">
-                <a:solidFill>
-                  <a:srgbClr val="FFFFFF"/>
-                </a:solidFill>
-                <a:latin typeface="Montserrat"/>
-              </a:defRPr>
-            </a:pPr>
-            <a:r>
-              <a:t>ARTEFACTOS DE CÓDIGO Y DATOS EN REPOSITORIO</a:t>
-            </a:r>
-          </a:p>
-        </p:txBody>
-      </p:sp>
-      <p:sp>
-        <p:nvSpPr>
-          <p:cNvPr id="11" name="TextBox 10"/>
-          <p:cNvSpPr txBox="1"/>
-          <p:nvPr/>
-        </p:nvSpPr>
-        <p:spPr>
-          <a:xfrm>
-            <a:off x="6400800" y="2103120"/>
-            <a:ext cx="4846320" cy="4114800"/>
-          </a:xfrm>
-          <a:prstGeom prst="rect">
-            <a:avLst/>
-          </a:prstGeom>
-          <a:noFill/>
-        </p:spPr>
-        <p:txBody>
-          <a:bodyPr wrap="square">
-            <a:spAutoFit/>
-          </a:bodyPr>
-          <a:lstStyle/>
-          <a:p>
-            <a:pPr>
-              <a:spcAft>
-                <a:spcPts val="800"/>
-              </a:spcAft>
-              <a:defRPr sz="1100" b="1">
-                <a:solidFill>
-                  <a:srgbClr val="0B2545"/>
-                </a:solidFill>
-                <a:latin typeface="Montserrat"/>
-              </a:defRPr>
-            </a:pPr>
-            <a:r>
-              <a:t>c:/dev/clusterizacion-localidades/ (Git Versionado)</a:t>
-            </a:r>
-          </a:p>
-          <a:p>
-            <a:pPr>
-              <a:spcAft>
-                <a:spcPts val="400"/>
-              </a:spcAft>
-              <a:defRPr sz="950" b="1">
-                <a:solidFill>
-                  <a:srgbClr val="134074"/>
-                </a:solidFill>
-                <a:latin typeface="Montserrat"/>
-              </a:defRPr>
-            </a:pPr>
-            <a:r>
-              <a:t>• CSV Completo: </a:t>
-            </a:r>
-            <a:r>
-              <a:rPr b="0">
-                <a:solidFill>
-                  <a:srgbClr val="212529"/>
-                </a:solidFill>
-              </a:rPr>
-              <a:t>data/processed/asignacion_microclusters.csv (1,324 filas)</a:t>
-            </a:r>
-          </a:p>
-          <a:p>
-            <a:pPr>
-              <a:spcAft>
-                <a:spcPts val="400"/>
-              </a:spcAft>
-              <a:defRPr sz="950" b="1">
-                <a:solidFill>
-                  <a:srgbClr val="134074"/>
-                </a:solidFill>
-                <a:latin typeface="Montserrat"/>
-              </a:defRPr>
-            </a:pPr>
-            <a:r>
-              <a:t>• CSV Galería: </a:t>
-            </a:r>
-            <a:r>
-              <a:rPr b="0">
-                <a:solidFill>
-                  <a:srgbClr val="212529"/>
-                </a:solidFill>
-              </a:rPr>
-              <a:t>reports/ejemplos_galeria_extendida.csv (25 filas estratificadas)</a:t>
-            </a:r>
-          </a:p>
-          <a:p>
-            <a:pPr>
-              <a:spcAft>
-                <a:spcPts val="400"/>
-              </a:spcAft>
-              <a:defRPr sz="950" b="1">
-                <a:solidFill>
-                  <a:srgbClr val="134074"/>
-                </a:solidFill>
-                <a:latin typeface="Montserrat"/>
-              </a:defRPr>
-            </a:pPr>
-            <a:r>
-              <a:t>• Catálogo v3.0: </a:t>
-            </a:r>
-            <a:r>
-              <a:rPr b="0">
-                <a:solidFill>
-                  <a:srgbClr val="212529"/>
-                </a:solidFill>
-              </a:rPr>
-              <a:t>data/processed/cluster_catalog_v3.csv (18 micro-clusters)</a:t>
-            </a:r>
-          </a:p>
-          <a:p>
-            <a:pPr>
-              <a:spcAft>
-                <a:spcPts val="400"/>
-              </a:spcAft>
-              <a:defRPr sz="950" b="1">
-                <a:solidFill>
-                  <a:srgbClr val="134074"/>
-                </a:solidFill>
-                <a:latin typeface="Montserrat"/>
-              </a:defRPr>
-            </a:pPr>
-            <a:r>
-              <a:t>• Auditoría Data Eng: </a:t>
-            </a:r>
-            <a:r>
-              <a:rPr b="0">
-                <a:solidFill>
-                  <a:srgbClr val="212529"/>
-                </a:solidFill>
-              </a:rPr>
-              <a:t>reports/hallazgos_blob_test_gold_20261007.md</a:t>
-            </a:r>
-          </a:p>
-          <a:p>
-            <a:pPr>
-              <a:spcAft>
-                <a:spcPts val="400"/>
-              </a:spcAft>
-              <a:defRPr sz="950" b="1">
-                <a:solidFill>
-                  <a:srgbClr val="134074"/>
-                </a:solidFill>
-                <a:latin typeface="Montserrat"/>
-              </a:defRPr>
-            </a:pPr>
-            <a:r>
-              <a:t>• Test Hermético: </a:t>
-            </a:r>
-            <a:r>
-              <a:rPr b="0">
-                <a:solidFill>
-                  <a:srgbClr val="212529"/>
-                </a:solidFill>
-              </a:rPr>
-              <a:t>tests/test_ejemplos_presentacion.py</a:t>
-            </a:r>
-          </a:p>
-          <a:p>
-            <a:pPr>
-              <a:spcAft>
-                <a:spcPts val="400"/>
-              </a:spcAft>
-              <a:defRPr sz="950" b="1">
-                <a:solidFill>
-                  <a:srgbClr val="134074"/>
-                </a:solidFill>
-                <a:latin typeface="Montserrat"/>
-              </a:defRPr>
-            </a:pPr>
-            <a:r>
-              <a:t>• Reproducibilidad: </a:t>
-            </a:r>
-            <a:r>
-              <a:rPr b="0">
-                <a:solidFill>
-                  <a:srgbClr val="212529"/>
-                </a:solidFill>
-              </a:rPr>
-              <a:t>Pipeline determinístico; scripts de generación automatizados</a:t>
-            </a:r>
-          </a:p>
-        </p:txBody>
-      </p:sp>
+        </p:spPr>
+      </p:pic>
     </p:spTree>
   </p:cSld>
   <p:clrMapOvr>
